--- a/PresentaciónEv3.pptx
+++ b/PresentaciónEv3.pptx
@@ -16,17 +16,20 @@
     <p:sldId id="264" r:id="rId14"/>
     <p:sldId id="265" r:id="rId15"/>
     <p:sldId id="266" r:id="rId16"/>
-    <p:sldId id="267" r:id="rId17"/>
   </p:sldIdLst>
   <p:sldSz cx="18288000" cy="10287000"/>
   <p:notesSz cx="6858000" cy="9144000"/>
   <p:embeddedFontLst>
     <p:embeddedFont>
       <p:font typeface="Funtastic" charset="1" panose="00000000000000000000"/>
+      <p:regular r:id="rId17"/>
+    </p:embeddedFont>
+    <p:embeddedFont>
+      <p:font typeface="Sukar" charset="1" panose="02000500000000000000"/>
       <p:regular r:id="rId18"/>
     </p:embeddedFont>
     <p:embeddedFont>
-      <p:font typeface="Sukar" charset="1" panose="02000500000000000000"/>
+      <p:font typeface="Sukar Bold" charset="1" panose="02000500000000000000"/>
       <p:regular r:id="rId19"/>
     </p:embeddedFont>
   </p:embeddedFontLst>
@@ -3142,7 +3145,7 @@
                 <a:cs typeface="Funtastic"/>
                 <a:sym typeface="Funtastic"/>
               </a:rPr>
-              <a:t>ACTIVIDAD</a:t>
+              <a:t>EVALUACIÓN 3</a:t>
             </a:r>
           </a:p>
         </p:txBody>
@@ -3710,9 +3713,9 @@
           <p:nvPr/>
         </p:nvSpPr>
         <p:spPr>
-          <a:xfrm flipH="false" flipV="false" rot="6846996">
-            <a:off x="-957053" y="-1071145"/>
-            <a:ext cx="2399729" cy="3183720"/>
+          <a:xfrm flipH="false" flipV="false" rot="3783878">
+            <a:off x="16832793" y="441609"/>
+            <a:ext cx="853014" cy="804935"/>
           </a:xfrm>
           <a:custGeom>
             <a:avLst/>
@@ -3721,18 +3724,18 @@
             <a:cxnLst/>
             <a:rect r="r" b="b" t="t" l="l"/>
             <a:pathLst>
-              <a:path h="3183720" w="2399729">
+              <a:path h="804935" w="853014">
                 <a:moveTo>
                   <a:pt x="0" y="0"/>
                 </a:moveTo>
                 <a:lnTo>
-                  <a:pt x="2399729" y="0"/>
-                </a:lnTo>
-                <a:lnTo>
-                  <a:pt x="2399729" y="3183720"/>
-                </a:lnTo>
-                <a:lnTo>
-                  <a:pt x="0" y="3183720"/>
+                  <a:pt x="853014" y="0"/>
+                </a:lnTo>
+                <a:lnTo>
+                  <a:pt x="853014" y="804936"/>
+                </a:lnTo>
+                <a:lnTo>
+                  <a:pt x="0" y="804936"/>
                 </a:lnTo>
                 <a:lnTo>
                   <a:pt x="0" y="0"/>
@@ -3762,9 +3765,9 @@
           <p:nvPr/>
         </p:nvSpPr>
         <p:spPr>
-          <a:xfrm flipH="false" flipV="false" rot="-1408795">
-            <a:off x="15093426" y="283107"/>
-            <a:ext cx="1919844" cy="2399805"/>
+          <a:xfrm flipH="false" flipV="false" rot="-2526217">
+            <a:off x="9994312" y="87352"/>
+            <a:ext cx="1404298" cy="1325147"/>
           </a:xfrm>
           <a:custGeom>
             <a:avLst/>
@@ -3773,18 +3776,70 @@
             <a:cxnLst/>
             <a:rect r="r" b="b" t="t" l="l"/>
             <a:pathLst>
-              <a:path h="2399805" w="1919844">
+              <a:path h="1325147" w="1404298">
                 <a:moveTo>
                   <a:pt x="0" y="0"/>
                 </a:moveTo>
                 <a:lnTo>
-                  <a:pt x="1919844" y="0"/>
-                </a:lnTo>
-                <a:lnTo>
-                  <a:pt x="1919844" y="2399805"/>
-                </a:lnTo>
-                <a:lnTo>
-                  <a:pt x="0" y="2399805"/>
+                  <a:pt x="1404298" y="0"/>
+                </a:lnTo>
+                <a:lnTo>
+                  <a:pt x="1404298" y="1325147"/>
+                </a:lnTo>
+                <a:lnTo>
+                  <a:pt x="0" y="1325147"/>
+                </a:lnTo>
+                <a:lnTo>
+                  <a:pt x="0" y="0"/>
+                </a:lnTo>
+                <a:close/>
+              </a:path>
+            </a:pathLst>
+          </a:custGeom>
+          <a:blipFill>
+            <a:blip r:embed="rId2">
+              <a:extLst>
+                <a:ext uri="{96DAC541-7B7A-43D3-8B79-37D633B846F1}">
+                  <asvg:svgBlip xmlns:asvg="http://schemas.microsoft.com/office/drawing/2016/SVG/main" r:embed="rId3"/>
+                </a:ext>
+              </a:extLst>
+            </a:blip>
+            <a:stretch>
+              <a:fillRect l="0" t="0" r="0" b="0"/>
+            </a:stretch>
+          </a:blipFill>
+        </p:spPr>
+      </p:sp>
+      <p:sp>
+        <p:nvSpPr>
+          <p:cNvPr name="Freeform 4" id="4"/>
+          <p:cNvSpPr/>
+          <p:nvPr/>
+        </p:nvSpPr>
+        <p:spPr>
+          <a:xfrm flipH="false" flipV="false" rot="0">
+            <a:off x="825490" y="7878941"/>
+            <a:ext cx="3848696" cy="1588462"/>
+          </a:xfrm>
+          <a:custGeom>
+            <a:avLst/>
+            <a:gdLst/>
+            <a:ahLst/>
+            <a:cxnLst/>
+            <a:rect r="r" b="b" t="t" l="l"/>
+            <a:pathLst>
+              <a:path h="1588462" w="3848696">
+                <a:moveTo>
+                  <a:pt x="0" y="0"/>
+                </a:moveTo>
+                <a:lnTo>
+                  <a:pt x="3848697" y="0"/>
+                </a:lnTo>
+                <a:lnTo>
+                  <a:pt x="3848697" y="1588462"/>
+                </a:lnTo>
+                <a:lnTo>
+                  <a:pt x="0" y="1588462"/>
                 </a:lnTo>
                 <a:lnTo>
                   <a:pt x="0" y="0"/>
@@ -3809,13 +3864,13 @@
       </p:sp>
       <p:sp>
         <p:nvSpPr>
-          <p:cNvPr name="Freeform 4" id="4"/>
+          <p:cNvPr name="Freeform 5" id="5"/>
           <p:cNvSpPr/>
           <p:nvPr/>
         </p:nvSpPr>
         <p:spPr>
-          <a:xfrm flipH="false" flipV="false" rot="3783878">
-            <a:off x="11121286" y="1643093"/>
+          <a:xfrm flipH="false" flipV="false" rot="3022968">
+            <a:off x="155487" y="9064935"/>
             <a:ext cx="853014" cy="804935"/>
           </a:xfrm>
           <a:custGeom>
@@ -3837,6 +3892,58 @@
                 </a:lnTo>
                 <a:lnTo>
                   <a:pt x="0" y="804935"/>
+                </a:lnTo>
+                <a:lnTo>
+                  <a:pt x="0" y="0"/>
+                </a:lnTo>
+                <a:close/>
+              </a:path>
+            </a:pathLst>
+          </a:custGeom>
+          <a:blipFill>
+            <a:blip r:embed="rId2">
+              <a:extLst>
+                <a:ext uri="{96DAC541-7B7A-43D3-8B79-37D633B846F1}">
+                  <asvg:svgBlip xmlns:asvg="http://schemas.microsoft.com/office/drawing/2016/SVG/main" r:embed="rId3"/>
+                </a:ext>
+              </a:extLst>
+            </a:blip>
+            <a:stretch>
+              <a:fillRect l="0" t="0" r="0" b="0"/>
+            </a:stretch>
+          </a:blipFill>
+        </p:spPr>
+      </p:sp>
+      <p:sp>
+        <p:nvSpPr>
+          <p:cNvPr name="Freeform 6" id="6"/>
+          <p:cNvSpPr/>
+          <p:nvPr/>
+        </p:nvSpPr>
+        <p:spPr>
+          <a:xfrm flipH="false" flipV="false" rot="0">
+            <a:off x="15652012" y="6447426"/>
+            <a:ext cx="2413055" cy="3345657"/>
+          </a:xfrm>
+          <a:custGeom>
+            <a:avLst/>
+            <a:gdLst/>
+            <a:ahLst/>
+            <a:cxnLst/>
+            <a:rect r="r" b="b" t="t" l="l"/>
+            <a:pathLst>
+              <a:path h="3345657" w="2413055">
+                <a:moveTo>
+                  <a:pt x="0" y="0"/>
+                </a:moveTo>
+                <a:lnTo>
+                  <a:pt x="2413054" y="0"/>
+                </a:lnTo>
+                <a:lnTo>
+                  <a:pt x="2413054" y="3345656"/>
+                </a:lnTo>
+                <a:lnTo>
+                  <a:pt x="0" y="3345656"/>
                 </a:lnTo>
                 <a:lnTo>
                   <a:pt x="0" y="0"/>
@@ -3861,14 +3968,14 @@
       </p:sp>
       <p:sp>
         <p:nvSpPr>
-          <p:cNvPr name="Freeform 5" id="5"/>
+          <p:cNvPr name="Freeform 7" id="7"/>
           <p:cNvSpPr/>
           <p:nvPr/>
         </p:nvSpPr>
         <p:spPr>
-          <a:xfrm flipH="false" flipV="false" rot="-2526217">
-            <a:off x="16530916" y="8023663"/>
-            <a:ext cx="1456769" cy="1374660"/>
+          <a:xfrm flipH="false" flipV="false" rot="6437899">
+            <a:off x="11366111" y="8826473"/>
+            <a:ext cx="1869879" cy="1764486"/>
           </a:xfrm>
           <a:custGeom>
             <a:avLst/>
@@ -3877,18 +3984,18 @@
             <a:cxnLst/>
             <a:rect r="r" b="b" t="t" l="l"/>
             <a:pathLst>
-              <a:path h="1374660" w="1456769">
+              <a:path h="1764486" w="1869879">
                 <a:moveTo>
                   <a:pt x="0" y="0"/>
                 </a:moveTo>
                 <a:lnTo>
-                  <a:pt x="1456768" y="0"/>
-                </a:lnTo>
-                <a:lnTo>
-                  <a:pt x="1456768" y="1374660"/>
-                </a:lnTo>
-                <a:lnTo>
-                  <a:pt x="0" y="1374660"/>
+                  <a:pt x="1869879" y="0"/>
+                </a:lnTo>
+                <a:lnTo>
+                  <a:pt x="1869879" y="1764486"/>
+                </a:lnTo>
+                <a:lnTo>
+                  <a:pt x="0" y="1764486"/>
                 </a:lnTo>
                 <a:lnTo>
                   <a:pt x="0" y="0"/>
@@ -3898,10 +4005,10 @@
             </a:pathLst>
           </a:custGeom>
           <a:blipFill>
-            <a:blip r:embed="rId6">
+            <a:blip r:embed="rId2">
               <a:extLst>
                 <a:ext uri="{96DAC541-7B7A-43D3-8B79-37D633B846F1}">
-                  <asvg:svgBlip xmlns:asvg="http://schemas.microsoft.com/office/drawing/2016/SVG/main" r:embed="rId7"/>
+                  <asvg:svgBlip xmlns:asvg="http://schemas.microsoft.com/office/drawing/2016/SVG/main" r:embed="rId3"/>
                 </a:ext>
               </a:extLst>
             </a:blip>
@@ -3913,14 +4020,14 @@
       </p:sp>
       <p:sp>
         <p:nvSpPr>
-          <p:cNvPr name="Freeform 6" id="6"/>
+          <p:cNvPr name="Freeform 8" id="8"/>
           <p:cNvSpPr/>
           <p:nvPr/>
         </p:nvSpPr>
         <p:spPr>
-          <a:xfrm flipH="false" flipV="false" rot="-2526217">
-            <a:off x="7428821" y="8940779"/>
-            <a:ext cx="2246425" cy="2119809"/>
+          <a:xfrm flipH="false" flipV="false" rot="-280273">
+            <a:off x="12288897" y="556097"/>
+            <a:ext cx="853014" cy="804935"/>
           </a:xfrm>
           <a:custGeom>
             <a:avLst/>
@@ -3929,18 +4036,18 @@
             <a:cxnLst/>
             <a:rect r="r" b="b" t="t" l="l"/>
             <a:pathLst>
-              <a:path h="2119809" w="2246425">
+              <a:path h="804935" w="853014">
                 <a:moveTo>
                   <a:pt x="0" y="0"/>
                 </a:moveTo>
                 <a:lnTo>
-                  <a:pt x="2246425" y="0"/>
-                </a:lnTo>
-                <a:lnTo>
-                  <a:pt x="2246425" y="2119809"/>
-                </a:lnTo>
-                <a:lnTo>
-                  <a:pt x="0" y="2119809"/>
+                  <a:pt x="853015" y="0"/>
+                </a:lnTo>
+                <a:lnTo>
+                  <a:pt x="853015" y="804935"/>
+                </a:lnTo>
+                <a:lnTo>
+                  <a:pt x="0" y="804935"/>
                 </a:lnTo>
                 <a:lnTo>
                   <a:pt x="0" y="0"/>
@@ -3950,10 +4057,10 @@
             </a:pathLst>
           </a:custGeom>
           <a:blipFill>
-            <a:blip r:embed="rId6">
+            <a:blip r:embed="rId2">
               <a:extLst>
                 <a:ext uri="{96DAC541-7B7A-43D3-8B79-37D633B846F1}">
-                  <asvg:svgBlip xmlns:asvg="http://schemas.microsoft.com/office/drawing/2016/SVG/main" r:embed="rId7"/>
+                  <asvg:svgBlip xmlns:asvg="http://schemas.microsoft.com/office/drawing/2016/SVG/main" r:embed="rId3"/>
                 </a:ext>
               </a:extLst>
             </a:blip>
@@ -3965,13 +4072,13 @@
       </p:sp>
       <p:sp>
         <p:nvSpPr>
-          <p:cNvPr name="Freeform 7" id="7"/>
+          <p:cNvPr name="Freeform 9" id="9"/>
           <p:cNvSpPr/>
           <p:nvPr/>
         </p:nvSpPr>
         <p:spPr>
-          <a:xfrm flipH="false" flipV="false" rot="-2526217">
-            <a:off x="808695" y="4475822"/>
+          <a:xfrm flipH="false" flipV="false" rot="3783878">
+            <a:off x="17217703" y="1835994"/>
             <a:ext cx="853014" cy="804935"/>
           </a:xfrm>
           <a:custGeom>
@@ -3989,10 +4096,10 @@
                   <a:pt x="853014" y="0"/>
                 </a:lnTo>
                 <a:lnTo>
-                  <a:pt x="853014" y="804935"/>
-                </a:lnTo>
-                <a:lnTo>
-                  <a:pt x="0" y="804935"/>
+                  <a:pt x="853014" y="804936"/>
+                </a:lnTo>
+                <a:lnTo>
+                  <a:pt x="0" y="804936"/>
                 </a:lnTo>
                 <a:lnTo>
                   <a:pt x="0" y="0"/>
@@ -4002,10 +4109,10 @@
             </a:pathLst>
           </a:custGeom>
           <a:blipFill>
-            <a:blip r:embed="rId6">
+            <a:blip r:embed="rId2">
               <a:extLst>
                 <a:ext uri="{96DAC541-7B7A-43D3-8B79-37D633B846F1}">
-                  <asvg:svgBlip xmlns:asvg="http://schemas.microsoft.com/office/drawing/2016/SVG/main" r:embed="rId7"/>
+                  <asvg:svgBlip xmlns:asvg="http://schemas.microsoft.com/office/drawing/2016/SVG/main" r:embed="rId3"/>
                 </a:ext>
               </a:extLst>
             </a:blip>
@@ -4017,14 +4124,66 @@
       </p:sp>
       <p:sp>
         <p:nvSpPr>
-          <p:cNvPr name="TextBox 8" id="8"/>
+          <p:cNvPr name="Freeform 10" id="10"/>
+          <p:cNvSpPr/>
+          <p:nvPr/>
+        </p:nvSpPr>
+        <p:spPr>
+          <a:xfrm flipH="false" flipV="false" rot="3270670">
+            <a:off x="15978193" y="3334673"/>
+            <a:ext cx="1869879" cy="1764486"/>
+          </a:xfrm>
+          <a:custGeom>
+            <a:avLst/>
+            <a:gdLst/>
+            <a:ahLst/>
+            <a:cxnLst/>
+            <a:rect r="r" b="b" t="t" l="l"/>
+            <a:pathLst>
+              <a:path h="1764486" w="1869879">
+                <a:moveTo>
+                  <a:pt x="0" y="0"/>
+                </a:moveTo>
+                <a:lnTo>
+                  <a:pt x="1869879" y="0"/>
+                </a:lnTo>
+                <a:lnTo>
+                  <a:pt x="1869879" y="1764486"/>
+                </a:lnTo>
+                <a:lnTo>
+                  <a:pt x="0" y="1764486"/>
+                </a:lnTo>
+                <a:lnTo>
+                  <a:pt x="0" y="0"/>
+                </a:lnTo>
+                <a:close/>
+              </a:path>
+            </a:pathLst>
+          </a:custGeom>
+          <a:blipFill>
+            <a:blip r:embed="rId2">
+              <a:extLst>
+                <a:ext uri="{96DAC541-7B7A-43D3-8B79-37D633B846F1}">
+                  <asvg:svgBlip xmlns:asvg="http://schemas.microsoft.com/office/drawing/2016/SVG/main" r:embed="rId3"/>
+                </a:ext>
+              </a:extLst>
+            </a:blip>
+            <a:stretch>
+              <a:fillRect l="0" t="0" r="0" b="0"/>
+            </a:stretch>
+          </a:blipFill>
+        </p:spPr>
+      </p:sp>
+      <p:sp>
+        <p:nvSpPr>
+          <p:cNvPr name="TextBox 11" id="11"/>
           <p:cNvSpPr txBox="true"/>
           <p:nvPr/>
         </p:nvSpPr>
         <p:spPr>
           <a:xfrm rot="0">
-            <a:off x="2551568" y="181141"/>
-            <a:ext cx="13184864" cy="2426970"/>
+            <a:off x="85338" y="2037554"/>
+            <a:ext cx="11712272" cy="763459"/>
           </a:xfrm>
           <a:prstGeom prst="rect">
             <a:avLst/>
@@ -4036,13 +4195,307 @@
           </a:bodyPr>
           <a:lstStyle/>
           <a:p>
+            <a:pPr algn="l" marL="1004791" indent="-502396" lvl="1">
+              <a:lnSpc>
+                <a:spcPts val="5258"/>
+              </a:lnSpc>
+              <a:buFont typeface="Arial"/>
+              <a:buChar char="•"/>
+            </a:pPr>
+            <a:r>
+              <a:rPr lang="en-US" sz="4653">
+                <a:solidFill>
+                  <a:srgbClr val="616164"/>
+                </a:solidFill>
+                <a:latin typeface="Funtastic"/>
+                <a:ea typeface="Funtastic"/>
+                <a:cs typeface="Funtastic"/>
+                <a:sym typeface="Funtastic"/>
+              </a:rPr>
+              <a:t>Github</a:t>
+            </a:r>
+          </a:p>
+        </p:txBody>
+      </p:sp>
+      <p:sp>
+        <p:nvSpPr>
+          <p:cNvPr name="TextBox 12" id="12"/>
+          <p:cNvSpPr txBox="true"/>
+          <p:nvPr/>
+        </p:nvSpPr>
+        <p:spPr>
+          <a:xfrm rot="0">
+            <a:off x="85338" y="7026276"/>
+            <a:ext cx="11712272" cy="763459"/>
+          </a:xfrm>
+          <a:prstGeom prst="rect">
+            <a:avLst/>
+          </a:prstGeom>
+        </p:spPr>
+        <p:txBody>
+          <a:bodyPr anchor="t" rtlCol="false" tIns="0" lIns="0" bIns="0" rIns="0">
+            <a:spAutoFit/>
+          </a:bodyPr>
+          <a:lstStyle/>
+          <a:p>
+            <a:pPr algn="l" marL="1004791" indent="-502396" lvl="1">
+              <a:lnSpc>
+                <a:spcPts val="5258"/>
+              </a:lnSpc>
+              <a:buFont typeface="Arial"/>
+              <a:buChar char="•"/>
+            </a:pPr>
+            <a:r>
+              <a:rPr lang="en-US" sz="4653">
+                <a:solidFill>
+                  <a:srgbClr val="616164"/>
+                </a:solidFill>
+                <a:latin typeface="Funtastic"/>
+                <a:ea typeface="Funtastic"/>
+                <a:cs typeface="Funtastic"/>
+                <a:sym typeface="Funtastic"/>
+              </a:rPr>
+              <a:t>Comunicación</a:t>
+            </a:r>
+          </a:p>
+        </p:txBody>
+      </p:sp>
+      <p:sp>
+        <p:nvSpPr>
+          <p:cNvPr name="Freeform 13" id="13"/>
+          <p:cNvSpPr/>
+          <p:nvPr/>
+        </p:nvSpPr>
+        <p:spPr>
+          <a:xfrm flipH="false" flipV="false" rot="0">
+            <a:off x="581994" y="3306177"/>
+            <a:ext cx="6738712" cy="2781250"/>
+          </a:xfrm>
+          <a:custGeom>
+            <a:avLst/>
+            <a:gdLst/>
+            <a:ahLst/>
+            <a:cxnLst/>
+            <a:rect r="r" b="b" t="t" l="l"/>
+            <a:pathLst>
+              <a:path h="2781250" w="6738712">
+                <a:moveTo>
+                  <a:pt x="0" y="0"/>
+                </a:moveTo>
+                <a:lnTo>
+                  <a:pt x="6738712" y="0"/>
+                </a:lnTo>
+                <a:lnTo>
+                  <a:pt x="6738712" y="2781250"/>
+                </a:lnTo>
+                <a:lnTo>
+                  <a:pt x="0" y="2781250"/>
+                </a:lnTo>
+                <a:lnTo>
+                  <a:pt x="0" y="0"/>
+                </a:lnTo>
+                <a:close/>
+              </a:path>
+            </a:pathLst>
+          </a:custGeom>
+          <a:blipFill>
+            <a:blip r:embed="rId4">
+              <a:extLst>
+                <a:ext uri="{96DAC541-7B7A-43D3-8B79-37D633B846F1}">
+                  <asvg:svgBlip xmlns:asvg="http://schemas.microsoft.com/office/drawing/2016/SVG/main" r:embed="rId5"/>
+                </a:ext>
+              </a:extLst>
+            </a:blip>
+            <a:stretch>
+              <a:fillRect l="0" t="0" r="0" b="0"/>
+            </a:stretch>
+          </a:blipFill>
+        </p:spPr>
+      </p:sp>
+      <p:sp>
+        <p:nvSpPr>
+          <p:cNvPr name="Freeform 14" id="14"/>
+          <p:cNvSpPr/>
+          <p:nvPr/>
+        </p:nvSpPr>
+        <p:spPr>
+          <a:xfrm flipH="false" flipV="false" rot="0">
+            <a:off x="581994" y="2943481"/>
+            <a:ext cx="6738712" cy="2781250"/>
+          </a:xfrm>
+          <a:custGeom>
+            <a:avLst/>
+            <a:gdLst/>
+            <a:ahLst/>
+            <a:cxnLst/>
+            <a:rect r="r" b="b" t="t" l="l"/>
+            <a:pathLst>
+              <a:path h="2781250" w="6738712">
+                <a:moveTo>
+                  <a:pt x="0" y="0"/>
+                </a:moveTo>
+                <a:lnTo>
+                  <a:pt x="6738712" y="0"/>
+                </a:lnTo>
+                <a:lnTo>
+                  <a:pt x="6738712" y="2781250"/>
+                </a:lnTo>
+                <a:lnTo>
+                  <a:pt x="0" y="2781250"/>
+                </a:lnTo>
+                <a:lnTo>
+                  <a:pt x="0" y="0"/>
+                </a:lnTo>
+                <a:close/>
+              </a:path>
+            </a:pathLst>
+          </a:custGeom>
+          <a:blipFill>
+            <a:blip r:embed="rId4">
+              <a:extLst>
+                <a:ext uri="{96DAC541-7B7A-43D3-8B79-37D633B846F1}">
+                  <asvg:svgBlip xmlns:asvg="http://schemas.microsoft.com/office/drawing/2016/SVG/main" r:embed="rId5"/>
+                </a:ext>
+              </a:extLst>
+            </a:blip>
+            <a:stretch>
+              <a:fillRect l="0" t="0" r="0" b="0"/>
+            </a:stretch>
+          </a:blipFill>
+        </p:spPr>
+      </p:sp>
+      <p:sp>
+        <p:nvSpPr>
+          <p:cNvPr name="Freeform 15" id="15"/>
+          <p:cNvSpPr/>
+          <p:nvPr/>
+        </p:nvSpPr>
+        <p:spPr>
+          <a:xfrm flipH="false" flipV="false" rot="0">
+            <a:off x="3783851" y="7895046"/>
+            <a:ext cx="3848696" cy="1588462"/>
+          </a:xfrm>
+          <a:custGeom>
+            <a:avLst/>
+            <a:gdLst/>
+            <a:ahLst/>
+            <a:cxnLst/>
+            <a:rect r="r" b="b" t="t" l="l"/>
+            <a:pathLst>
+              <a:path h="1588462" w="3848696">
+                <a:moveTo>
+                  <a:pt x="0" y="0"/>
+                </a:moveTo>
+                <a:lnTo>
+                  <a:pt x="3848697" y="0"/>
+                </a:lnTo>
+                <a:lnTo>
+                  <a:pt x="3848697" y="1588462"/>
+                </a:lnTo>
+                <a:lnTo>
+                  <a:pt x="0" y="1588462"/>
+                </a:lnTo>
+                <a:lnTo>
+                  <a:pt x="0" y="0"/>
+                </a:lnTo>
+                <a:close/>
+              </a:path>
+            </a:pathLst>
+          </a:custGeom>
+          <a:blipFill>
+            <a:blip r:embed="rId4">
+              <a:extLst>
+                <a:ext uri="{96DAC541-7B7A-43D3-8B79-37D633B846F1}">
+                  <asvg:svgBlip xmlns:asvg="http://schemas.microsoft.com/office/drawing/2016/SVG/main" r:embed="rId5"/>
+                </a:ext>
+              </a:extLst>
+            </a:blip>
+            <a:stretch>
+              <a:fillRect l="0" t="0" r="0" b="0"/>
+            </a:stretch>
+          </a:blipFill>
+        </p:spPr>
+      </p:sp>
+      <p:sp>
+        <p:nvSpPr>
+          <p:cNvPr name="Freeform 16" id="16"/>
+          <p:cNvSpPr/>
+          <p:nvPr/>
+        </p:nvSpPr>
+        <p:spPr>
+          <a:xfrm flipH="false" flipV="false" rot="0">
+            <a:off x="11248923" y="7895046"/>
+            <a:ext cx="3848696" cy="1588462"/>
+          </a:xfrm>
+          <a:custGeom>
+            <a:avLst/>
+            <a:gdLst/>
+            <a:ahLst/>
+            <a:cxnLst/>
+            <a:rect r="r" b="b" t="t" l="l"/>
+            <a:pathLst>
+              <a:path h="1588462" w="3848696">
+                <a:moveTo>
+                  <a:pt x="0" y="0"/>
+                </a:moveTo>
+                <a:lnTo>
+                  <a:pt x="3848696" y="0"/>
+                </a:lnTo>
+                <a:lnTo>
+                  <a:pt x="3848696" y="1588462"/>
+                </a:lnTo>
+                <a:lnTo>
+                  <a:pt x="0" y="1588462"/>
+                </a:lnTo>
+                <a:lnTo>
+                  <a:pt x="0" y="0"/>
+                </a:lnTo>
+                <a:close/>
+              </a:path>
+            </a:pathLst>
+          </a:custGeom>
+          <a:blipFill>
+            <a:blip r:embed="rId4">
+              <a:extLst>
+                <a:ext uri="{96DAC541-7B7A-43D3-8B79-37D633B846F1}">
+                  <asvg:svgBlip xmlns:asvg="http://schemas.microsoft.com/office/drawing/2016/SVG/main" r:embed="rId5"/>
+                </a:ext>
+              </a:extLst>
+            </a:blip>
+            <a:stretch>
+              <a:fillRect l="0" t="0" r="0" b="0"/>
+            </a:stretch>
+          </a:blipFill>
+        </p:spPr>
+      </p:sp>
+      <p:sp>
+        <p:nvSpPr>
+          <p:cNvPr name="TextBox 17" id="17"/>
+          <p:cNvSpPr txBox="true"/>
+          <p:nvPr/>
+        </p:nvSpPr>
+        <p:spPr>
+          <a:xfrm rot="0">
+            <a:off x="581994" y="272001"/>
+            <a:ext cx="17946749" cy="1072515"/>
+          </a:xfrm>
+          <a:prstGeom prst="rect">
+            <a:avLst/>
+          </a:prstGeom>
+        </p:spPr>
+        <p:txBody>
+          <a:bodyPr anchor="t" rtlCol="false" tIns="0" lIns="0" bIns="0" rIns="0">
+            <a:spAutoFit/>
+          </a:bodyPr>
+          <a:lstStyle/>
+          <a:p>
             <a:pPr algn="l">
               <a:lnSpc>
-                <a:spcPts val="5939"/>
+                <a:spcPts val="6929"/>
               </a:lnSpc>
             </a:pPr>
             <a:r>
-              <a:rPr lang="en-US" sz="5999">
+              <a:rPr lang="en-US" sz="6999">
                 <a:solidFill>
                   <a:srgbClr val="925000"/>
                 </a:solidFill>
@@ -4051,21 +4504,62 @@
                 <a:cs typeface="Funtastic"/>
                 <a:sym typeface="Funtastic"/>
               </a:rPr>
-              <a:t>dashboard (relevantes y/o graficos de categorias) 3 0 4 KPI y 3 0 4 graficos importantes</a:t>
+              <a:t>Trabajo colaborativo</a:t>
             </a:r>
           </a:p>
         </p:txBody>
       </p:sp>
       <p:sp>
         <p:nvSpPr>
-          <p:cNvPr name="Freeform 9" id="9"/>
+          <p:cNvPr name="TextBox 18" id="18"/>
+          <p:cNvSpPr txBox="true"/>
+          <p:nvPr/>
+        </p:nvSpPr>
+        <p:spPr>
+          <a:xfrm rot="0">
+            <a:off x="1028700" y="3381854"/>
+            <a:ext cx="6060565" cy="2081022"/>
+          </a:xfrm>
+          <a:prstGeom prst="rect">
+            <a:avLst/>
+          </a:prstGeom>
+        </p:spPr>
+        <p:txBody>
+          <a:bodyPr anchor="t" rtlCol="false" tIns="0" lIns="0" bIns="0" rIns="0">
+            <a:spAutoFit/>
+          </a:bodyPr>
+          <a:lstStyle/>
+          <a:p>
+            <a:pPr algn="l">
+              <a:lnSpc>
+                <a:spcPts val="4059"/>
+              </a:lnSpc>
+            </a:pPr>
+            <a:r>
+              <a:rPr lang="en-US" sz="4100">
+                <a:solidFill>
+                  <a:srgbClr val="A66B49"/>
+                </a:solidFill>
+                <a:latin typeface="Sukar"/>
+                <a:ea typeface="Sukar"/>
+                <a:cs typeface="Sukar"/>
+                <a:sym typeface="Sukar"/>
+              </a:rPr>
+              <a:t>Utilizamos github para poder registrar nuestro avance y cambios a travéz del proyecto</a:t>
+            </a:r>
+          </a:p>
+        </p:txBody>
+      </p:sp>
+      <p:sp>
+        <p:nvSpPr>
+          <p:cNvPr name="Freeform 19" id="19"/>
           <p:cNvSpPr/>
           <p:nvPr/>
         </p:nvSpPr>
         <p:spPr>
           <a:xfrm flipH="false" flipV="false" rot="0">
-            <a:off x="530245" y="2458565"/>
-            <a:ext cx="8114848" cy="6799735"/>
+            <a:off x="6617844" y="7878941"/>
+            <a:ext cx="3848696" cy="1588462"/>
           </a:xfrm>
           <a:custGeom>
             <a:avLst/>
@@ -4074,18 +4568,18 @@
             <a:cxnLst/>
             <a:rect r="r" b="b" t="t" l="l"/>
             <a:pathLst>
-              <a:path h="6799735" w="8114848">
+              <a:path h="1588462" w="3848696">
                 <a:moveTo>
                   <a:pt x="0" y="0"/>
                 </a:moveTo>
                 <a:lnTo>
-                  <a:pt x="8114848" y="0"/>
-                </a:lnTo>
-                <a:lnTo>
-                  <a:pt x="8114848" y="6799735"/>
-                </a:lnTo>
-                <a:lnTo>
-                  <a:pt x="0" y="6799735"/>
+                  <a:pt x="3848696" y="0"/>
+                </a:lnTo>
+                <a:lnTo>
+                  <a:pt x="3848696" y="1588462"/>
+                </a:lnTo>
+                <a:lnTo>
+                  <a:pt x="0" y="1588462"/>
                 </a:lnTo>
                 <a:lnTo>
                   <a:pt x="0" y="0"/>
@@ -4095,7 +4589,13 @@
             </a:pathLst>
           </a:custGeom>
           <a:blipFill>
-            <a:blip r:embed="rId8"/>
+            <a:blip r:embed="rId4">
+              <a:extLst>
+                <a:ext uri="{96DAC541-7B7A-43D3-8B79-37D633B846F1}">
+                  <asvg:svgBlip xmlns:asvg="http://schemas.microsoft.com/office/drawing/2016/SVG/main" r:embed="rId5"/>
+                </a:ext>
+              </a:extLst>
+            </a:blip>
             <a:stretch>
               <a:fillRect l="0" t="0" r="0" b="0"/>
             </a:stretch>
@@ -4104,14 +4604,14 @@
       </p:sp>
       <p:sp>
         <p:nvSpPr>
-          <p:cNvPr name="Freeform 10" id="10"/>
+          <p:cNvPr name="Freeform 20" id="20"/>
           <p:cNvSpPr/>
           <p:nvPr/>
         </p:nvSpPr>
         <p:spPr>
           <a:xfrm flipH="false" flipV="false" rot="0">
-            <a:off x="8890415" y="2458565"/>
-            <a:ext cx="8521448" cy="6799735"/>
+            <a:off x="9144000" y="7895046"/>
+            <a:ext cx="3848696" cy="1588462"/>
           </a:xfrm>
           <a:custGeom>
             <a:avLst/>
@@ -4120,18 +4620,18 @@
             <a:cxnLst/>
             <a:rect r="r" b="b" t="t" l="l"/>
             <a:pathLst>
-              <a:path h="6799735" w="8521448">
+              <a:path h="1588462" w="3848696">
                 <a:moveTo>
                   <a:pt x="0" y="0"/>
                 </a:moveTo>
                 <a:lnTo>
-                  <a:pt x="8521448" y="0"/>
-                </a:lnTo>
-                <a:lnTo>
-                  <a:pt x="8521448" y="6799735"/>
-                </a:lnTo>
-                <a:lnTo>
-                  <a:pt x="0" y="6799735"/>
+                  <a:pt x="3848696" y="0"/>
+                </a:lnTo>
+                <a:lnTo>
+                  <a:pt x="3848696" y="1588462"/>
+                </a:lnTo>
+                <a:lnTo>
+                  <a:pt x="0" y="1588462"/>
                 </a:lnTo>
                 <a:lnTo>
                   <a:pt x="0" y="0"/>
@@ -4141,12 +4641,59 @@
             </a:pathLst>
           </a:custGeom>
           <a:blipFill>
-            <a:blip r:embed="rId9"/>
+            <a:blip r:embed="rId4">
+              <a:extLst>
+                <a:ext uri="{96DAC541-7B7A-43D3-8B79-37D633B846F1}">
+                  <asvg:svgBlip xmlns:asvg="http://schemas.microsoft.com/office/drawing/2016/SVG/main" r:embed="rId5"/>
+                </a:ext>
+              </a:extLst>
+            </a:blip>
             <a:stretch>
-              <a:fillRect l="-1276" t="0" r="-1276" b="0"/>
+              <a:fillRect l="0" t="0" r="0" b="0"/>
             </a:stretch>
           </a:blipFill>
         </p:spPr>
+      </p:sp>
+      <p:sp>
+        <p:nvSpPr>
+          <p:cNvPr name="TextBox 21" id="21"/>
+          <p:cNvSpPr txBox="true"/>
+          <p:nvPr/>
+        </p:nvSpPr>
+        <p:spPr>
+          <a:xfrm rot="0">
+            <a:off x="1028700" y="8205979"/>
+            <a:ext cx="14336515" cy="1052321"/>
+          </a:xfrm>
+          <a:prstGeom prst="rect">
+            <a:avLst/>
+          </a:prstGeom>
+        </p:spPr>
+        <p:txBody>
+          <a:bodyPr anchor="t" rtlCol="false" tIns="0" lIns="0" bIns="0" rIns="0">
+            <a:spAutoFit/>
+          </a:bodyPr>
+          <a:lstStyle/>
+          <a:p>
+            <a:pPr algn="l">
+              <a:lnSpc>
+                <a:spcPts val="4058"/>
+              </a:lnSpc>
+            </a:pPr>
+            <a:r>
+              <a:rPr lang="en-US" sz="4099">
+                <a:solidFill>
+                  <a:srgbClr val="A66B49"/>
+                </a:solidFill>
+                <a:latin typeface="Sukar"/>
+                <a:ea typeface="Sukar"/>
+                <a:cs typeface="Sukar"/>
+                <a:sym typeface="Sukar"/>
+              </a:rPr>
+              <a:t>La mayor comunicación fue presencial, pero también se utilizarón apps como Discord, Correo, WhatsApp, etc.</a:t>
+            </a:r>
+          </a:p>
+        </p:txBody>
       </p:sp>
     </p:spTree>
   </p:cSld>
@@ -4187,566 +4734,6 @@
           <p:nvPr/>
         </p:nvSpPr>
         <p:spPr>
-          <a:xfrm flipH="false" flipV="false" rot="1168799">
-            <a:off x="16706489" y="1355462"/>
-            <a:ext cx="1233161" cy="1163656"/>
-          </a:xfrm>
-          <a:custGeom>
-            <a:avLst/>
-            <a:gdLst/>
-            <a:ahLst/>
-            <a:cxnLst/>
-            <a:rect r="r" b="b" t="t" l="l"/>
-            <a:pathLst>
-              <a:path h="1163656" w="1233161">
-                <a:moveTo>
-                  <a:pt x="0" y="0"/>
-                </a:moveTo>
-                <a:lnTo>
-                  <a:pt x="1233161" y="0"/>
-                </a:lnTo>
-                <a:lnTo>
-                  <a:pt x="1233161" y="1163656"/>
-                </a:lnTo>
-                <a:lnTo>
-                  <a:pt x="0" y="1163656"/>
-                </a:lnTo>
-                <a:lnTo>
-                  <a:pt x="0" y="0"/>
-                </a:lnTo>
-                <a:close/>
-              </a:path>
-            </a:pathLst>
-          </a:custGeom>
-          <a:blipFill>
-            <a:blip r:embed="rId2">
-              <a:extLst>
-                <a:ext uri="{96DAC541-7B7A-43D3-8B79-37D633B846F1}">
-                  <asvg:svgBlip xmlns:asvg="http://schemas.microsoft.com/office/drawing/2016/SVG/main" r:embed="rId3"/>
-                </a:ext>
-              </a:extLst>
-            </a:blip>
-            <a:stretch>
-              <a:fillRect l="0" t="0" r="0" b="0"/>
-            </a:stretch>
-          </a:blipFill>
-        </p:spPr>
-      </p:sp>
-      <p:sp>
-        <p:nvSpPr>
-          <p:cNvPr name="Freeform 3" id="3"/>
-          <p:cNvSpPr/>
-          <p:nvPr/>
-        </p:nvSpPr>
-        <p:spPr>
-          <a:xfrm flipH="false" flipV="false" rot="-2526217">
-            <a:off x="15789759" y="8011161"/>
-            <a:ext cx="1404298" cy="1325147"/>
-          </a:xfrm>
-          <a:custGeom>
-            <a:avLst/>
-            <a:gdLst/>
-            <a:ahLst/>
-            <a:cxnLst/>
-            <a:rect r="r" b="b" t="t" l="l"/>
-            <a:pathLst>
-              <a:path h="1325147" w="1404298">
-                <a:moveTo>
-                  <a:pt x="0" y="0"/>
-                </a:moveTo>
-                <a:lnTo>
-                  <a:pt x="1404298" y="0"/>
-                </a:lnTo>
-                <a:lnTo>
-                  <a:pt x="1404298" y="1325146"/>
-                </a:lnTo>
-                <a:lnTo>
-                  <a:pt x="0" y="1325146"/>
-                </a:lnTo>
-                <a:lnTo>
-                  <a:pt x="0" y="0"/>
-                </a:lnTo>
-                <a:close/>
-              </a:path>
-            </a:pathLst>
-          </a:custGeom>
-          <a:blipFill>
-            <a:blip r:embed="rId2">
-              <a:extLst>
-                <a:ext uri="{96DAC541-7B7A-43D3-8B79-37D633B846F1}">
-                  <asvg:svgBlip xmlns:asvg="http://schemas.microsoft.com/office/drawing/2016/SVG/main" r:embed="rId3"/>
-                </a:ext>
-              </a:extLst>
-            </a:blip>
-            <a:stretch>
-              <a:fillRect l="0" t="0" r="0" b="0"/>
-            </a:stretch>
-          </a:blipFill>
-        </p:spPr>
-      </p:sp>
-      <p:sp>
-        <p:nvSpPr>
-          <p:cNvPr name="Freeform 4" id="4"/>
-          <p:cNvSpPr/>
-          <p:nvPr/>
-        </p:nvSpPr>
-        <p:spPr>
-          <a:xfrm flipH="false" flipV="false" rot="-2526217">
-            <a:off x="967707" y="8855832"/>
-            <a:ext cx="853014" cy="804935"/>
-          </a:xfrm>
-          <a:custGeom>
-            <a:avLst/>
-            <a:gdLst/>
-            <a:ahLst/>
-            <a:cxnLst/>
-            <a:rect r="r" b="b" t="t" l="l"/>
-            <a:pathLst>
-              <a:path h="804935" w="853014">
-                <a:moveTo>
-                  <a:pt x="0" y="0"/>
-                </a:moveTo>
-                <a:lnTo>
-                  <a:pt x="853014" y="0"/>
-                </a:lnTo>
-                <a:lnTo>
-                  <a:pt x="853014" y="804936"/>
-                </a:lnTo>
-                <a:lnTo>
-                  <a:pt x="0" y="804936"/>
-                </a:lnTo>
-                <a:lnTo>
-                  <a:pt x="0" y="0"/>
-                </a:lnTo>
-                <a:close/>
-              </a:path>
-            </a:pathLst>
-          </a:custGeom>
-          <a:blipFill>
-            <a:blip r:embed="rId2">
-              <a:extLst>
-                <a:ext uri="{96DAC541-7B7A-43D3-8B79-37D633B846F1}">
-                  <asvg:svgBlip xmlns:asvg="http://schemas.microsoft.com/office/drawing/2016/SVG/main" r:embed="rId3"/>
-                </a:ext>
-              </a:extLst>
-            </a:blip>
-            <a:stretch>
-              <a:fillRect l="0" t="0" r="0" b="0"/>
-            </a:stretch>
-          </a:blipFill>
-        </p:spPr>
-      </p:sp>
-      <p:sp>
-        <p:nvSpPr>
-          <p:cNvPr name="Freeform 5" id="5"/>
-          <p:cNvSpPr/>
-          <p:nvPr/>
-        </p:nvSpPr>
-        <p:spPr>
-          <a:xfrm flipH="false" flipV="false" rot="1168799">
-            <a:off x="-422486" y="-307267"/>
-            <a:ext cx="1233161" cy="1163656"/>
-          </a:xfrm>
-          <a:custGeom>
-            <a:avLst/>
-            <a:gdLst/>
-            <a:ahLst/>
-            <a:cxnLst/>
-            <a:rect r="r" b="b" t="t" l="l"/>
-            <a:pathLst>
-              <a:path h="1163656" w="1233161">
-                <a:moveTo>
-                  <a:pt x="0" y="0"/>
-                </a:moveTo>
-                <a:lnTo>
-                  <a:pt x="1233161" y="0"/>
-                </a:lnTo>
-                <a:lnTo>
-                  <a:pt x="1233161" y="1163656"/>
-                </a:lnTo>
-                <a:lnTo>
-                  <a:pt x="0" y="1163656"/>
-                </a:lnTo>
-                <a:lnTo>
-                  <a:pt x="0" y="0"/>
-                </a:lnTo>
-                <a:close/>
-              </a:path>
-            </a:pathLst>
-          </a:custGeom>
-          <a:blipFill>
-            <a:blip r:embed="rId2">
-              <a:extLst>
-                <a:ext uri="{96DAC541-7B7A-43D3-8B79-37D633B846F1}">
-                  <asvg:svgBlip xmlns:asvg="http://schemas.microsoft.com/office/drawing/2016/SVG/main" r:embed="rId3"/>
-                </a:ext>
-              </a:extLst>
-            </a:blip>
-            <a:stretch>
-              <a:fillRect l="0" t="0" r="0" b="0"/>
-            </a:stretch>
-          </a:blipFill>
-        </p:spPr>
-      </p:sp>
-      <p:sp>
-        <p:nvSpPr>
-          <p:cNvPr name="Freeform 6" id="6"/>
-          <p:cNvSpPr/>
-          <p:nvPr/>
-        </p:nvSpPr>
-        <p:spPr>
-          <a:xfrm flipH="false" flipV="false" rot="1154730">
-            <a:off x="2193422" y="9233624"/>
-            <a:ext cx="853014" cy="804935"/>
-          </a:xfrm>
-          <a:custGeom>
-            <a:avLst/>
-            <a:gdLst/>
-            <a:ahLst/>
-            <a:cxnLst/>
-            <a:rect r="r" b="b" t="t" l="l"/>
-            <a:pathLst>
-              <a:path h="804935" w="853014">
-                <a:moveTo>
-                  <a:pt x="0" y="0"/>
-                </a:moveTo>
-                <a:lnTo>
-                  <a:pt x="853015" y="0"/>
-                </a:lnTo>
-                <a:lnTo>
-                  <a:pt x="853015" y="804935"/>
-                </a:lnTo>
-                <a:lnTo>
-                  <a:pt x="0" y="804935"/>
-                </a:lnTo>
-                <a:lnTo>
-                  <a:pt x="0" y="0"/>
-                </a:lnTo>
-                <a:close/>
-              </a:path>
-            </a:pathLst>
-          </a:custGeom>
-          <a:blipFill>
-            <a:blip r:embed="rId2">
-              <a:extLst>
-                <a:ext uri="{96DAC541-7B7A-43D3-8B79-37D633B846F1}">
-                  <asvg:svgBlip xmlns:asvg="http://schemas.microsoft.com/office/drawing/2016/SVG/main" r:embed="rId3"/>
-                </a:ext>
-              </a:extLst>
-            </a:blip>
-            <a:stretch>
-              <a:fillRect l="0" t="0" r="0" b="0"/>
-            </a:stretch>
-          </a:blipFill>
-        </p:spPr>
-      </p:sp>
-      <p:sp>
-        <p:nvSpPr>
-          <p:cNvPr name="Freeform 7" id="7"/>
-          <p:cNvSpPr/>
-          <p:nvPr/>
-        </p:nvSpPr>
-        <p:spPr>
-          <a:xfrm flipH="false" flipV="false" rot="-1120371">
-            <a:off x="14782440" y="9143990"/>
-            <a:ext cx="853014" cy="804935"/>
-          </a:xfrm>
-          <a:custGeom>
-            <a:avLst/>
-            <a:gdLst/>
-            <a:ahLst/>
-            <a:cxnLst/>
-            <a:rect r="r" b="b" t="t" l="l"/>
-            <a:pathLst>
-              <a:path h="804935" w="853014">
-                <a:moveTo>
-                  <a:pt x="0" y="0"/>
-                </a:moveTo>
-                <a:lnTo>
-                  <a:pt x="853015" y="0"/>
-                </a:lnTo>
-                <a:lnTo>
-                  <a:pt x="853015" y="804935"/>
-                </a:lnTo>
-                <a:lnTo>
-                  <a:pt x="0" y="804935"/>
-                </a:lnTo>
-                <a:lnTo>
-                  <a:pt x="0" y="0"/>
-                </a:lnTo>
-                <a:close/>
-              </a:path>
-            </a:pathLst>
-          </a:custGeom>
-          <a:blipFill>
-            <a:blip r:embed="rId2">
-              <a:extLst>
-                <a:ext uri="{96DAC541-7B7A-43D3-8B79-37D633B846F1}">
-                  <asvg:svgBlip xmlns:asvg="http://schemas.microsoft.com/office/drawing/2016/SVG/main" r:embed="rId3"/>
-                </a:ext>
-              </a:extLst>
-            </a:blip>
-            <a:stretch>
-              <a:fillRect l="0" t="0" r="0" b="0"/>
-            </a:stretch>
-          </a:blipFill>
-        </p:spPr>
-      </p:sp>
-      <p:sp>
-        <p:nvSpPr>
-          <p:cNvPr name="TextBox 8" id="8"/>
-          <p:cNvSpPr txBox="true"/>
-          <p:nvPr/>
-        </p:nvSpPr>
-        <p:spPr>
-          <a:xfrm rot="0">
-            <a:off x="1028700" y="538360"/>
-            <a:ext cx="8667679" cy="1674495"/>
-          </a:xfrm>
-          <a:prstGeom prst="rect">
-            <a:avLst/>
-          </a:prstGeom>
-        </p:spPr>
-        <p:txBody>
-          <a:bodyPr anchor="t" rtlCol="false" tIns="0" lIns="0" bIns="0" rIns="0">
-            <a:spAutoFit/>
-          </a:bodyPr>
-          <a:lstStyle/>
-          <a:p>
-            <a:pPr algn="l">
-              <a:lnSpc>
-                <a:spcPts val="5939"/>
-              </a:lnSpc>
-            </a:pPr>
-            <a:r>
-              <a:rPr lang="en-US" sz="5999">
-                <a:solidFill>
-                  <a:srgbClr val="925000"/>
-                </a:solidFill>
-                <a:latin typeface="Funtastic"/>
-                <a:ea typeface="Funtastic"/>
-                <a:cs typeface="Funtastic"/>
-                <a:sym typeface="Funtastic"/>
-              </a:rPr>
-              <a:t>Hallazgos, conclusiones y recomendaciones</a:t>
-            </a:r>
-          </a:p>
-        </p:txBody>
-      </p:sp>
-      <p:sp>
-        <p:nvSpPr>
-          <p:cNvPr name="Freeform 9" id="9"/>
-          <p:cNvSpPr/>
-          <p:nvPr/>
-        </p:nvSpPr>
-        <p:spPr>
-          <a:xfrm flipH="false" flipV="false" rot="-1760014">
-            <a:off x="14815090" y="3419650"/>
-            <a:ext cx="3465334" cy="4880752"/>
-          </a:xfrm>
-          <a:custGeom>
-            <a:avLst/>
-            <a:gdLst/>
-            <a:ahLst/>
-            <a:cxnLst/>
-            <a:rect r="r" b="b" t="t" l="l"/>
-            <a:pathLst>
-              <a:path h="4880752" w="3465334">
-                <a:moveTo>
-                  <a:pt x="0" y="0"/>
-                </a:moveTo>
-                <a:lnTo>
-                  <a:pt x="3465334" y="0"/>
-                </a:lnTo>
-                <a:lnTo>
-                  <a:pt x="3465334" y="4880752"/>
-                </a:lnTo>
-                <a:lnTo>
-                  <a:pt x="0" y="4880752"/>
-                </a:lnTo>
-                <a:lnTo>
-                  <a:pt x="0" y="0"/>
-                </a:lnTo>
-                <a:close/>
-              </a:path>
-            </a:pathLst>
-          </a:custGeom>
-          <a:blipFill>
-            <a:blip r:embed="rId4">
-              <a:extLst>
-                <a:ext uri="{96DAC541-7B7A-43D3-8B79-37D633B846F1}">
-                  <asvg:svgBlip xmlns:asvg="http://schemas.microsoft.com/office/drawing/2016/SVG/main" r:embed="rId5"/>
-                </a:ext>
-              </a:extLst>
-            </a:blip>
-            <a:stretch>
-              <a:fillRect l="0" t="0" r="0" b="0"/>
-            </a:stretch>
-          </a:blipFill>
-        </p:spPr>
-      </p:sp>
-      <p:sp>
-        <p:nvSpPr>
-          <p:cNvPr name="TextBox 10" id="10"/>
-          <p:cNvSpPr txBox="true"/>
-          <p:nvPr/>
-        </p:nvSpPr>
-        <p:spPr>
-          <a:xfrm rot="0">
-            <a:off x="969407" y="2947854"/>
-            <a:ext cx="13642999" cy="5508878"/>
-          </a:xfrm>
-          <a:prstGeom prst="rect">
-            <a:avLst/>
-          </a:prstGeom>
-        </p:spPr>
-        <p:txBody>
-          <a:bodyPr anchor="t" rtlCol="false" tIns="0" lIns="0" bIns="0" rIns="0">
-            <a:spAutoFit/>
-          </a:bodyPr>
-          <a:lstStyle/>
-          <a:p>
-            <a:pPr algn="ctr">
-              <a:lnSpc>
-                <a:spcPts val="3662"/>
-              </a:lnSpc>
-            </a:pPr>
-            <a:r>
-              <a:rPr lang="en-US" sz="3699">
-                <a:solidFill>
-                  <a:srgbClr val="000000"/>
-                </a:solidFill>
-                <a:latin typeface="Sukar"/>
-                <a:ea typeface="Sukar"/>
-                <a:cs typeface="Sukar"/>
-                <a:sym typeface="Sukar"/>
-              </a:rPr>
-              <a:t>En base a la pregunta hecha en un inicio: podemos predecir la calidad de una aplicación usando las características de los datos, y los modelos de MachineLearning ofrecen herramientas para hacerlo.</a:t>
-            </a:r>
-          </a:p>
-          <a:p>
-            <a:pPr algn="ctr">
-              <a:lnSpc>
-                <a:spcPts val="3662"/>
-              </a:lnSpc>
-            </a:pPr>
-          </a:p>
-          <a:p>
-            <a:pPr algn="l">
-              <a:lnSpc>
-                <a:spcPts val="3662"/>
-              </a:lnSpc>
-            </a:pPr>
-            <a:r>
-              <a:rPr lang="en-US" sz="3699">
-                <a:solidFill>
-                  <a:srgbClr val="000000"/>
-                </a:solidFill>
-                <a:latin typeface="Sukar"/>
-                <a:ea typeface="Sukar"/>
-                <a:cs typeface="Sukar"/>
-                <a:sym typeface="Sukar"/>
-              </a:rPr>
-              <a:t>Implicaciones:</a:t>
-            </a:r>
-          </a:p>
-          <a:p>
-            <a:pPr algn="ctr">
-              <a:lnSpc>
-                <a:spcPts val="3662"/>
-              </a:lnSpc>
-            </a:pPr>
-          </a:p>
-          <a:p>
-            <a:pPr algn="l" marL="798825" indent="-399412" lvl="1">
-              <a:lnSpc>
-                <a:spcPts val="3662"/>
-              </a:lnSpc>
-              <a:buFont typeface="Arial"/>
-              <a:buChar char="•"/>
-            </a:pPr>
-            <a:r>
-              <a:rPr lang="en-US" sz="3699">
-                <a:solidFill>
-                  <a:srgbClr val="000000"/>
-                </a:solidFill>
-                <a:latin typeface="Sukar"/>
-                <a:ea typeface="Sukar"/>
-                <a:cs typeface="Sukar"/>
-                <a:sym typeface="Sukar"/>
-              </a:rPr>
-              <a:t>Para desarrolladores: Entender qué características contribuyen a una alta calificación puede guiar el diseño y la mejora de las aplicaciones.</a:t>
-            </a:r>
-          </a:p>
-          <a:p>
-            <a:pPr algn="l" marL="798825" indent="-399412" lvl="1">
-              <a:lnSpc>
-                <a:spcPts val="3662"/>
-              </a:lnSpc>
-              <a:buFont typeface="Arial"/>
-              <a:buChar char="•"/>
-            </a:pPr>
-            <a:r>
-              <a:rPr lang="en-US" sz="3699">
-                <a:solidFill>
-                  <a:srgbClr val="000000"/>
-                </a:solidFill>
-                <a:latin typeface="Sukar"/>
-                <a:ea typeface="Sukar"/>
-                <a:cs typeface="Sukar"/>
-                <a:sym typeface="Sukar"/>
-              </a:rPr>
-              <a:t>Para la plataforma: Se pueden usar estos modelos para destacar aplicaciones de buena calidad.</a:t>
-            </a:r>
-          </a:p>
-          <a:p>
-            <a:pPr algn="ctr">
-              <a:lnSpc>
-                <a:spcPts val="3662"/>
-              </a:lnSpc>
-            </a:pPr>
-          </a:p>
-        </p:txBody>
-      </p:sp>
-    </p:spTree>
-  </p:cSld>
-  <p:clrMapOvr>
-    <a:masterClrMapping/>
-  </p:clrMapOvr>
-</p:sld>
-</file>
-
-<file path=ppt/slides/slide12.xml><?xml version="1.0" encoding="utf-8"?>
-<p:sld xmlns:p="http://schemas.openxmlformats.org/presentationml/2006/main" xmlns:a="http://schemas.openxmlformats.org/drawingml/2006/main" xmlns:r="http://schemas.openxmlformats.org/officeDocument/2006/relationships">
-  <p:cSld>
-    <p:bg>
-      <p:bgPr>
-        <a:solidFill>
-          <a:srgbClr val="FFF6EA"/>
-        </a:solidFill>
-      </p:bgPr>
-    </p:bg>
-    <p:spTree>
-      <p:nvGrpSpPr>
-        <p:cNvPr id="1" name=""/>
-        <p:cNvGrpSpPr/>
-        <p:nvPr/>
-      </p:nvGrpSpPr>
-      <p:grpSpPr>
-        <a:xfrm>
-          <a:off x="0" y="0"/>
-          <a:ext cx="0" cy="0"/>
-          <a:chOff x="0" y="0"/>
-          <a:chExt cx="0" cy="0"/>
-        </a:xfrm>
-      </p:grpSpPr>
-      <p:sp>
-        <p:nvSpPr>
-          <p:cNvPr name="Freeform 2" id="2"/>
-          <p:cNvSpPr/>
-          <p:nvPr/>
-        </p:nvSpPr>
-        <p:spPr>
           <a:xfrm flipH="false" flipV="false" rot="0">
             <a:off x="7323931" y="1571678"/>
             <a:ext cx="6653769" cy="7944799"/>
@@ -5329,7 +5316,7 @@
         </p:nvSpPr>
         <p:spPr>
           <a:xfrm flipH="false" flipV="false" rot="-121115">
-            <a:off x="15141065" y="9158395"/>
+            <a:off x="4322812" y="6527347"/>
             <a:ext cx="853014" cy="804935"/>
           </a:xfrm>
           <a:custGeom>
@@ -5373,61 +5360,232 @@
           </a:blipFill>
         </p:spPr>
       </p:sp>
-      <p:sp>
-        <p:nvSpPr>
-          <p:cNvPr name="Freeform 5" id="5"/>
-          <p:cNvSpPr/>
-          <p:nvPr/>
-        </p:nvSpPr>
-        <p:spPr>
-          <a:xfrm flipH="false" flipV="false" rot="-2526217">
-            <a:off x="16420594" y="8195071"/>
-            <a:ext cx="1424058" cy="1343792"/>
-          </a:xfrm>
-          <a:custGeom>
-            <a:avLst/>
-            <a:gdLst/>
-            <a:ahLst/>
-            <a:cxnLst/>
-            <a:rect r="r" b="b" t="t" l="l"/>
-            <a:pathLst>
-              <a:path h="1343792" w="1424058">
-                <a:moveTo>
-                  <a:pt x="0" y="0"/>
-                </a:moveTo>
-                <a:lnTo>
-                  <a:pt x="1424058" y="0"/>
-                </a:lnTo>
-                <a:lnTo>
-                  <a:pt x="1424058" y="1343792"/>
-                </a:lnTo>
-                <a:lnTo>
-                  <a:pt x="0" y="1343792"/>
-                </a:lnTo>
-                <a:lnTo>
-                  <a:pt x="0" y="0"/>
-                </a:lnTo>
-                <a:close/>
-              </a:path>
-            </a:pathLst>
-          </a:custGeom>
-          <a:blipFill>
-            <a:blip r:embed="rId4">
-              <a:extLst>
-                <a:ext uri="{96DAC541-7B7A-43D3-8B79-37D633B846F1}">
-                  <asvg:svgBlip xmlns:asvg="http://schemas.microsoft.com/office/drawing/2016/SVG/main" r:embed="rId5"/>
-                </a:ext>
-              </a:extLst>
-            </a:blip>
-            <a:stretch>
-              <a:fillRect l="0" t="0" r="0" b="0"/>
-            </a:stretch>
-          </a:blipFill>
-        </p:spPr>
-      </p:sp>
-      <p:sp>
-        <p:nvSpPr>
-          <p:cNvPr name="TextBox 6" id="6"/>
+      <p:grpSp>
+        <p:nvGrpSpPr>
+          <p:cNvPr name="Group 5" id="5"/>
+          <p:cNvGrpSpPr/>
+          <p:nvPr/>
+        </p:nvGrpSpPr>
+        <p:grpSpPr>
+          <a:xfrm rot="0">
+            <a:off x="1028700" y="3590648"/>
+            <a:ext cx="16494531" cy="1977853"/>
+            <a:chOff x="0" y="0"/>
+            <a:chExt cx="21992708" cy="2637138"/>
+          </a:xfrm>
+        </p:grpSpPr>
+        <p:sp>
+          <p:nvSpPr>
+            <p:cNvPr name="Freeform 6" id="6"/>
+            <p:cNvSpPr/>
+            <p:nvPr/>
+          </p:nvSpPr>
+          <p:spPr>
+            <a:xfrm flipH="false" flipV="false" rot="0">
+              <a:off x="0" y="0"/>
+              <a:ext cx="6389541" cy="2637138"/>
+            </a:xfrm>
+            <a:custGeom>
+              <a:avLst/>
+              <a:gdLst/>
+              <a:ahLst/>
+              <a:cxnLst/>
+              <a:rect r="r" b="b" t="t" l="l"/>
+              <a:pathLst>
+                <a:path h="2637138" w="6389541">
+                  <a:moveTo>
+                    <a:pt x="0" y="0"/>
+                  </a:moveTo>
+                  <a:lnTo>
+                    <a:pt x="6389541" y="0"/>
+                  </a:lnTo>
+                  <a:lnTo>
+                    <a:pt x="6389541" y="2637138"/>
+                  </a:lnTo>
+                  <a:lnTo>
+                    <a:pt x="0" y="2637138"/>
+                  </a:lnTo>
+                  <a:lnTo>
+                    <a:pt x="0" y="0"/>
+                  </a:lnTo>
+                  <a:close/>
+                </a:path>
+              </a:pathLst>
+            </a:custGeom>
+            <a:blipFill>
+              <a:blip r:embed="rId6">
+                <a:extLst>
+                  <a:ext uri="{96DAC541-7B7A-43D3-8B79-37D633B846F1}">
+                    <asvg:svgBlip xmlns:asvg="http://schemas.microsoft.com/office/drawing/2016/SVG/main" r:embed="rId7"/>
+                  </a:ext>
+                </a:extLst>
+              </a:blip>
+              <a:stretch>
+                <a:fillRect l="0" t="0" r="0" b="0"/>
+              </a:stretch>
+            </a:blipFill>
+          </p:spPr>
+        </p:sp>
+        <p:sp>
+          <p:nvSpPr>
+            <p:cNvPr name="Freeform 7" id="7"/>
+            <p:cNvSpPr/>
+            <p:nvPr/>
+          </p:nvSpPr>
+          <p:spPr>
+            <a:xfrm flipH="false" flipV="false" rot="0">
+              <a:off x="5835511" y="0"/>
+              <a:ext cx="6389541" cy="2637138"/>
+            </a:xfrm>
+            <a:custGeom>
+              <a:avLst/>
+              <a:gdLst/>
+              <a:ahLst/>
+              <a:cxnLst/>
+              <a:rect r="r" b="b" t="t" l="l"/>
+              <a:pathLst>
+                <a:path h="2637138" w="6389541">
+                  <a:moveTo>
+                    <a:pt x="0" y="0"/>
+                  </a:moveTo>
+                  <a:lnTo>
+                    <a:pt x="6389541" y="0"/>
+                  </a:lnTo>
+                  <a:lnTo>
+                    <a:pt x="6389541" y="2637138"/>
+                  </a:lnTo>
+                  <a:lnTo>
+                    <a:pt x="0" y="2637138"/>
+                  </a:lnTo>
+                  <a:lnTo>
+                    <a:pt x="0" y="0"/>
+                  </a:lnTo>
+                  <a:close/>
+                </a:path>
+              </a:pathLst>
+            </a:custGeom>
+            <a:blipFill>
+              <a:blip r:embed="rId6">
+                <a:extLst>
+                  <a:ext uri="{96DAC541-7B7A-43D3-8B79-37D633B846F1}">
+                    <asvg:svgBlip xmlns:asvg="http://schemas.microsoft.com/office/drawing/2016/SVG/main" r:embed="rId7"/>
+                  </a:ext>
+                </a:extLst>
+              </a:blip>
+              <a:stretch>
+                <a:fillRect l="0" t="0" r="0" b="0"/>
+              </a:stretch>
+            </a:blipFill>
+          </p:spPr>
+        </p:sp>
+        <p:sp>
+          <p:nvSpPr>
+            <p:cNvPr name="Freeform 8" id="8"/>
+            <p:cNvSpPr/>
+            <p:nvPr/>
+          </p:nvSpPr>
+          <p:spPr>
+            <a:xfrm flipH="false" flipV="false" rot="0">
+              <a:off x="11610016" y="0"/>
+              <a:ext cx="6389541" cy="2637138"/>
+            </a:xfrm>
+            <a:custGeom>
+              <a:avLst/>
+              <a:gdLst/>
+              <a:ahLst/>
+              <a:cxnLst/>
+              <a:rect r="r" b="b" t="t" l="l"/>
+              <a:pathLst>
+                <a:path h="2637138" w="6389541">
+                  <a:moveTo>
+                    <a:pt x="0" y="0"/>
+                  </a:moveTo>
+                  <a:lnTo>
+                    <a:pt x="6389541" y="0"/>
+                  </a:lnTo>
+                  <a:lnTo>
+                    <a:pt x="6389541" y="2637138"/>
+                  </a:lnTo>
+                  <a:lnTo>
+                    <a:pt x="0" y="2637138"/>
+                  </a:lnTo>
+                  <a:lnTo>
+                    <a:pt x="0" y="0"/>
+                  </a:lnTo>
+                  <a:close/>
+                </a:path>
+              </a:pathLst>
+            </a:custGeom>
+            <a:blipFill>
+              <a:blip r:embed="rId6">
+                <a:extLst>
+                  <a:ext uri="{96DAC541-7B7A-43D3-8B79-37D633B846F1}">
+                    <asvg:svgBlip xmlns:asvg="http://schemas.microsoft.com/office/drawing/2016/SVG/main" r:embed="rId7"/>
+                  </a:ext>
+                </a:extLst>
+              </a:blip>
+              <a:stretch>
+                <a:fillRect l="0" t="0" r="0" b="0"/>
+              </a:stretch>
+            </a:blipFill>
+          </p:spPr>
+        </p:sp>
+        <p:sp>
+          <p:nvSpPr>
+            <p:cNvPr name="Freeform 9" id="9"/>
+            <p:cNvSpPr/>
+            <p:nvPr/>
+          </p:nvSpPr>
+          <p:spPr>
+            <a:xfrm flipH="false" flipV="false" rot="0">
+              <a:off x="15603167" y="0"/>
+              <a:ext cx="6389541" cy="2637138"/>
+            </a:xfrm>
+            <a:custGeom>
+              <a:avLst/>
+              <a:gdLst/>
+              <a:ahLst/>
+              <a:cxnLst/>
+              <a:rect r="r" b="b" t="t" l="l"/>
+              <a:pathLst>
+                <a:path h="2637138" w="6389541">
+                  <a:moveTo>
+                    <a:pt x="0" y="0"/>
+                  </a:moveTo>
+                  <a:lnTo>
+                    <a:pt x="6389541" y="0"/>
+                  </a:lnTo>
+                  <a:lnTo>
+                    <a:pt x="6389541" y="2637138"/>
+                  </a:lnTo>
+                  <a:lnTo>
+                    <a:pt x="0" y="2637138"/>
+                  </a:lnTo>
+                  <a:lnTo>
+                    <a:pt x="0" y="0"/>
+                  </a:lnTo>
+                  <a:close/>
+                </a:path>
+              </a:pathLst>
+            </a:custGeom>
+            <a:blipFill>
+              <a:blip r:embed="rId6">
+                <a:extLst>
+                  <a:ext uri="{96DAC541-7B7A-43D3-8B79-37D633B846F1}">
+                    <asvg:svgBlip xmlns:asvg="http://schemas.microsoft.com/office/drawing/2016/SVG/main" r:embed="rId7"/>
+                  </a:ext>
+                </a:extLst>
+              </a:blip>
+              <a:stretch>
+                <a:fillRect l="0" t="0" r="0" b="0"/>
+              </a:stretch>
+            </a:blipFill>
+          </p:spPr>
+        </p:sp>
+      </p:grpSp>
+      <p:sp>
+        <p:nvSpPr>
+          <p:cNvPr name="TextBox 10" id="10"/>
           <p:cNvSpPr txBox="true"/>
           <p:nvPr/>
         </p:nvSpPr>
@@ -5468,7 +5626,7 @@
       </p:sp>
       <p:sp>
         <p:nvSpPr>
-          <p:cNvPr name="Freeform 7" id="7"/>
+          <p:cNvPr name="Freeform 11" id="11"/>
           <p:cNvSpPr/>
           <p:nvPr/>
         </p:nvSpPr>
@@ -5520,7 +5678,7 @@
       </p:sp>
       <p:sp>
         <p:nvSpPr>
-          <p:cNvPr name="Freeform 8" id="8"/>
+          <p:cNvPr name="Freeform 12" id="12"/>
           <p:cNvSpPr/>
           <p:nvPr/>
         </p:nvSpPr>
@@ -5572,7 +5730,7 @@
       </p:sp>
       <p:sp>
         <p:nvSpPr>
-          <p:cNvPr name="Freeform 9" id="9"/>
+          <p:cNvPr name="Freeform 13" id="13"/>
           <p:cNvSpPr/>
           <p:nvPr/>
         </p:nvSpPr>
@@ -5624,7 +5782,7 @@
       </p:sp>
       <p:sp>
         <p:nvSpPr>
-          <p:cNvPr name="Freeform 10" id="10"/>
+          <p:cNvPr name="Freeform 14" id="14"/>
           <p:cNvSpPr/>
           <p:nvPr/>
         </p:nvSpPr>
@@ -5676,14 +5834,367 @@
       </p:sp>
       <p:sp>
         <p:nvSpPr>
-          <p:cNvPr name="TextBox 11" id="11"/>
+          <p:cNvPr name="TextBox 15" id="15"/>
           <p:cNvSpPr txBox="true"/>
           <p:nvPr/>
         </p:nvSpPr>
         <p:spPr>
           <a:xfrm rot="0">
-            <a:off x="4113305" y="6136732"/>
-            <a:ext cx="13642999" cy="2308478"/>
+            <a:off x="1338289" y="3839102"/>
+            <a:ext cx="15921011" cy="1566671"/>
+          </a:xfrm>
+          <a:prstGeom prst="rect">
+            <a:avLst/>
+          </a:prstGeom>
+        </p:spPr>
+        <p:txBody>
+          <a:bodyPr anchor="t" rtlCol="false" tIns="0" lIns="0" bIns="0" rIns="0">
+            <a:spAutoFit/>
+          </a:bodyPr>
+          <a:lstStyle/>
+          <a:p>
+            <a:pPr algn="ctr">
+              <a:lnSpc>
+                <a:spcPts val="4058"/>
+              </a:lnSpc>
+            </a:pPr>
+            <a:r>
+              <a:rPr lang="en-US" sz="4099">
+                <a:solidFill>
+                  <a:srgbClr val="A66B49"/>
+                </a:solidFill>
+                <a:latin typeface="Sukar"/>
+                <a:ea typeface="Sukar"/>
+                <a:cs typeface="Sukar"/>
+                <a:sym typeface="Sukar"/>
+              </a:rPr>
+              <a:t>Hoy explicaremos cómo identificar y predecir la calidad de las aplicaciones móviles en Google Play Store utilizando técnicas de análisis de datos y machine learning</a:t>
+            </a:r>
+          </a:p>
+        </p:txBody>
+      </p:sp>
+      <p:sp>
+        <p:nvSpPr>
+          <p:cNvPr name="Freeform 16" id="16"/>
+          <p:cNvSpPr/>
+          <p:nvPr/>
+        </p:nvSpPr>
+        <p:spPr>
+          <a:xfrm flipH="false" flipV="false" rot="0">
+            <a:off x="5686302" y="6358129"/>
+            <a:ext cx="4792156" cy="1977853"/>
+          </a:xfrm>
+          <a:custGeom>
+            <a:avLst/>
+            <a:gdLst/>
+            <a:ahLst/>
+            <a:cxnLst/>
+            <a:rect r="r" b="b" t="t" l="l"/>
+            <a:pathLst>
+              <a:path h="1977853" w="4792156">
+                <a:moveTo>
+                  <a:pt x="0" y="0"/>
+                </a:moveTo>
+                <a:lnTo>
+                  <a:pt x="4792156" y="0"/>
+                </a:lnTo>
+                <a:lnTo>
+                  <a:pt x="4792156" y="1977853"/>
+                </a:lnTo>
+                <a:lnTo>
+                  <a:pt x="0" y="1977853"/>
+                </a:lnTo>
+                <a:lnTo>
+                  <a:pt x="0" y="0"/>
+                </a:lnTo>
+                <a:close/>
+              </a:path>
+            </a:pathLst>
+          </a:custGeom>
+          <a:blipFill>
+            <a:blip r:embed="rId6">
+              <a:extLst>
+                <a:ext uri="{96DAC541-7B7A-43D3-8B79-37D633B846F1}">
+                  <asvg:svgBlip xmlns:asvg="http://schemas.microsoft.com/office/drawing/2016/SVG/main" r:embed="rId7"/>
+                </a:ext>
+              </a:extLst>
+            </a:blip>
+            <a:stretch>
+              <a:fillRect l="0" t="0" r="0" b="0"/>
+            </a:stretch>
+          </a:blipFill>
+        </p:spPr>
+      </p:sp>
+      <p:sp>
+        <p:nvSpPr>
+          <p:cNvPr name="Freeform 17" id="17"/>
+          <p:cNvSpPr/>
+          <p:nvPr/>
+        </p:nvSpPr>
+        <p:spPr>
+          <a:xfrm flipH="false" flipV="false" rot="0">
+            <a:off x="10045801" y="6358129"/>
+            <a:ext cx="4792156" cy="1977853"/>
+          </a:xfrm>
+          <a:custGeom>
+            <a:avLst/>
+            <a:gdLst/>
+            <a:ahLst/>
+            <a:cxnLst/>
+            <a:rect r="r" b="b" t="t" l="l"/>
+            <a:pathLst>
+              <a:path h="1977853" w="4792156">
+                <a:moveTo>
+                  <a:pt x="0" y="0"/>
+                </a:moveTo>
+                <a:lnTo>
+                  <a:pt x="4792156" y="0"/>
+                </a:lnTo>
+                <a:lnTo>
+                  <a:pt x="4792156" y="1977853"/>
+                </a:lnTo>
+                <a:lnTo>
+                  <a:pt x="0" y="1977853"/>
+                </a:lnTo>
+                <a:lnTo>
+                  <a:pt x="0" y="0"/>
+                </a:lnTo>
+                <a:close/>
+              </a:path>
+            </a:pathLst>
+          </a:custGeom>
+          <a:blipFill>
+            <a:blip r:embed="rId6">
+              <a:extLst>
+                <a:ext uri="{96DAC541-7B7A-43D3-8B79-37D633B846F1}">
+                  <asvg:svgBlip xmlns:asvg="http://schemas.microsoft.com/office/drawing/2016/SVG/main" r:embed="rId7"/>
+                </a:ext>
+              </a:extLst>
+            </a:blip>
+            <a:stretch>
+              <a:fillRect l="0" t="0" r="0" b="0"/>
+            </a:stretch>
+          </a:blipFill>
+        </p:spPr>
+      </p:sp>
+      <p:sp>
+        <p:nvSpPr>
+          <p:cNvPr name="Freeform 18" id="18"/>
+          <p:cNvSpPr/>
+          <p:nvPr/>
+        </p:nvSpPr>
+        <p:spPr>
+          <a:xfrm flipH="false" flipV="false" rot="0">
+            <a:off x="13040665" y="6358129"/>
+            <a:ext cx="4792156" cy="1977853"/>
+          </a:xfrm>
+          <a:custGeom>
+            <a:avLst/>
+            <a:gdLst/>
+            <a:ahLst/>
+            <a:cxnLst/>
+            <a:rect r="r" b="b" t="t" l="l"/>
+            <a:pathLst>
+              <a:path h="1977853" w="4792156">
+                <a:moveTo>
+                  <a:pt x="0" y="0"/>
+                </a:moveTo>
+                <a:lnTo>
+                  <a:pt x="4792155" y="0"/>
+                </a:lnTo>
+                <a:lnTo>
+                  <a:pt x="4792155" y="1977853"/>
+                </a:lnTo>
+                <a:lnTo>
+                  <a:pt x="0" y="1977853"/>
+                </a:lnTo>
+                <a:lnTo>
+                  <a:pt x="0" y="0"/>
+                </a:lnTo>
+                <a:close/>
+              </a:path>
+            </a:pathLst>
+          </a:custGeom>
+          <a:blipFill>
+            <a:blip r:embed="rId6">
+              <a:extLst>
+                <a:ext uri="{96DAC541-7B7A-43D3-8B79-37D633B846F1}">
+                  <asvg:svgBlip xmlns:asvg="http://schemas.microsoft.com/office/drawing/2016/SVG/main" r:embed="rId7"/>
+                </a:ext>
+              </a:extLst>
+            </a:blip>
+            <a:stretch>
+              <a:fillRect l="0" t="0" r="0" b="0"/>
+            </a:stretch>
+          </a:blipFill>
+        </p:spPr>
+      </p:sp>
+      <p:sp>
+        <p:nvSpPr>
+          <p:cNvPr name="Freeform 19" id="19"/>
+          <p:cNvSpPr/>
+          <p:nvPr/>
+        </p:nvSpPr>
+        <p:spPr>
+          <a:xfrm flipH="false" flipV="false" rot="0">
+            <a:off x="5686302" y="7347056"/>
+            <a:ext cx="4792156" cy="1977853"/>
+          </a:xfrm>
+          <a:custGeom>
+            <a:avLst/>
+            <a:gdLst/>
+            <a:ahLst/>
+            <a:cxnLst/>
+            <a:rect r="r" b="b" t="t" l="l"/>
+            <a:pathLst>
+              <a:path h="1977853" w="4792156">
+                <a:moveTo>
+                  <a:pt x="0" y="0"/>
+                </a:moveTo>
+                <a:lnTo>
+                  <a:pt x="4792156" y="0"/>
+                </a:lnTo>
+                <a:lnTo>
+                  <a:pt x="4792156" y="1977853"/>
+                </a:lnTo>
+                <a:lnTo>
+                  <a:pt x="0" y="1977853"/>
+                </a:lnTo>
+                <a:lnTo>
+                  <a:pt x="0" y="0"/>
+                </a:lnTo>
+                <a:close/>
+              </a:path>
+            </a:pathLst>
+          </a:custGeom>
+          <a:blipFill>
+            <a:blip r:embed="rId6">
+              <a:extLst>
+                <a:ext uri="{96DAC541-7B7A-43D3-8B79-37D633B846F1}">
+                  <asvg:svgBlip xmlns:asvg="http://schemas.microsoft.com/office/drawing/2016/SVG/main" r:embed="rId7"/>
+                </a:ext>
+              </a:extLst>
+            </a:blip>
+            <a:stretch>
+              <a:fillRect l="0" t="0" r="0" b="0"/>
+            </a:stretch>
+          </a:blipFill>
+        </p:spPr>
+      </p:sp>
+      <p:sp>
+        <p:nvSpPr>
+          <p:cNvPr name="Freeform 20" id="20"/>
+          <p:cNvSpPr/>
+          <p:nvPr/>
+        </p:nvSpPr>
+        <p:spPr>
+          <a:xfrm flipH="false" flipV="false" rot="0">
+            <a:off x="9864781" y="7347056"/>
+            <a:ext cx="4792156" cy="1977853"/>
+          </a:xfrm>
+          <a:custGeom>
+            <a:avLst/>
+            <a:gdLst/>
+            <a:ahLst/>
+            <a:cxnLst/>
+            <a:rect r="r" b="b" t="t" l="l"/>
+            <a:pathLst>
+              <a:path h="1977853" w="4792156">
+                <a:moveTo>
+                  <a:pt x="0" y="0"/>
+                </a:moveTo>
+                <a:lnTo>
+                  <a:pt x="4792156" y="0"/>
+                </a:lnTo>
+                <a:lnTo>
+                  <a:pt x="4792156" y="1977853"/>
+                </a:lnTo>
+                <a:lnTo>
+                  <a:pt x="0" y="1977853"/>
+                </a:lnTo>
+                <a:lnTo>
+                  <a:pt x="0" y="0"/>
+                </a:lnTo>
+                <a:close/>
+              </a:path>
+            </a:pathLst>
+          </a:custGeom>
+          <a:blipFill>
+            <a:blip r:embed="rId6">
+              <a:extLst>
+                <a:ext uri="{96DAC541-7B7A-43D3-8B79-37D633B846F1}">
+                  <asvg:svgBlip xmlns:asvg="http://schemas.microsoft.com/office/drawing/2016/SVG/main" r:embed="rId7"/>
+                </a:ext>
+              </a:extLst>
+            </a:blip>
+            <a:stretch>
+              <a:fillRect l="0" t="0" r="0" b="0"/>
+            </a:stretch>
+          </a:blipFill>
+        </p:spPr>
+      </p:sp>
+      <p:sp>
+        <p:nvSpPr>
+          <p:cNvPr name="Freeform 21" id="21"/>
+          <p:cNvSpPr/>
+          <p:nvPr/>
+        </p:nvSpPr>
+        <p:spPr>
+          <a:xfrm flipH="false" flipV="false" rot="0">
+            <a:off x="13040665" y="7347056"/>
+            <a:ext cx="4792156" cy="1977853"/>
+          </a:xfrm>
+          <a:custGeom>
+            <a:avLst/>
+            <a:gdLst/>
+            <a:ahLst/>
+            <a:cxnLst/>
+            <a:rect r="r" b="b" t="t" l="l"/>
+            <a:pathLst>
+              <a:path h="1977853" w="4792156">
+                <a:moveTo>
+                  <a:pt x="0" y="0"/>
+                </a:moveTo>
+                <a:lnTo>
+                  <a:pt x="4792155" y="0"/>
+                </a:lnTo>
+                <a:lnTo>
+                  <a:pt x="4792155" y="1977853"/>
+                </a:lnTo>
+                <a:lnTo>
+                  <a:pt x="0" y="1977853"/>
+                </a:lnTo>
+                <a:lnTo>
+                  <a:pt x="0" y="0"/>
+                </a:lnTo>
+                <a:close/>
+              </a:path>
+            </a:pathLst>
+          </a:custGeom>
+          <a:blipFill>
+            <a:blip r:embed="rId6">
+              <a:extLst>
+                <a:ext uri="{96DAC541-7B7A-43D3-8B79-37D633B846F1}">
+                  <asvg:svgBlip xmlns:asvg="http://schemas.microsoft.com/office/drawing/2016/SVG/main" r:embed="rId7"/>
+                </a:ext>
+              </a:extLst>
+            </a:blip>
+            <a:stretch>
+              <a:fillRect l="0" t="0" r="0" b="0"/>
+            </a:stretch>
+          </a:blipFill>
+        </p:spPr>
+      </p:sp>
+      <p:sp>
+        <p:nvSpPr>
+          <p:cNvPr name="TextBox 22" id="22"/>
+          <p:cNvSpPr txBox="true"/>
+          <p:nvPr/>
+        </p:nvSpPr>
+        <p:spPr>
+          <a:xfrm rot="0">
+            <a:off x="6112570" y="6774929"/>
+            <a:ext cx="11410661" cy="2308478"/>
           </a:xfrm>
           <a:prstGeom prst="rect">
             <a:avLst/>
@@ -5703,7 +6214,7 @@
             <a:r>
               <a:rPr lang="en-US" sz="3699">
                 <a:solidFill>
-                  <a:srgbClr val="000000"/>
+                  <a:srgbClr val="A66B49"/>
                 </a:solidFill>
                 <a:latin typeface="Sukar"/>
                 <a:ea typeface="Sukar"/>
@@ -5729,7 +6240,7 @@
             <a:r>
               <a:rPr lang="en-US" sz="3699">
                 <a:solidFill>
-                  <a:srgbClr val="000000"/>
+                  <a:srgbClr val="A66B49"/>
                 </a:solidFill>
                 <a:latin typeface="Sukar"/>
                 <a:ea typeface="Sukar"/>
@@ -5739,55 +6250,59 @@
               <a:t>El dataset original cuenta con 10841 entradas y 13 columnas.</a:t>
             </a:r>
           </a:p>
-          <a:p>
-            <a:pPr algn="ctr">
-              <a:lnSpc>
-                <a:spcPts val="3662"/>
-              </a:lnSpc>
-            </a:pPr>
-          </a:p>
         </p:txBody>
       </p:sp>
       <p:sp>
         <p:nvSpPr>
-          <p:cNvPr name="TextBox 12" id="12"/>
-          <p:cNvSpPr txBox="true"/>
-          <p:nvPr/>
-        </p:nvSpPr>
-        <p:spPr>
-          <a:xfrm rot="0">
-            <a:off x="2174867" y="3968042"/>
-            <a:ext cx="14229283" cy="1394078"/>
-          </a:xfrm>
-          <a:prstGeom prst="rect">
-            <a:avLst/>
-          </a:prstGeom>
-        </p:spPr>
-        <p:txBody>
-          <a:bodyPr anchor="t" rtlCol="false" tIns="0" lIns="0" bIns="0" rIns="0">
-            <a:spAutoFit/>
-          </a:bodyPr>
-          <a:lstStyle/>
-          <a:p>
-            <a:pPr algn="ctr">
-              <a:lnSpc>
-                <a:spcPts val="3662"/>
-              </a:lnSpc>
-            </a:pPr>
-            <a:r>
-              <a:rPr lang="en-US" sz="3699">
-                <a:solidFill>
-                  <a:srgbClr val="000000"/>
-                </a:solidFill>
-                <a:latin typeface="Sukar"/>
-                <a:ea typeface="Sukar"/>
-                <a:cs typeface="Sukar"/>
-                <a:sym typeface="Sukar"/>
-              </a:rPr>
-              <a:t>Hoy explicaremos cómo identificar y predecir la calidad de las aplicaciones móviles en Google Play Store utilizando técnicas de análisis de datos y machine learning</a:t>
-            </a:r>
-          </a:p>
-        </p:txBody>
+          <p:cNvPr name="Freeform 23" id="23"/>
+          <p:cNvSpPr/>
+          <p:nvPr/>
+        </p:nvSpPr>
+        <p:spPr>
+          <a:xfrm flipH="false" flipV="false" rot="-1050601">
+            <a:off x="16793533" y="8842633"/>
+            <a:ext cx="1034779" cy="976455"/>
+          </a:xfrm>
+          <a:custGeom>
+            <a:avLst/>
+            <a:gdLst/>
+            <a:ahLst/>
+            <a:cxnLst/>
+            <a:rect r="r" b="b" t="t" l="l"/>
+            <a:pathLst>
+              <a:path h="976455" w="1034779">
+                <a:moveTo>
+                  <a:pt x="0" y="0"/>
+                </a:moveTo>
+                <a:lnTo>
+                  <a:pt x="1034779" y="0"/>
+                </a:lnTo>
+                <a:lnTo>
+                  <a:pt x="1034779" y="976455"/>
+                </a:lnTo>
+                <a:lnTo>
+                  <a:pt x="0" y="976455"/>
+                </a:lnTo>
+                <a:lnTo>
+                  <a:pt x="0" y="0"/>
+                </a:lnTo>
+                <a:close/>
+              </a:path>
+            </a:pathLst>
+          </a:custGeom>
+          <a:blipFill>
+            <a:blip r:embed="rId4">
+              <a:extLst>
+                <a:ext uri="{96DAC541-7B7A-43D3-8B79-37D633B846F1}">
+                  <asvg:svgBlip xmlns:asvg="http://schemas.microsoft.com/office/drawing/2016/SVG/main" r:embed="rId5"/>
+                </a:ext>
+              </a:extLst>
+            </a:blip>
+            <a:stretch>
+              <a:fillRect l="0" t="0" r="0" b="0"/>
+            </a:stretch>
+          </a:blipFill>
+        </p:spPr>
       </p:sp>
     </p:spTree>
   </p:cSld>
@@ -5880,8 +6395,8 @@
           <p:nvPr/>
         </p:nvSpPr>
         <p:spPr>
-          <a:xfrm flipH="false" flipV="false" rot="-2526217">
-            <a:off x="1278349" y="5154221"/>
+          <a:xfrm flipH="false" flipV="false" rot="-1344195">
+            <a:off x="813413" y="5154221"/>
             <a:ext cx="1404298" cy="1325147"/>
           </a:xfrm>
           <a:custGeom>
@@ -5985,8 +6500,8 @@
         </p:nvSpPr>
         <p:spPr>
           <a:xfrm flipH="false" flipV="false" rot="0">
-            <a:off x="12501754" y="7504188"/>
-            <a:ext cx="3744315" cy="2274671"/>
+            <a:off x="14409572" y="8184692"/>
+            <a:ext cx="3150803" cy="1914113"/>
           </a:xfrm>
           <a:custGeom>
             <a:avLst/>
@@ -5995,18 +6510,18 @@
             <a:cxnLst/>
             <a:rect r="r" b="b" t="t" l="l"/>
             <a:pathLst>
-              <a:path h="2274671" w="3744315">
+              <a:path h="1914113" w="3150803">
                 <a:moveTo>
                   <a:pt x="0" y="0"/>
                 </a:moveTo>
                 <a:lnTo>
-                  <a:pt x="3744315" y="0"/>
-                </a:lnTo>
-                <a:lnTo>
-                  <a:pt x="3744315" y="2274672"/>
-                </a:lnTo>
-                <a:lnTo>
-                  <a:pt x="0" y="2274672"/>
+                  <a:pt x="3150804" y="0"/>
+                </a:lnTo>
+                <a:lnTo>
+                  <a:pt x="3150804" y="1914113"/>
+                </a:lnTo>
+                <a:lnTo>
+                  <a:pt x="0" y="1914113"/>
                 </a:lnTo>
                 <a:lnTo>
                   <a:pt x="0" y="0"/>
@@ -6037,7 +6552,7 @@
         </p:nvSpPr>
         <p:spPr>
           <a:xfrm flipH="false" flipV="false" rot="1168799">
-            <a:off x="2243330" y="446872"/>
+            <a:off x="1447496" y="122348"/>
             <a:ext cx="1233161" cy="1163656"/>
           </a:xfrm>
           <a:custGeom>
@@ -6055,10 +6570,10 @@
                   <a:pt x="1233161" y="0"/>
                 </a:lnTo>
                 <a:lnTo>
-                  <a:pt x="1233161" y="1163656"/>
-                </a:lnTo>
-                <a:lnTo>
-                  <a:pt x="0" y="1163656"/>
+                  <a:pt x="1233161" y="1163655"/>
+                </a:lnTo>
+                <a:lnTo>
+                  <a:pt x="0" y="1163655"/>
                 </a:lnTo>
                 <a:lnTo>
                   <a:pt x="0" y="0"/>
@@ -6089,7 +6604,7 @@
         </p:nvSpPr>
         <p:spPr>
           <a:xfrm flipH="false" flipV="false" rot="1154730">
-            <a:off x="9697144" y="1146792"/>
+            <a:off x="13809191" y="535287"/>
             <a:ext cx="853014" cy="804935"/>
           </a:xfrm>
           <a:custGeom>
@@ -6104,10 +6619,10 @@
                   <a:pt x="0" y="0"/>
                 </a:moveTo>
                 <a:lnTo>
-                  <a:pt x="853015" y="0"/>
-                </a:lnTo>
-                <a:lnTo>
-                  <a:pt x="853015" y="804935"/>
+                  <a:pt x="853014" y="0"/>
+                </a:lnTo>
+                <a:lnTo>
+                  <a:pt x="853014" y="804935"/>
                 </a:lnTo>
                 <a:lnTo>
                   <a:pt x="0" y="804935"/>
@@ -6141,7 +6656,7 @@
         </p:nvSpPr>
         <p:spPr>
           <a:xfrm flipH="false" flipV="false" rot="-1120371">
-            <a:off x="7498192" y="8858557"/>
+            <a:off x="12408239" y="9178502"/>
             <a:ext cx="853014" cy="804935"/>
           </a:xfrm>
           <a:custGeom>
@@ -6159,10 +6674,10 @@
                   <a:pt x="853014" y="0"/>
                 </a:lnTo>
                 <a:lnTo>
-                  <a:pt x="853014" y="804935"/>
-                </a:lnTo>
-                <a:lnTo>
-                  <a:pt x="0" y="804935"/>
+                  <a:pt x="853014" y="804936"/>
+                </a:lnTo>
+                <a:lnTo>
+                  <a:pt x="0" y="804936"/>
                 </a:lnTo>
                 <a:lnTo>
                   <a:pt x="0" y="0"/>
@@ -6193,8 +6708,8 @@
         </p:nvSpPr>
         <p:spPr>
           <a:xfrm rot="0">
-            <a:off x="1288764" y="2225625"/>
-            <a:ext cx="16271612" cy="1072515"/>
+            <a:off x="1288764" y="1467839"/>
+            <a:ext cx="16271612" cy="1133475"/>
           </a:xfrm>
           <a:prstGeom prst="rect">
             <a:avLst/>
@@ -6208,11 +6723,11 @@
           <a:p>
             <a:pPr algn="l">
               <a:lnSpc>
-                <a:spcPts val="6929"/>
+                <a:spcPts val="7425"/>
               </a:lnSpc>
             </a:pPr>
             <a:r>
-              <a:rPr lang="en-US" sz="6999">
+              <a:rPr lang="en-US" sz="7500">
                 <a:solidFill>
                   <a:srgbClr val="925000"/>
                 </a:solidFill>
@@ -6226,16 +6741,239 @@
           </a:p>
         </p:txBody>
       </p:sp>
-      <p:sp>
-        <p:nvSpPr>
-          <p:cNvPr name="TextBox 10" id="10"/>
+      <p:grpSp>
+        <p:nvGrpSpPr>
+          <p:cNvPr name="Group 10" id="10"/>
+          <p:cNvGrpSpPr/>
+          <p:nvPr/>
+        </p:nvGrpSpPr>
+        <p:grpSpPr>
+          <a:xfrm rot="0">
+            <a:off x="2333989" y="3395937"/>
+            <a:ext cx="14508661" cy="1739728"/>
+            <a:chOff x="0" y="0"/>
+            <a:chExt cx="19344881" cy="2319638"/>
+          </a:xfrm>
+        </p:grpSpPr>
+        <p:sp>
+          <p:nvSpPr>
+            <p:cNvPr name="Freeform 11" id="11"/>
+            <p:cNvSpPr/>
+            <p:nvPr/>
+          </p:nvSpPr>
+          <p:spPr>
+            <a:xfrm flipH="false" flipV="false" rot="0">
+              <a:off x="0" y="0"/>
+              <a:ext cx="5620268" cy="2319638"/>
+            </a:xfrm>
+            <a:custGeom>
+              <a:avLst/>
+              <a:gdLst/>
+              <a:ahLst/>
+              <a:cxnLst/>
+              <a:rect r="r" b="b" t="t" l="l"/>
+              <a:pathLst>
+                <a:path h="2319638" w="5620268">
+                  <a:moveTo>
+                    <a:pt x="0" y="0"/>
+                  </a:moveTo>
+                  <a:lnTo>
+                    <a:pt x="5620268" y="0"/>
+                  </a:lnTo>
+                  <a:lnTo>
+                    <a:pt x="5620268" y="2319638"/>
+                  </a:lnTo>
+                  <a:lnTo>
+                    <a:pt x="0" y="2319638"/>
+                  </a:lnTo>
+                  <a:lnTo>
+                    <a:pt x="0" y="0"/>
+                  </a:lnTo>
+                  <a:close/>
+                </a:path>
+              </a:pathLst>
+            </a:custGeom>
+            <a:blipFill>
+              <a:blip r:embed="rId6">
+                <a:extLst>
+                  <a:ext uri="{96DAC541-7B7A-43D3-8B79-37D633B846F1}">
+                    <asvg:svgBlip xmlns:asvg="http://schemas.microsoft.com/office/drawing/2016/SVG/main" r:embed="rId7"/>
+                  </a:ext>
+                </a:extLst>
+              </a:blip>
+              <a:stretch>
+                <a:fillRect l="0" t="0" r="0" b="0"/>
+              </a:stretch>
+            </a:blipFill>
+          </p:spPr>
+        </p:sp>
+        <p:sp>
+          <p:nvSpPr>
+            <p:cNvPr name="Freeform 12" id="12"/>
+            <p:cNvSpPr/>
+            <p:nvPr/>
+          </p:nvSpPr>
+          <p:spPr>
+            <a:xfrm flipH="false" flipV="false" rot="0">
+              <a:off x="5132940" y="0"/>
+              <a:ext cx="5620268" cy="2319638"/>
+            </a:xfrm>
+            <a:custGeom>
+              <a:avLst/>
+              <a:gdLst/>
+              <a:ahLst/>
+              <a:cxnLst/>
+              <a:rect r="r" b="b" t="t" l="l"/>
+              <a:pathLst>
+                <a:path h="2319638" w="5620268">
+                  <a:moveTo>
+                    <a:pt x="0" y="0"/>
+                  </a:moveTo>
+                  <a:lnTo>
+                    <a:pt x="5620268" y="0"/>
+                  </a:lnTo>
+                  <a:lnTo>
+                    <a:pt x="5620268" y="2319638"/>
+                  </a:lnTo>
+                  <a:lnTo>
+                    <a:pt x="0" y="2319638"/>
+                  </a:lnTo>
+                  <a:lnTo>
+                    <a:pt x="0" y="0"/>
+                  </a:lnTo>
+                  <a:close/>
+                </a:path>
+              </a:pathLst>
+            </a:custGeom>
+            <a:blipFill>
+              <a:blip r:embed="rId6">
+                <a:extLst>
+                  <a:ext uri="{96DAC541-7B7A-43D3-8B79-37D633B846F1}">
+                    <asvg:svgBlip xmlns:asvg="http://schemas.microsoft.com/office/drawing/2016/SVG/main" r:embed="rId7"/>
+                  </a:ext>
+                </a:extLst>
+              </a:blip>
+              <a:stretch>
+                <a:fillRect l="0" t="0" r="0" b="0"/>
+              </a:stretch>
+            </a:blipFill>
+          </p:spPr>
+        </p:sp>
+        <p:sp>
+          <p:nvSpPr>
+            <p:cNvPr name="Freeform 13" id="13"/>
+            <p:cNvSpPr/>
+            <p:nvPr/>
+          </p:nvSpPr>
+          <p:spPr>
+            <a:xfrm flipH="false" flipV="false" rot="0">
+              <a:off x="10212220" y="0"/>
+              <a:ext cx="5620268" cy="2319638"/>
+            </a:xfrm>
+            <a:custGeom>
+              <a:avLst/>
+              <a:gdLst/>
+              <a:ahLst/>
+              <a:cxnLst/>
+              <a:rect r="r" b="b" t="t" l="l"/>
+              <a:pathLst>
+                <a:path h="2319638" w="5620268">
+                  <a:moveTo>
+                    <a:pt x="0" y="0"/>
+                  </a:moveTo>
+                  <a:lnTo>
+                    <a:pt x="5620268" y="0"/>
+                  </a:lnTo>
+                  <a:lnTo>
+                    <a:pt x="5620268" y="2319638"/>
+                  </a:lnTo>
+                  <a:lnTo>
+                    <a:pt x="0" y="2319638"/>
+                  </a:lnTo>
+                  <a:lnTo>
+                    <a:pt x="0" y="0"/>
+                  </a:lnTo>
+                  <a:close/>
+                </a:path>
+              </a:pathLst>
+            </a:custGeom>
+            <a:blipFill>
+              <a:blip r:embed="rId6">
+                <a:extLst>
+                  <a:ext uri="{96DAC541-7B7A-43D3-8B79-37D633B846F1}">
+                    <asvg:svgBlip xmlns:asvg="http://schemas.microsoft.com/office/drawing/2016/SVG/main" r:embed="rId7"/>
+                  </a:ext>
+                </a:extLst>
+              </a:blip>
+              <a:stretch>
+                <a:fillRect l="0" t="0" r="0" b="0"/>
+              </a:stretch>
+            </a:blipFill>
+          </p:spPr>
+        </p:sp>
+        <p:sp>
+          <p:nvSpPr>
+            <p:cNvPr name="Freeform 14" id="14"/>
+            <p:cNvSpPr/>
+            <p:nvPr/>
+          </p:nvSpPr>
+          <p:spPr>
+            <a:xfrm flipH="false" flipV="false" rot="0">
+              <a:off x="13724613" y="0"/>
+              <a:ext cx="5620268" cy="2319638"/>
+            </a:xfrm>
+            <a:custGeom>
+              <a:avLst/>
+              <a:gdLst/>
+              <a:ahLst/>
+              <a:cxnLst/>
+              <a:rect r="r" b="b" t="t" l="l"/>
+              <a:pathLst>
+                <a:path h="2319638" w="5620268">
+                  <a:moveTo>
+                    <a:pt x="0" y="0"/>
+                  </a:moveTo>
+                  <a:lnTo>
+                    <a:pt x="5620268" y="0"/>
+                  </a:lnTo>
+                  <a:lnTo>
+                    <a:pt x="5620268" y="2319638"/>
+                  </a:lnTo>
+                  <a:lnTo>
+                    <a:pt x="0" y="2319638"/>
+                  </a:lnTo>
+                  <a:lnTo>
+                    <a:pt x="0" y="0"/>
+                  </a:lnTo>
+                  <a:close/>
+                </a:path>
+              </a:pathLst>
+            </a:custGeom>
+            <a:blipFill>
+              <a:blip r:embed="rId6">
+                <a:extLst>
+                  <a:ext uri="{96DAC541-7B7A-43D3-8B79-37D633B846F1}">
+                    <asvg:svgBlip xmlns:asvg="http://schemas.microsoft.com/office/drawing/2016/SVG/main" r:embed="rId7"/>
+                  </a:ext>
+                </a:extLst>
+              </a:blip>
+              <a:stretch>
+                <a:fillRect l="0" t="0" r="0" b="0"/>
+              </a:stretch>
+            </a:blipFill>
+          </p:spPr>
+        </p:sp>
+      </p:grpSp>
+      <p:sp>
+        <p:nvSpPr>
+          <p:cNvPr name="TextBox 15" id="15"/>
           <p:cNvSpPr txBox="true"/>
           <p:nvPr/>
         </p:nvSpPr>
         <p:spPr>
           <a:xfrm rot="0">
-            <a:off x="2603070" y="4005346"/>
-            <a:ext cx="13642999" cy="1394078"/>
+            <a:off x="2675992" y="3739301"/>
+            <a:ext cx="13642999" cy="1158240"/>
           </a:xfrm>
           <a:prstGeom prst="rect">
             <a:avLst/>
@@ -6249,27 +6987,27 @@
           <a:p>
             <a:pPr algn="ctr">
               <a:lnSpc>
-                <a:spcPts val="3662"/>
+                <a:spcPts val="4455"/>
               </a:lnSpc>
             </a:pPr>
             <a:r>
-              <a:rPr lang="en-US" sz="3699">
+              <a:rPr lang="en-US" sz="4500">
                 <a:solidFill>
-                  <a:srgbClr val="000000"/>
+                  <a:srgbClr val="A66B49"/>
                 </a:solidFill>
                 <a:latin typeface="Sukar"/>
                 <a:ea typeface="Sukar"/>
                 <a:cs typeface="Sukar"/>
                 <a:sym typeface="Sukar"/>
               </a:rPr>
-              <a:t>¿Qué factores influyen en que una aplicación de Google Play Store sea percibida como de 'buena' o 'mala' calidad? , ¿Podemos predecir la calidad de una aplicación basándonos en sus características?.</a:t>
+              <a:t>¿Qué factores influyen en que una aplicación de Google Play Store sea percibida como de 'buena' o 'mala' calidad?.</a:t>
             </a:r>
           </a:p>
         </p:txBody>
       </p:sp>
       <p:sp>
         <p:nvSpPr>
-          <p:cNvPr name="Freeform 11" id="11"/>
+          <p:cNvPr name="Freeform 16" id="16"/>
           <p:cNvSpPr/>
           <p:nvPr/>
         </p:nvSpPr>
@@ -6297,6 +7035,58 @@
                 </a:lnTo>
                 <a:lnTo>
                   <a:pt x="0" y="3168372"/>
+                </a:lnTo>
+                <a:lnTo>
+                  <a:pt x="0" y="0"/>
+                </a:lnTo>
+                <a:close/>
+              </a:path>
+            </a:pathLst>
+          </a:custGeom>
+          <a:blipFill>
+            <a:blip r:embed="rId8">
+              <a:extLst>
+                <a:ext uri="{96DAC541-7B7A-43D3-8B79-37D633B846F1}">
+                  <asvg:svgBlip xmlns:asvg="http://schemas.microsoft.com/office/drawing/2016/SVG/main" r:embed="rId9"/>
+                </a:ext>
+              </a:extLst>
+            </a:blip>
+            <a:stretch>
+              <a:fillRect l="0" t="0" r="0" b="0"/>
+            </a:stretch>
+          </a:blipFill>
+        </p:spPr>
+      </p:sp>
+      <p:sp>
+        <p:nvSpPr>
+          <p:cNvPr name="Freeform 17" id="17"/>
+          <p:cNvSpPr/>
+          <p:nvPr/>
+        </p:nvSpPr>
+        <p:spPr>
+          <a:xfrm flipH="false" flipV="false" rot="0">
+            <a:off x="6181571" y="5462941"/>
+            <a:ext cx="3867729" cy="1596317"/>
+          </a:xfrm>
+          <a:custGeom>
+            <a:avLst/>
+            <a:gdLst/>
+            <a:ahLst/>
+            <a:cxnLst/>
+            <a:rect r="r" b="b" t="t" l="l"/>
+            <a:pathLst>
+              <a:path h="1596317" w="3867729">
+                <a:moveTo>
+                  <a:pt x="0" y="0"/>
+                </a:moveTo>
+                <a:lnTo>
+                  <a:pt x="3867728" y="0"/>
+                </a:lnTo>
+                <a:lnTo>
+                  <a:pt x="3867728" y="1596317"/>
+                </a:lnTo>
+                <a:lnTo>
+                  <a:pt x="0" y="1596317"/>
                 </a:lnTo>
                 <a:lnTo>
                   <a:pt x="0" y="0"/>
@@ -6318,6 +7108,307 @@
             </a:stretch>
           </a:blipFill>
         </p:spPr>
+      </p:sp>
+      <p:sp>
+        <p:nvSpPr>
+          <p:cNvPr name="Freeform 18" id="18"/>
+          <p:cNvSpPr/>
+          <p:nvPr/>
+        </p:nvSpPr>
+        <p:spPr>
+          <a:xfrm flipH="false" flipV="false" rot="0">
+            <a:off x="9700104" y="5462941"/>
+            <a:ext cx="3867729" cy="1596317"/>
+          </a:xfrm>
+          <a:custGeom>
+            <a:avLst/>
+            <a:gdLst/>
+            <a:ahLst/>
+            <a:cxnLst/>
+            <a:rect r="r" b="b" t="t" l="l"/>
+            <a:pathLst>
+              <a:path h="1596317" w="3867729">
+                <a:moveTo>
+                  <a:pt x="0" y="0"/>
+                </a:moveTo>
+                <a:lnTo>
+                  <a:pt x="3867728" y="0"/>
+                </a:lnTo>
+                <a:lnTo>
+                  <a:pt x="3867728" y="1596317"/>
+                </a:lnTo>
+                <a:lnTo>
+                  <a:pt x="0" y="1596317"/>
+                </a:lnTo>
+                <a:lnTo>
+                  <a:pt x="0" y="0"/>
+                </a:lnTo>
+                <a:close/>
+              </a:path>
+            </a:pathLst>
+          </a:custGeom>
+          <a:blipFill>
+            <a:blip r:embed="rId6">
+              <a:extLst>
+                <a:ext uri="{96DAC541-7B7A-43D3-8B79-37D633B846F1}">
+                  <asvg:svgBlip xmlns:asvg="http://schemas.microsoft.com/office/drawing/2016/SVG/main" r:embed="rId7"/>
+                </a:ext>
+              </a:extLst>
+            </a:blip>
+            <a:stretch>
+              <a:fillRect l="0" t="0" r="0" b="0"/>
+            </a:stretch>
+          </a:blipFill>
+        </p:spPr>
+      </p:sp>
+      <p:sp>
+        <p:nvSpPr>
+          <p:cNvPr name="Freeform 19" id="19"/>
+          <p:cNvSpPr/>
+          <p:nvPr/>
+        </p:nvSpPr>
+        <p:spPr>
+          <a:xfrm flipH="false" flipV="false" rot="0">
+            <a:off x="12117245" y="5462941"/>
+            <a:ext cx="3867729" cy="1596317"/>
+          </a:xfrm>
+          <a:custGeom>
+            <a:avLst/>
+            <a:gdLst/>
+            <a:ahLst/>
+            <a:cxnLst/>
+            <a:rect r="r" b="b" t="t" l="l"/>
+            <a:pathLst>
+              <a:path h="1596317" w="3867729">
+                <a:moveTo>
+                  <a:pt x="0" y="0"/>
+                </a:moveTo>
+                <a:lnTo>
+                  <a:pt x="3867729" y="0"/>
+                </a:lnTo>
+                <a:lnTo>
+                  <a:pt x="3867729" y="1596317"/>
+                </a:lnTo>
+                <a:lnTo>
+                  <a:pt x="0" y="1596317"/>
+                </a:lnTo>
+                <a:lnTo>
+                  <a:pt x="0" y="0"/>
+                </a:lnTo>
+                <a:close/>
+              </a:path>
+            </a:pathLst>
+          </a:custGeom>
+          <a:blipFill>
+            <a:blip r:embed="rId6">
+              <a:extLst>
+                <a:ext uri="{96DAC541-7B7A-43D3-8B79-37D633B846F1}">
+                  <asvg:svgBlip xmlns:asvg="http://schemas.microsoft.com/office/drawing/2016/SVG/main" r:embed="rId7"/>
+                </a:ext>
+              </a:extLst>
+            </a:blip>
+            <a:stretch>
+              <a:fillRect l="0" t="0" r="0" b="0"/>
+            </a:stretch>
+          </a:blipFill>
+        </p:spPr>
+      </p:sp>
+      <p:sp>
+        <p:nvSpPr>
+          <p:cNvPr name="Freeform 20" id="20"/>
+          <p:cNvSpPr/>
+          <p:nvPr/>
+        </p:nvSpPr>
+        <p:spPr>
+          <a:xfrm flipH="false" flipV="false" rot="0">
+            <a:off x="6181571" y="6261100"/>
+            <a:ext cx="3867729" cy="1596317"/>
+          </a:xfrm>
+          <a:custGeom>
+            <a:avLst/>
+            <a:gdLst/>
+            <a:ahLst/>
+            <a:cxnLst/>
+            <a:rect r="r" b="b" t="t" l="l"/>
+            <a:pathLst>
+              <a:path h="1596317" w="3867729">
+                <a:moveTo>
+                  <a:pt x="0" y="0"/>
+                </a:moveTo>
+                <a:lnTo>
+                  <a:pt x="3867728" y="0"/>
+                </a:lnTo>
+                <a:lnTo>
+                  <a:pt x="3867728" y="1596317"/>
+                </a:lnTo>
+                <a:lnTo>
+                  <a:pt x="0" y="1596317"/>
+                </a:lnTo>
+                <a:lnTo>
+                  <a:pt x="0" y="0"/>
+                </a:lnTo>
+                <a:close/>
+              </a:path>
+            </a:pathLst>
+          </a:custGeom>
+          <a:blipFill>
+            <a:blip r:embed="rId6">
+              <a:extLst>
+                <a:ext uri="{96DAC541-7B7A-43D3-8B79-37D633B846F1}">
+                  <asvg:svgBlip xmlns:asvg="http://schemas.microsoft.com/office/drawing/2016/SVG/main" r:embed="rId7"/>
+                </a:ext>
+              </a:extLst>
+            </a:blip>
+            <a:stretch>
+              <a:fillRect l="0" t="0" r="0" b="0"/>
+            </a:stretch>
+          </a:blipFill>
+        </p:spPr>
+      </p:sp>
+      <p:sp>
+        <p:nvSpPr>
+          <p:cNvPr name="Freeform 21" id="21"/>
+          <p:cNvSpPr/>
+          <p:nvPr/>
+        </p:nvSpPr>
+        <p:spPr>
+          <a:xfrm flipH="false" flipV="false" rot="0">
+            <a:off x="9554003" y="6261100"/>
+            <a:ext cx="3867729" cy="1596317"/>
+          </a:xfrm>
+          <a:custGeom>
+            <a:avLst/>
+            <a:gdLst/>
+            <a:ahLst/>
+            <a:cxnLst/>
+            <a:rect r="r" b="b" t="t" l="l"/>
+            <a:pathLst>
+              <a:path h="1596317" w="3867729">
+                <a:moveTo>
+                  <a:pt x="0" y="0"/>
+                </a:moveTo>
+                <a:lnTo>
+                  <a:pt x="3867729" y="0"/>
+                </a:lnTo>
+                <a:lnTo>
+                  <a:pt x="3867729" y="1596317"/>
+                </a:lnTo>
+                <a:lnTo>
+                  <a:pt x="0" y="1596317"/>
+                </a:lnTo>
+                <a:lnTo>
+                  <a:pt x="0" y="0"/>
+                </a:lnTo>
+                <a:close/>
+              </a:path>
+            </a:pathLst>
+          </a:custGeom>
+          <a:blipFill>
+            <a:blip r:embed="rId6">
+              <a:extLst>
+                <a:ext uri="{96DAC541-7B7A-43D3-8B79-37D633B846F1}">
+                  <asvg:svgBlip xmlns:asvg="http://schemas.microsoft.com/office/drawing/2016/SVG/main" r:embed="rId7"/>
+                </a:ext>
+              </a:extLst>
+            </a:blip>
+            <a:stretch>
+              <a:fillRect l="0" t="0" r="0" b="0"/>
+            </a:stretch>
+          </a:blipFill>
+        </p:spPr>
+      </p:sp>
+      <p:sp>
+        <p:nvSpPr>
+          <p:cNvPr name="Freeform 22" id="22"/>
+          <p:cNvSpPr/>
+          <p:nvPr/>
+        </p:nvSpPr>
+        <p:spPr>
+          <a:xfrm flipH="false" flipV="false" rot="0">
+            <a:off x="12117245" y="6261100"/>
+            <a:ext cx="3867729" cy="1596317"/>
+          </a:xfrm>
+          <a:custGeom>
+            <a:avLst/>
+            <a:gdLst/>
+            <a:ahLst/>
+            <a:cxnLst/>
+            <a:rect r="r" b="b" t="t" l="l"/>
+            <a:pathLst>
+              <a:path h="1596317" w="3867729">
+                <a:moveTo>
+                  <a:pt x="0" y="0"/>
+                </a:moveTo>
+                <a:lnTo>
+                  <a:pt x="3867729" y="0"/>
+                </a:lnTo>
+                <a:lnTo>
+                  <a:pt x="3867729" y="1596317"/>
+                </a:lnTo>
+                <a:lnTo>
+                  <a:pt x="0" y="1596317"/>
+                </a:lnTo>
+                <a:lnTo>
+                  <a:pt x="0" y="0"/>
+                </a:lnTo>
+                <a:close/>
+              </a:path>
+            </a:pathLst>
+          </a:custGeom>
+          <a:blipFill>
+            <a:blip r:embed="rId6">
+              <a:extLst>
+                <a:ext uri="{96DAC541-7B7A-43D3-8B79-37D633B846F1}">
+                  <asvg:svgBlip xmlns:asvg="http://schemas.microsoft.com/office/drawing/2016/SVG/main" r:embed="rId7"/>
+                </a:ext>
+              </a:extLst>
+            </a:blip>
+            <a:stretch>
+              <a:fillRect l="0" t="0" r="0" b="0"/>
+            </a:stretch>
+          </a:blipFill>
+        </p:spPr>
+      </p:sp>
+      <p:sp>
+        <p:nvSpPr>
+          <p:cNvPr name="TextBox 23" id="23"/>
+          <p:cNvSpPr txBox="true"/>
+          <p:nvPr/>
+        </p:nvSpPr>
+        <p:spPr>
+          <a:xfrm rot="0">
+            <a:off x="6407151" y="5754851"/>
+            <a:ext cx="9352242" cy="1720215"/>
+          </a:xfrm>
+          <a:prstGeom prst="rect">
+            <a:avLst/>
+          </a:prstGeom>
+        </p:spPr>
+        <p:txBody>
+          <a:bodyPr anchor="t" rtlCol="false" tIns="0" lIns="0" bIns="0" rIns="0">
+            <a:spAutoFit/>
+          </a:bodyPr>
+          <a:lstStyle/>
+          <a:p>
+            <a:pPr algn="ctr">
+              <a:lnSpc>
+                <a:spcPts val="4455"/>
+              </a:lnSpc>
+            </a:pPr>
+            <a:r>
+              <a:rPr lang="en-US" sz="4500">
+                <a:solidFill>
+                  <a:srgbClr val="A66B49"/>
+                </a:solidFill>
+                <a:latin typeface="Sukar"/>
+                <a:ea typeface="Sukar"/>
+                <a:cs typeface="Sukar"/>
+                <a:sym typeface="Sukar"/>
+              </a:rPr>
+              <a:t>¿Podemos predecir la calidad de una aplicación basándonos en sus características?.</a:t>
+            </a:r>
+          </a:p>
+        </p:txBody>
       </p:sp>
     </p:spTree>
   </p:cSld>
@@ -6358,8 +7449,8 @@
           <p:nvPr/>
         </p:nvSpPr>
         <p:spPr>
-          <a:xfrm flipH="false" flipV="false" rot="3783878">
-            <a:off x="16832793" y="441609"/>
+          <a:xfrm flipH="false" flipV="false" rot="2081686">
+            <a:off x="14578224" y="626232"/>
             <a:ext cx="853014" cy="804935"/>
           </a:xfrm>
           <a:custGeom>
@@ -6410,9 +7501,9 @@
           <p:nvPr/>
         </p:nvSpPr>
         <p:spPr>
-          <a:xfrm flipH="false" flipV="false" rot="-2526217">
-            <a:off x="9994312" y="87352"/>
-            <a:ext cx="1404298" cy="1325147"/>
+          <a:xfrm flipH="false" flipV="false" rot="-1314742">
+            <a:off x="10274135" y="196913"/>
+            <a:ext cx="1762940" cy="1663575"/>
           </a:xfrm>
           <a:custGeom>
             <a:avLst/>
@@ -6421,18 +7512,18 @@
             <a:cxnLst/>
             <a:rect r="r" b="b" t="t" l="l"/>
             <a:pathLst>
-              <a:path h="1325147" w="1404298">
+              <a:path h="1663575" w="1762940">
                 <a:moveTo>
                   <a:pt x="0" y="0"/>
                 </a:moveTo>
                 <a:lnTo>
-                  <a:pt x="1404298" y="0"/>
-                </a:lnTo>
-                <a:lnTo>
-                  <a:pt x="1404298" y="1325147"/>
-                </a:lnTo>
-                <a:lnTo>
-                  <a:pt x="0" y="1325147"/>
+                  <a:pt x="1762940" y="0"/>
+                </a:lnTo>
+                <a:lnTo>
+                  <a:pt x="1762940" y="1663574"/>
+                </a:lnTo>
+                <a:lnTo>
+                  <a:pt x="0" y="1663574"/>
                 </a:lnTo>
                 <a:lnTo>
                   <a:pt x="0" y="0"/>
@@ -6515,8 +7606,8 @@
         </p:nvSpPr>
         <p:spPr>
           <a:xfrm flipH="false" flipV="false" rot="0">
-            <a:off x="14682512" y="5526883"/>
-            <a:ext cx="3264163" cy="4525703"/>
+            <a:off x="16304568" y="290582"/>
+            <a:ext cx="1587386" cy="2200882"/>
           </a:xfrm>
           <a:custGeom>
             <a:avLst/>
@@ -6525,18 +7616,18 @@
             <a:cxnLst/>
             <a:rect r="r" b="b" t="t" l="l"/>
             <a:pathLst>
-              <a:path h="4525703" w="3264163">
+              <a:path h="2200882" w="1587386">
                 <a:moveTo>
                   <a:pt x="0" y="0"/>
                 </a:moveTo>
                 <a:lnTo>
-                  <a:pt x="3264163" y="0"/>
-                </a:lnTo>
-                <a:lnTo>
-                  <a:pt x="3264163" y="4525703"/>
-                </a:lnTo>
-                <a:lnTo>
-                  <a:pt x="0" y="4525703"/>
+                  <a:pt x="1587387" y="0"/>
+                </a:lnTo>
+                <a:lnTo>
+                  <a:pt x="1587387" y="2200882"/>
+                </a:lnTo>
+                <a:lnTo>
+                  <a:pt x="0" y="2200882"/>
                 </a:lnTo>
                 <a:lnTo>
                   <a:pt x="0" y="0"/>
@@ -6567,7 +7658,7 @@
         </p:nvSpPr>
         <p:spPr>
           <a:xfrm flipH="false" flipV="false" rot="6437899">
-            <a:off x="11366111" y="8826473"/>
+            <a:off x="11044068" y="9404757"/>
             <a:ext cx="1869879" cy="1764486"/>
           </a:xfrm>
           <a:custGeom>
@@ -6619,7 +7710,7 @@
         </p:nvSpPr>
         <p:spPr>
           <a:xfrm flipH="false" flipV="false" rot="-280273">
-            <a:off x="12288897" y="556097"/>
+            <a:off x="12816698" y="1062097"/>
             <a:ext cx="853014" cy="804935"/>
           </a:xfrm>
           <a:custGeom>
@@ -6634,10 +7725,10 @@
                   <a:pt x="0" y="0"/>
                 </a:moveTo>
                 <a:lnTo>
-                  <a:pt x="853015" y="0"/>
-                </a:lnTo>
-                <a:lnTo>
-                  <a:pt x="853015" y="804935"/>
+                  <a:pt x="853014" y="0"/>
+                </a:lnTo>
+                <a:lnTo>
+                  <a:pt x="853014" y="804935"/>
                 </a:lnTo>
                 <a:lnTo>
                   <a:pt x="0" y="804935"/>
@@ -6670,8 +7761,8 @@
           <p:nvPr/>
         </p:nvSpPr>
         <p:spPr>
-          <a:xfrm flipH="false" flipV="false" rot="3783878">
-            <a:off x="17217703" y="1835994"/>
+          <a:xfrm flipH="false" flipV="false" rot="-2059808">
+            <a:off x="16395400" y="9321982"/>
             <a:ext cx="853014" cy="804935"/>
           </a:xfrm>
           <a:custGeom>
@@ -6689,10 +7780,10 @@
                   <a:pt x="853014" y="0"/>
                 </a:lnTo>
                 <a:lnTo>
-                  <a:pt x="853014" y="804936"/>
-                </a:lnTo>
-                <a:lnTo>
-                  <a:pt x="0" y="804936"/>
+                  <a:pt x="853014" y="804935"/>
+                </a:lnTo>
+                <a:lnTo>
+                  <a:pt x="0" y="804935"/>
                 </a:lnTo>
                 <a:lnTo>
                   <a:pt x="0" y="0"/>
@@ -6723,7 +7814,7 @@
         </p:nvSpPr>
         <p:spPr>
           <a:xfrm flipH="false" flipV="false" rot="3270670">
-            <a:off x="15978193" y="3334673"/>
+            <a:off x="4271096" y="9444386"/>
             <a:ext cx="1869879" cy="1764486"/>
           </a:xfrm>
           <a:custGeom>
@@ -6775,8 +7866,8 @@
         </p:nvSpPr>
         <p:spPr>
           <a:xfrm rot="0">
-            <a:off x="1028700" y="483601"/>
-            <a:ext cx="17946749" cy="1072515"/>
+            <a:off x="936931" y="1061357"/>
+            <a:ext cx="9248083" cy="1072515"/>
           </a:xfrm>
           <a:prstGeom prst="rect">
             <a:avLst/>
@@ -6808,16 +7899,499 @@
           </a:p>
         </p:txBody>
       </p:sp>
-      <p:sp>
-        <p:nvSpPr>
-          <p:cNvPr name="TextBox 11" id="11"/>
+      <p:grpSp>
+        <p:nvGrpSpPr>
+          <p:cNvPr name="Group 11" id="11"/>
+          <p:cNvGrpSpPr/>
+          <p:nvPr/>
+        </p:nvGrpSpPr>
+        <p:grpSpPr>
+          <a:xfrm rot="0">
+            <a:off x="1163988" y="2945801"/>
+            <a:ext cx="15435027" cy="5420677"/>
+            <a:chOff x="0" y="0"/>
+            <a:chExt cx="20580036" cy="7227570"/>
+          </a:xfrm>
+        </p:grpSpPr>
+        <p:sp>
+          <p:nvSpPr>
+            <p:cNvPr name="Freeform 12" id="12"/>
+            <p:cNvSpPr/>
+            <p:nvPr/>
+          </p:nvSpPr>
+          <p:spPr>
+            <a:xfrm flipH="false" flipV="false" rot="0">
+              <a:off x="0" y="0"/>
+              <a:ext cx="7463488" cy="3080385"/>
+            </a:xfrm>
+            <a:custGeom>
+              <a:avLst/>
+              <a:gdLst/>
+              <a:ahLst/>
+              <a:cxnLst/>
+              <a:rect r="r" b="b" t="t" l="l"/>
+              <a:pathLst>
+                <a:path h="3080385" w="7463488">
+                  <a:moveTo>
+                    <a:pt x="0" y="0"/>
+                  </a:moveTo>
+                  <a:lnTo>
+                    <a:pt x="7463488" y="0"/>
+                  </a:lnTo>
+                  <a:lnTo>
+                    <a:pt x="7463488" y="3080385"/>
+                  </a:lnTo>
+                  <a:lnTo>
+                    <a:pt x="0" y="3080385"/>
+                  </a:lnTo>
+                  <a:lnTo>
+                    <a:pt x="0" y="0"/>
+                  </a:lnTo>
+                  <a:close/>
+                </a:path>
+              </a:pathLst>
+            </a:custGeom>
+            <a:blipFill>
+              <a:blip r:embed="rId6">
+                <a:extLst>
+                  <a:ext uri="{96DAC541-7B7A-43D3-8B79-37D633B846F1}">
+                    <asvg:svgBlip xmlns:asvg="http://schemas.microsoft.com/office/drawing/2016/SVG/main" r:embed="rId7"/>
+                  </a:ext>
+                </a:extLst>
+              </a:blip>
+              <a:stretch>
+                <a:fillRect l="0" t="0" r="0" b="0"/>
+              </a:stretch>
+            </a:blipFill>
+          </p:spPr>
+        </p:sp>
+        <p:sp>
+          <p:nvSpPr>
+            <p:cNvPr name="Freeform 13" id="13"/>
+            <p:cNvSpPr/>
+            <p:nvPr/>
+          </p:nvSpPr>
+          <p:spPr>
+            <a:xfrm flipH="false" flipV="false" rot="0">
+              <a:off x="0" y="4147185"/>
+              <a:ext cx="7463488" cy="3080385"/>
+            </a:xfrm>
+            <a:custGeom>
+              <a:avLst/>
+              <a:gdLst/>
+              <a:ahLst/>
+              <a:cxnLst/>
+              <a:rect r="r" b="b" t="t" l="l"/>
+              <a:pathLst>
+                <a:path h="3080385" w="7463488">
+                  <a:moveTo>
+                    <a:pt x="0" y="0"/>
+                  </a:moveTo>
+                  <a:lnTo>
+                    <a:pt x="7463488" y="0"/>
+                  </a:lnTo>
+                  <a:lnTo>
+                    <a:pt x="7463488" y="3080385"/>
+                  </a:lnTo>
+                  <a:lnTo>
+                    <a:pt x="0" y="3080385"/>
+                  </a:lnTo>
+                  <a:lnTo>
+                    <a:pt x="0" y="0"/>
+                  </a:lnTo>
+                  <a:close/>
+                </a:path>
+              </a:pathLst>
+            </a:custGeom>
+            <a:blipFill>
+              <a:blip r:embed="rId6">
+                <a:extLst>
+                  <a:ext uri="{96DAC541-7B7A-43D3-8B79-37D633B846F1}">
+                    <asvg:svgBlip xmlns:asvg="http://schemas.microsoft.com/office/drawing/2016/SVG/main" r:embed="rId7"/>
+                  </a:ext>
+                </a:extLst>
+              </a:blip>
+              <a:stretch>
+                <a:fillRect l="0" t="0" r="0" b="0"/>
+              </a:stretch>
+            </a:blipFill>
+          </p:spPr>
+        </p:sp>
+        <p:sp>
+          <p:nvSpPr>
+            <p:cNvPr name="Freeform 14" id="14"/>
+            <p:cNvSpPr/>
+            <p:nvPr/>
+          </p:nvSpPr>
+          <p:spPr>
+            <a:xfrm flipH="false" flipV="false" rot="0">
+              <a:off x="0" y="2358543"/>
+              <a:ext cx="7463488" cy="3080385"/>
+            </a:xfrm>
+            <a:custGeom>
+              <a:avLst/>
+              <a:gdLst/>
+              <a:ahLst/>
+              <a:cxnLst/>
+              <a:rect r="r" b="b" t="t" l="l"/>
+              <a:pathLst>
+                <a:path h="3080385" w="7463488">
+                  <a:moveTo>
+                    <a:pt x="0" y="0"/>
+                  </a:moveTo>
+                  <a:lnTo>
+                    <a:pt x="7463488" y="0"/>
+                  </a:lnTo>
+                  <a:lnTo>
+                    <a:pt x="7463488" y="3080385"/>
+                  </a:lnTo>
+                  <a:lnTo>
+                    <a:pt x="0" y="3080385"/>
+                  </a:lnTo>
+                  <a:lnTo>
+                    <a:pt x="0" y="0"/>
+                  </a:lnTo>
+                  <a:close/>
+                </a:path>
+              </a:pathLst>
+            </a:custGeom>
+            <a:blipFill>
+              <a:blip r:embed="rId6">
+                <a:extLst>
+                  <a:ext uri="{96DAC541-7B7A-43D3-8B79-37D633B846F1}">
+                    <asvg:svgBlip xmlns:asvg="http://schemas.microsoft.com/office/drawing/2016/SVG/main" r:embed="rId7"/>
+                  </a:ext>
+                </a:extLst>
+              </a:blip>
+              <a:stretch>
+                <a:fillRect l="0" t="0" r="0" b="0"/>
+              </a:stretch>
+            </a:blipFill>
+          </p:spPr>
+        </p:sp>
+        <p:sp>
+          <p:nvSpPr>
+            <p:cNvPr name="Freeform 15" id="15"/>
+            <p:cNvSpPr/>
+            <p:nvPr/>
+          </p:nvSpPr>
+          <p:spPr>
+            <a:xfrm flipH="false" flipV="false" rot="0">
+              <a:off x="6676010" y="0"/>
+              <a:ext cx="7463488" cy="3080385"/>
+            </a:xfrm>
+            <a:custGeom>
+              <a:avLst/>
+              <a:gdLst/>
+              <a:ahLst/>
+              <a:cxnLst/>
+              <a:rect r="r" b="b" t="t" l="l"/>
+              <a:pathLst>
+                <a:path h="3080385" w="7463488">
+                  <a:moveTo>
+                    <a:pt x="0" y="0"/>
+                  </a:moveTo>
+                  <a:lnTo>
+                    <a:pt x="7463487" y="0"/>
+                  </a:lnTo>
+                  <a:lnTo>
+                    <a:pt x="7463487" y="3080385"/>
+                  </a:lnTo>
+                  <a:lnTo>
+                    <a:pt x="0" y="3080385"/>
+                  </a:lnTo>
+                  <a:lnTo>
+                    <a:pt x="0" y="0"/>
+                  </a:lnTo>
+                  <a:close/>
+                </a:path>
+              </a:pathLst>
+            </a:custGeom>
+            <a:blipFill>
+              <a:blip r:embed="rId6">
+                <a:extLst>
+                  <a:ext uri="{96DAC541-7B7A-43D3-8B79-37D633B846F1}">
+                    <asvg:svgBlip xmlns:asvg="http://schemas.microsoft.com/office/drawing/2016/SVG/main" r:embed="rId7"/>
+                  </a:ext>
+                </a:extLst>
+              </a:blip>
+              <a:stretch>
+                <a:fillRect l="0" t="0" r="0" b="0"/>
+              </a:stretch>
+            </a:blipFill>
+          </p:spPr>
+        </p:sp>
+        <p:sp>
+          <p:nvSpPr>
+            <p:cNvPr name="Freeform 16" id="16"/>
+            <p:cNvSpPr/>
+            <p:nvPr/>
+          </p:nvSpPr>
+          <p:spPr>
+            <a:xfrm flipH="false" flipV="false" rot="0">
+              <a:off x="6676010" y="4147185"/>
+              <a:ext cx="7463488" cy="3080385"/>
+            </a:xfrm>
+            <a:custGeom>
+              <a:avLst/>
+              <a:gdLst/>
+              <a:ahLst/>
+              <a:cxnLst/>
+              <a:rect r="r" b="b" t="t" l="l"/>
+              <a:pathLst>
+                <a:path h="3080385" w="7463488">
+                  <a:moveTo>
+                    <a:pt x="0" y="0"/>
+                  </a:moveTo>
+                  <a:lnTo>
+                    <a:pt x="7463487" y="0"/>
+                  </a:lnTo>
+                  <a:lnTo>
+                    <a:pt x="7463487" y="3080385"/>
+                  </a:lnTo>
+                  <a:lnTo>
+                    <a:pt x="0" y="3080385"/>
+                  </a:lnTo>
+                  <a:lnTo>
+                    <a:pt x="0" y="0"/>
+                  </a:lnTo>
+                  <a:close/>
+                </a:path>
+              </a:pathLst>
+            </a:custGeom>
+            <a:blipFill>
+              <a:blip r:embed="rId6">
+                <a:extLst>
+                  <a:ext uri="{96DAC541-7B7A-43D3-8B79-37D633B846F1}">
+                    <asvg:svgBlip xmlns:asvg="http://schemas.microsoft.com/office/drawing/2016/SVG/main" r:embed="rId7"/>
+                  </a:ext>
+                </a:extLst>
+              </a:blip>
+              <a:stretch>
+                <a:fillRect l="0" t="0" r="0" b="0"/>
+              </a:stretch>
+            </a:blipFill>
+          </p:spPr>
+        </p:sp>
+        <p:sp>
+          <p:nvSpPr>
+            <p:cNvPr name="Freeform 17" id="17"/>
+            <p:cNvSpPr/>
+            <p:nvPr/>
+          </p:nvSpPr>
+          <p:spPr>
+            <a:xfrm flipH="false" flipV="false" rot="0">
+              <a:off x="6676010" y="2358543"/>
+              <a:ext cx="7463488" cy="3080385"/>
+            </a:xfrm>
+            <a:custGeom>
+              <a:avLst/>
+              <a:gdLst/>
+              <a:ahLst/>
+              <a:cxnLst/>
+              <a:rect r="r" b="b" t="t" l="l"/>
+              <a:pathLst>
+                <a:path h="3080385" w="7463488">
+                  <a:moveTo>
+                    <a:pt x="0" y="0"/>
+                  </a:moveTo>
+                  <a:lnTo>
+                    <a:pt x="7463487" y="0"/>
+                  </a:lnTo>
+                  <a:lnTo>
+                    <a:pt x="7463487" y="3080385"/>
+                  </a:lnTo>
+                  <a:lnTo>
+                    <a:pt x="0" y="3080385"/>
+                  </a:lnTo>
+                  <a:lnTo>
+                    <a:pt x="0" y="0"/>
+                  </a:lnTo>
+                  <a:close/>
+                </a:path>
+              </a:pathLst>
+            </a:custGeom>
+            <a:blipFill>
+              <a:blip r:embed="rId6">
+                <a:extLst>
+                  <a:ext uri="{96DAC541-7B7A-43D3-8B79-37D633B846F1}">
+                    <asvg:svgBlip xmlns:asvg="http://schemas.microsoft.com/office/drawing/2016/SVG/main" r:embed="rId7"/>
+                  </a:ext>
+                </a:extLst>
+              </a:blip>
+              <a:stretch>
+                <a:fillRect l="0" t="0" r="0" b="0"/>
+              </a:stretch>
+            </a:blipFill>
+          </p:spPr>
+        </p:sp>
+        <p:sp>
+          <p:nvSpPr>
+            <p:cNvPr name="Freeform 18" id="18"/>
+            <p:cNvSpPr/>
+            <p:nvPr/>
+          </p:nvSpPr>
+          <p:spPr>
+            <a:xfrm flipH="false" flipV="false" rot="0">
+              <a:off x="13116549" y="0"/>
+              <a:ext cx="7463488" cy="3080385"/>
+            </a:xfrm>
+            <a:custGeom>
+              <a:avLst/>
+              <a:gdLst/>
+              <a:ahLst/>
+              <a:cxnLst/>
+              <a:rect r="r" b="b" t="t" l="l"/>
+              <a:pathLst>
+                <a:path h="3080385" w="7463488">
+                  <a:moveTo>
+                    <a:pt x="0" y="0"/>
+                  </a:moveTo>
+                  <a:lnTo>
+                    <a:pt x="7463487" y="0"/>
+                  </a:lnTo>
+                  <a:lnTo>
+                    <a:pt x="7463487" y="3080385"/>
+                  </a:lnTo>
+                  <a:lnTo>
+                    <a:pt x="0" y="3080385"/>
+                  </a:lnTo>
+                  <a:lnTo>
+                    <a:pt x="0" y="0"/>
+                  </a:lnTo>
+                  <a:close/>
+                </a:path>
+              </a:pathLst>
+            </a:custGeom>
+            <a:blipFill>
+              <a:blip r:embed="rId6">
+                <a:extLst>
+                  <a:ext uri="{96DAC541-7B7A-43D3-8B79-37D633B846F1}">
+                    <asvg:svgBlip xmlns:asvg="http://schemas.microsoft.com/office/drawing/2016/SVG/main" r:embed="rId7"/>
+                  </a:ext>
+                </a:extLst>
+              </a:blip>
+              <a:stretch>
+                <a:fillRect l="0" t="0" r="0" b="0"/>
+              </a:stretch>
+            </a:blipFill>
+          </p:spPr>
+        </p:sp>
+        <p:sp>
+          <p:nvSpPr>
+            <p:cNvPr name="Freeform 19" id="19"/>
+            <p:cNvSpPr/>
+            <p:nvPr/>
+          </p:nvSpPr>
+          <p:spPr>
+            <a:xfrm flipH="false" flipV="false" rot="0">
+              <a:off x="13116549" y="4147185"/>
+              <a:ext cx="7463488" cy="3080385"/>
+            </a:xfrm>
+            <a:custGeom>
+              <a:avLst/>
+              <a:gdLst/>
+              <a:ahLst/>
+              <a:cxnLst/>
+              <a:rect r="r" b="b" t="t" l="l"/>
+              <a:pathLst>
+                <a:path h="3080385" w="7463488">
+                  <a:moveTo>
+                    <a:pt x="0" y="0"/>
+                  </a:moveTo>
+                  <a:lnTo>
+                    <a:pt x="7463487" y="0"/>
+                  </a:lnTo>
+                  <a:lnTo>
+                    <a:pt x="7463487" y="3080385"/>
+                  </a:lnTo>
+                  <a:lnTo>
+                    <a:pt x="0" y="3080385"/>
+                  </a:lnTo>
+                  <a:lnTo>
+                    <a:pt x="0" y="0"/>
+                  </a:lnTo>
+                  <a:close/>
+                </a:path>
+              </a:pathLst>
+            </a:custGeom>
+            <a:blipFill>
+              <a:blip r:embed="rId6">
+                <a:extLst>
+                  <a:ext uri="{96DAC541-7B7A-43D3-8B79-37D633B846F1}">
+                    <asvg:svgBlip xmlns:asvg="http://schemas.microsoft.com/office/drawing/2016/SVG/main" r:embed="rId7"/>
+                  </a:ext>
+                </a:extLst>
+              </a:blip>
+              <a:stretch>
+                <a:fillRect l="0" t="0" r="0" b="0"/>
+              </a:stretch>
+            </a:blipFill>
+          </p:spPr>
+        </p:sp>
+        <p:sp>
+          <p:nvSpPr>
+            <p:cNvPr name="Freeform 20" id="20"/>
+            <p:cNvSpPr/>
+            <p:nvPr/>
+          </p:nvSpPr>
+          <p:spPr>
+            <a:xfrm flipH="false" flipV="false" rot="0">
+              <a:off x="13116549" y="2358543"/>
+              <a:ext cx="7463488" cy="3080385"/>
+            </a:xfrm>
+            <a:custGeom>
+              <a:avLst/>
+              <a:gdLst/>
+              <a:ahLst/>
+              <a:cxnLst/>
+              <a:rect r="r" b="b" t="t" l="l"/>
+              <a:pathLst>
+                <a:path h="3080385" w="7463488">
+                  <a:moveTo>
+                    <a:pt x="0" y="0"/>
+                  </a:moveTo>
+                  <a:lnTo>
+                    <a:pt x="7463487" y="0"/>
+                  </a:lnTo>
+                  <a:lnTo>
+                    <a:pt x="7463487" y="3080385"/>
+                  </a:lnTo>
+                  <a:lnTo>
+                    <a:pt x="0" y="3080385"/>
+                  </a:lnTo>
+                  <a:lnTo>
+                    <a:pt x="0" y="0"/>
+                  </a:lnTo>
+                  <a:close/>
+                </a:path>
+              </a:pathLst>
+            </a:custGeom>
+            <a:blipFill>
+              <a:blip r:embed="rId6">
+                <a:extLst>
+                  <a:ext uri="{96DAC541-7B7A-43D3-8B79-37D633B846F1}">
+                    <asvg:svgBlip xmlns:asvg="http://schemas.microsoft.com/office/drawing/2016/SVG/main" r:embed="rId7"/>
+                  </a:ext>
+                </a:extLst>
+              </a:blip>
+              <a:stretch>
+                <a:fillRect l="0" t="0" r="0" b="0"/>
+              </a:stretch>
+            </a:blipFill>
+          </p:spPr>
+        </p:sp>
+      </p:grpSp>
+      <p:sp>
+        <p:nvSpPr>
+          <p:cNvPr name="TextBox 21" id="21"/>
           <p:cNvSpPr txBox="true"/>
           <p:nvPr/>
         </p:nvSpPr>
         <p:spPr>
           <a:xfrm rot="0">
-            <a:off x="85338" y="1561419"/>
-            <a:ext cx="11712272" cy="763459"/>
+            <a:off x="1313923" y="3414084"/>
+            <a:ext cx="15135157" cy="5184773"/>
           </a:xfrm>
           <a:prstGeom prst="rect">
             <a:avLst/>
@@ -6829,257 +8403,140 @@
           </a:bodyPr>
           <a:lstStyle/>
           <a:p>
-            <a:pPr algn="l" marL="1004791" indent="-502396" lvl="1">
+            <a:pPr algn="l" marL="1079488" indent="-539744" lvl="1">
               <a:lnSpc>
-                <a:spcPts val="5258"/>
+                <a:spcPts val="4549"/>
               </a:lnSpc>
               <a:buFont typeface="Arial"/>
               <a:buChar char="•"/>
             </a:pPr>
             <a:r>
-              <a:rPr lang="en-US" sz="4653">
+              <a:rPr lang="en-US" sz="4999">
                 <a:solidFill>
-                  <a:srgbClr val="616164"/>
-                </a:solidFill>
-                <a:latin typeface="Funtastic"/>
-                <a:ea typeface="Funtastic"/>
-                <a:cs typeface="Funtastic"/>
-                <a:sym typeface="Funtastic"/>
-              </a:rPr>
-              <a:t>Metodología (Ágil)</a:t>
-            </a:r>
-          </a:p>
-        </p:txBody>
-      </p:sp>
-      <p:sp>
-        <p:nvSpPr>
-          <p:cNvPr name="TextBox 12" id="12"/>
-          <p:cNvSpPr txBox="true"/>
-          <p:nvPr/>
-        </p:nvSpPr>
-        <p:spPr>
-          <a:xfrm rot="0">
-            <a:off x="1028700" y="2886738"/>
-            <a:ext cx="13642999" cy="6195821"/>
-          </a:xfrm>
-          <a:prstGeom prst="rect">
-            <a:avLst/>
-          </a:prstGeom>
-        </p:spPr>
-        <p:txBody>
-          <a:bodyPr anchor="t" rtlCol="false" tIns="0" lIns="0" bIns="0" rIns="0">
-            <a:spAutoFit/>
-          </a:bodyPr>
-          <a:lstStyle/>
-          <a:p>
-            <a:pPr algn="just">
-              <a:lnSpc>
-                <a:spcPts val="4058"/>
-              </a:lnSpc>
-            </a:pPr>
-            <a:r>
-              <a:rPr lang="en-US" sz="4099">
-                <a:solidFill>
-                  <a:srgbClr val="000000"/>
+                  <a:srgbClr val="A66B49"/>
                 </a:solidFill>
                 <a:latin typeface="Sukar"/>
                 <a:ea typeface="Sukar"/>
                 <a:cs typeface="Sukar"/>
                 <a:sym typeface="Sukar"/>
               </a:rPr>
-              <a:t>Limpieza de Datos: </a:t>
+              <a:t>Dat</a:t>
             </a:r>
-          </a:p>
-          <a:p>
-            <a:pPr algn="just" marL="885182" indent="-442591" lvl="1">
-              <a:lnSpc>
-                <a:spcPts val="4058"/>
-              </a:lnSpc>
-              <a:buFont typeface="Arial"/>
-              <a:buChar char="•"/>
-            </a:pPr>
             <a:r>
-              <a:rPr lang="en-US" sz="4099">
+              <a:rPr lang="en-US" sz="4999">
                 <a:solidFill>
-                  <a:srgbClr val="000000"/>
+                  <a:srgbClr val="A66B49"/>
                 </a:solidFill>
                 <a:latin typeface="Sukar"/>
                 <a:ea typeface="Sukar"/>
                 <a:cs typeface="Sukar"/>
                 <a:sym typeface="Sukar"/>
               </a:rPr>
-              <a:t>Eliminar </a:t>
+              <a:t>aset: Google Play Store Apps (Lava18).</a:t>
             </a:r>
+          </a:p>
+          <a:p>
+            <a:pPr algn="l">
+              <a:lnSpc>
+                <a:spcPts val="4549"/>
+              </a:lnSpc>
+            </a:pPr>
+          </a:p>
+          <a:p>
+            <a:pPr algn="l" marL="1079488" indent="-539744" lvl="1">
+              <a:lnSpc>
+                <a:spcPts val="4549"/>
+              </a:lnSpc>
+              <a:buFont typeface="Arial"/>
+              <a:buChar char="•"/>
+            </a:pPr>
             <a:r>
-              <a:rPr lang="en-US" sz="4099">
+              <a:rPr lang="en-US" sz="4999">
                 <a:solidFill>
-                  <a:srgbClr val="000000"/>
+                  <a:srgbClr val="A66B49"/>
                 </a:solidFill>
                 <a:latin typeface="Sukar"/>
                 <a:ea typeface="Sukar"/>
                 <a:cs typeface="Sukar"/>
                 <a:sym typeface="Sukar"/>
               </a:rPr>
-              <a:t>duplicados </a:t>
+              <a:t>Stack: Python, Pandas, Scikit-Learn.</a:t>
             </a:r>
           </a:p>
           <a:p>
-            <a:pPr algn="just" marL="885182" indent="-442591" lvl="1">
+            <a:pPr algn="l">
               <a:lnSpc>
-                <a:spcPts val="4058"/>
+                <a:spcPts val="4549"/>
+              </a:lnSpc>
+            </a:pPr>
+          </a:p>
+          <a:p>
+            <a:pPr algn="l" marL="1079488" indent="-539744" lvl="1">
+              <a:lnSpc>
+                <a:spcPts val="4549"/>
               </a:lnSpc>
               <a:buFont typeface="Arial"/>
               <a:buChar char="•"/>
             </a:pPr>
             <a:r>
-              <a:rPr lang="en-US" sz="4099">
+              <a:rPr lang="en-US" sz="4999">
                 <a:solidFill>
-                  <a:srgbClr val="000000"/>
+                  <a:srgbClr val="A66B49"/>
                 </a:solidFill>
                 <a:latin typeface="Sukar"/>
                 <a:ea typeface="Sukar"/>
                 <a:cs typeface="Sukar"/>
                 <a:sym typeface="Sukar"/>
               </a:rPr>
-              <a:t>Manejo de outliers.</a:t>
+              <a:t>Pipeline: Transfor</a:t>
             </a:r>
-          </a:p>
-          <a:p>
-            <a:pPr algn="just" marL="885182" indent="-442591" lvl="1">
-              <a:lnSpc>
-                <a:spcPts val="4058"/>
-              </a:lnSpc>
-              <a:buFont typeface="Arial"/>
-              <a:buChar char="•"/>
-            </a:pPr>
             <a:r>
-              <a:rPr lang="en-US" sz="4099">
+              <a:rPr lang="en-US" sz="4999">
                 <a:solidFill>
-                  <a:srgbClr val="000000"/>
+                  <a:srgbClr val="A66B49"/>
                 </a:solidFill>
                 <a:latin typeface="Sukar"/>
                 <a:ea typeface="Sukar"/>
                 <a:cs typeface="Sukar"/>
                 <a:sym typeface="Sukar"/>
               </a:rPr>
-              <a:t>Asignar </a:t>
+              <a:t>mación de datos mediante ColumnTransformer y OneHotEncoding.</a:t>
             </a:r>
+          </a:p>
+          <a:p>
+            <a:pPr algn="l">
+              <a:lnSpc>
+                <a:spcPts val="4549"/>
+              </a:lnSpc>
+            </a:pPr>
+          </a:p>
+          <a:p>
+            <a:pPr algn="l" marL="1079488" indent="-539744" lvl="1">
+              <a:lnSpc>
+                <a:spcPts val="4549"/>
+              </a:lnSpc>
+              <a:buFont typeface="Arial"/>
+              <a:buChar char="•"/>
+            </a:pPr>
             <a:r>
-              <a:rPr lang="en-US" sz="4099">
+              <a:rPr lang="en-US" sz="4999">
                 <a:solidFill>
-                  <a:srgbClr val="000000"/>
+                  <a:srgbClr val="A66B49"/>
                 </a:solidFill>
                 <a:latin typeface="Sukar"/>
                 <a:ea typeface="Sukar"/>
                 <a:cs typeface="Sukar"/>
                 <a:sym typeface="Sukar"/>
               </a:rPr>
-              <a:t>valores faltantes.</a:t>
+              <a:t>Dashboard: Visualización interactiva con Dash y Plotly.</a:t>
             </a:r>
           </a:p>
           <a:p>
-            <a:pPr algn="just">
+            <a:pPr algn="l">
               <a:lnSpc>
-                <a:spcPts val="4058"/>
+                <a:spcPts val="4549"/>
               </a:lnSpc>
             </a:pPr>
-          </a:p>
-          <a:p>
-            <a:pPr algn="just">
-              <a:lnSpc>
-                <a:spcPts val="4058"/>
-              </a:lnSpc>
-            </a:pPr>
-            <a:r>
-              <a:rPr lang="en-US" sz="4099">
-                <a:solidFill>
-                  <a:srgbClr val="000000"/>
-                </a:solidFill>
-                <a:latin typeface="Sukar"/>
-                <a:ea typeface="Sukar"/>
-                <a:cs typeface="Sukar"/>
-                <a:sym typeface="Sukar"/>
-              </a:rPr>
-              <a:t>Transformación de Características</a:t>
-            </a:r>
-          </a:p>
-          <a:p>
-            <a:pPr algn="just">
-              <a:lnSpc>
-                <a:spcPts val="4058"/>
-              </a:lnSpc>
-            </a:pPr>
-          </a:p>
-          <a:p>
-            <a:pPr algn="just">
-              <a:lnSpc>
-                <a:spcPts val="4058"/>
-              </a:lnSpc>
-            </a:pPr>
-            <a:r>
-              <a:rPr lang="en-US" sz="4099">
-                <a:solidFill>
-                  <a:srgbClr val="000000"/>
-                </a:solidFill>
-                <a:latin typeface="Sukar"/>
-                <a:ea typeface="Sukar"/>
-                <a:cs typeface="Sukar"/>
-                <a:sym typeface="Sukar"/>
-              </a:rPr>
-              <a:t>Preprocesamiento para Modelos</a:t>
-            </a:r>
-          </a:p>
-          <a:p>
-            <a:pPr algn="just">
-              <a:lnSpc>
-                <a:spcPts val="4058"/>
-              </a:lnSpc>
-            </a:pPr>
-          </a:p>
-          <a:p>
-            <a:pPr algn="just">
-              <a:lnSpc>
-                <a:spcPts val="4058"/>
-              </a:lnSpc>
-            </a:pPr>
-            <a:r>
-              <a:rPr lang="en-US" sz="4099">
-                <a:solidFill>
-                  <a:srgbClr val="000000"/>
-                </a:solidFill>
-                <a:latin typeface="Sukar"/>
-                <a:ea typeface="Sukar"/>
-                <a:cs typeface="Sukar"/>
-                <a:sym typeface="Sukar"/>
-              </a:rPr>
-              <a:t>Modelamiento </a:t>
-            </a:r>
-          </a:p>
-          <a:p>
-            <a:pPr algn="just">
-              <a:lnSpc>
-                <a:spcPts val="4058"/>
-              </a:lnSpc>
-            </a:pPr>
-          </a:p>
-          <a:p>
-            <a:pPr algn="just">
-              <a:lnSpc>
-                <a:spcPts val="4058"/>
-              </a:lnSpc>
-            </a:pPr>
-            <a:r>
-              <a:rPr lang="en-US" sz="4099">
-                <a:solidFill>
-                  <a:srgbClr val="000000"/>
-                </a:solidFill>
-                <a:latin typeface="Sukar"/>
-                <a:ea typeface="Sukar"/>
-                <a:cs typeface="Sukar"/>
-                <a:sym typeface="Sukar"/>
-              </a:rPr>
-              <a:t>Optimización de hiperparámetros</a:t>
-            </a:r>
           </a:p>
         </p:txBody>
       </p:sp>
@@ -7122,9 +8579,9 @@
           <p:nvPr/>
         </p:nvSpPr>
         <p:spPr>
-          <a:xfrm flipH="false" flipV="false" rot="3783878">
-            <a:off x="16832793" y="441609"/>
-            <a:ext cx="853014" cy="804935"/>
+          <a:xfrm flipH="false" flipV="false" rot="6846996">
+            <a:off x="-957053" y="-1071145"/>
+            <a:ext cx="2399729" cy="3183720"/>
           </a:xfrm>
           <a:custGeom>
             <a:avLst/>
@@ -7133,18 +8590,18 @@
             <a:cxnLst/>
             <a:rect r="r" b="b" t="t" l="l"/>
             <a:pathLst>
-              <a:path h="804935" w="853014">
+              <a:path h="3183720" w="2399729">
                 <a:moveTo>
                   <a:pt x="0" y="0"/>
                 </a:moveTo>
                 <a:lnTo>
-                  <a:pt x="853014" y="0"/>
-                </a:lnTo>
-                <a:lnTo>
-                  <a:pt x="853014" y="804936"/>
-                </a:lnTo>
-                <a:lnTo>
-                  <a:pt x="0" y="804936"/>
+                  <a:pt x="2399729" y="0"/>
+                </a:lnTo>
+                <a:lnTo>
+                  <a:pt x="2399729" y="3183720"/>
+                </a:lnTo>
+                <a:lnTo>
+                  <a:pt x="0" y="3183720"/>
                 </a:lnTo>
                 <a:lnTo>
                   <a:pt x="0" y="0"/>
@@ -7174,60 +8631,8 @@
           <p:nvPr/>
         </p:nvSpPr>
         <p:spPr>
-          <a:xfrm flipH="false" flipV="false" rot="-2526217">
-            <a:off x="9994312" y="87352"/>
-            <a:ext cx="1404298" cy="1325147"/>
-          </a:xfrm>
-          <a:custGeom>
-            <a:avLst/>
-            <a:gdLst/>
-            <a:ahLst/>
-            <a:cxnLst/>
-            <a:rect r="r" b="b" t="t" l="l"/>
-            <a:pathLst>
-              <a:path h="1325147" w="1404298">
-                <a:moveTo>
-                  <a:pt x="0" y="0"/>
-                </a:moveTo>
-                <a:lnTo>
-                  <a:pt x="1404298" y="0"/>
-                </a:lnTo>
-                <a:lnTo>
-                  <a:pt x="1404298" y="1325147"/>
-                </a:lnTo>
-                <a:lnTo>
-                  <a:pt x="0" y="1325147"/>
-                </a:lnTo>
-                <a:lnTo>
-                  <a:pt x="0" y="0"/>
-                </a:lnTo>
-                <a:close/>
-              </a:path>
-            </a:pathLst>
-          </a:custGeom>
-          <a:blipFill>
-            <a:blip r:embed="rId2">
-              <a:extLst>
-                <a:ext uri="{96DAC541-7B7A-43D3-8B79-37D633B846F1}">
-                  <asvg:svgBlip xmlns:asvg="http://schemas.microsoft.com/office/drawing/2016/SVG/main" r:embed="rId3"/>
-                </a:ext>
-              </a:extLst>
-            </a:blip>
-            <a:stretch>
-              <a:fillRect l="0" t="0" r="0" b="0"/>
-            </a:stretch>
-          </a:blipFill>
-        </p:spPr>
-      </p:sp>
-      <p:sp>
-        <p:nvSpPr>
-          <p:cNvPr name="Freeform 4" id="4"/>
-          <p:cNvSpPr/>
-          <p:nvPr/>
-        </p:nvSpPr>
-        <p:spPr>
-          <a:xfrm flipH="false" flipV="false" rot="3022968">
-            <a:off x="155487" y="9064935"/>
+          <a:xfrm flipH="false" flipV="false" rot="730291">
+            <a:off x="13597847" y="1188783"/>
             <a:ext cx="853014" cy="804935"/>
           </a:xfrm>
           <a:custGeom>
@@ -7249,58 +8654,6 @@
                 </a:lnTo>
                 <a:lnTo>
                   <a:pt x="0" y="804935"/>
-                </a:lnTo>
-                <a:lnTo>
-                  <a:pt x="0" y="0"/>
-                </a:lnTo>
-                <a:close/>
-              </a:path>
-            </a:pathLst>
-          </a:custGeom>
-          <a:blipFill>
-            <a:blip r:embed="rId2">
-              <a:extLst>
-                <a:ext uri="{96DAC541-7B7A-43D3-8B79-37D633B846F1}">
-                  <asvg:svgBlip xmlns:asvg="http://schemas.microsoft.com/office/drawing/2016/SVG/main" r:embed="rId3"/>
-                </a:ext>
-              </a:extLst>
-            </a:blip>
-            <a:stretch>
-              <a:fillRect l="0" t="0" r="0" b="0"/>
-            </a:stretch>
-          </a:blipFill>
-        </p:spPr>
-      </p:sp>
-      <p:sp>
-        <p:nvSpPr>
-          <p:cNvPr name="Freeform 5" id="5"/>
-          <p:cNvSpPr/>
-          <p:nvPr/>
-        </p:nvSpPr>
-        <p:spPr>
-          <a:xfrm flipH="false" flipV="false" rot="0">
-            <a:off x="14682512" y="5526883"/>
-            <a:ext cx="3264163" cy="4525703"/>
-          </a:xfrm>
-          <a:custGeom>
-            <a:avLst/>
-            <a:gdLst/>
-            <a:ahLst/>
-            <a:cxnLst/>
-            <a:rect r="r" b="b" t="t" l="l"/>
-            <a:pathLst>
-              <a:path h="4525703" w="3264163">
-                <a:moveTo>
-                  <a:pt x="0" y="0"/>
-                </a:moveTo>
-                <a:lnTo>
-                  <a:pt x="3264163" y="0"/>
-                </a:lnTo>
-                <a:lnTo>
-                  <a:pt x="3264163" y="4525703"/>
-                </a:lnTo>
-                <a:lnTo>
-                  <a:pt x="0" y="4525703"/>
                 </a:lnTo>
                 <a:lnTo>
                   <a:pt x="0" y="0"/>
@@ -7325,14 +8678,14 @@
       </p:sp>
       <p:sp>
         <p:nvSpPr>
-          <p:cNvPr name="Freeform 6" id="6"/>
+          <p:cNvPr name="Freeform 4" id="4"/>
           <p:cNvSpPr/>
           <p:nvPr/>
         </p:nvSpPr>
         <p:spPr>
-          <a:xfrm flipH="false" flipV="false" rot="6437899">
-            <a:off x="11366111" y="8826473"/>
-            <a:ext cx="1869879" cy="1764486"/>
+          <a:xfrm flipH="false" flipV="false" rot="0">
+            <a:off x="14024354" y="8979142"/>
+            <a:ext cx="2557431" cy="1055521"/>
           </a:xfrm>
           <a:custGeom>
             <a:avLst/>
@@ -7341,18 +8694,18 @@
             <a:cxnLst/>
             <a:rect r="r" b="b" t="t" l="l"/>
             <a:pathLst>
-              <a:path h="1764486" w="1869879">
+              <a:path h="1055521" w="2557431">
                 <a:moveTo>
                   <a:pt x="0" y="0"/>
                 </a:moveTo>
                 <a:lnTo>
-                  <a:pt x="1869879" y="0"/>
-                </a:lnTo>
-                <a:lnTo>
-                  <a:pt x="1869879" y="1764486"/>
-                </a:lnTo>
-                <a:lnTo>
-                  <a:pt x="0" y="1764486"/>
+                  <a:pt x="2557431" y="0"/>
+                </a:lnTo>
+                <a:lnTo>
+                  <a:pt x="2557431" y="1055521"/>
+                </a:lnTo>
+                <a:lnTo>
+                  <a:pt x="0" y="1055521"/>
                 </a:lnTo>
                 <a:lnTo>
                   <a:pt x="0" y="0"/>
@@ -7362,10 +8715,10 @@
             </a:pathLst>
           </a:custGeom>
           <a:blipFill>
-            <a:blip r:embed="rId2">
+            <a:blip r:embed="rId6">
               <a:extLst>
                 <a:ext uri="{96DAC541-7B7A-43D3-8B79-37D633B846F1}">
-                  <asvg:svgBlip xmlns:asvg="http://schemas.microsoft.com/office/drawing/2016/SVG/main" r:embed="rId3"/>
+                  <asvg:svgBlip xmlns:asvg="http://schemas.microsoft.com/office/drawing/2016/SVG/main" r:embed="rId7"/>
                 </a:ext>
               </a:extLst>
             </a:blip>
@@ -7377,13 +8730,155 @@
       </p:sp>
       <p:sp>
         <p:nvSpPr>
-          <p:cNvPr name="Freeform 7" id="7"/>
+          <p:cNvPr name="Freeform 5" id="5"/>
           <p:cNvSpPr/>
           <p:nvPr/>
         </p:nvSpPr>
         <p:spPr>
-          <a:xfrm flipH="false" flipV="false" rot="-280273">
-            <a:off x="12288897" y="556097"/>
+          <a:xfrm flipH="false" flipV="false" rot="-2526217">
+            <a:off x="16530916" y="8023663"/>
+            <a:ext cx="1456769" cy="1374660"/>
+          </a:xfrm>
+          <a:custGeom>
+            <a:avLst/>
+            <a:gdLst/>
+            <a:ahLst/>
+            <a:cxnLst/>
+            <a:rect r="r" b="b" t="t" l="l"/>
+            <a:pathLst>
+              <a:path h="1374660" w="1456769">
+                <a:moveTo>
+                  <a:pt x="0" y="0"/>
+                </a:moveTo>
+                <a:lnTo>
+                  <a:pt x="1456768" y="0"/>
+                </a:lnTo>
+                <a:lnTo>
+                  <a:pt x="1456768" y="1374660"/>
+                </a:lnTo>
+                <a:lnTo>
+                  <a:pt x="0" y="1374660"/>
+                </a:lnTo>
+                <a:lnTo>
+                  <a:pt x="0" y="0"/>
+                </a:lnTo>
+                <a:close/>
+              </a:path>
+            </a:pathLst>
+          </a:custGeom>
+          <a:blipFill>
+            <a:blip r:embed="rId4">
+              <a:extLst>
+                <a:ext uri="{96DAC541-7B7A-43D3-8B79-37D633B846F1}">
+                  <asvg:svgBlip xmlns:asvg="http://schemas.microsoft.com/office/drawing/2016/SVG/main" r:embed="rId5"/>
+                </a:ext>
+              </a:extLst>
+            </a:blip>
+            <a:stretch>
+              <a:fillRect l="0" t="0" r="0" b="0"/>
+            </a:stretch>
+          </a:blipFill>
+        </p:spPr>
+      </p:sp>
+      <p:sp>
+        <p:nvSpPr>
+          <p:cNvPr name="Freeform 6" id="6"/>
+          <p:cNvSpPr/>
+          <p:nvPr/>
+        </p:nvSpPr>
+        <p:spPr>
+          <a:xfrm flipH="false" flipV="false" rot="-2526217">
+            <a:off x="7428821" y="7687633"/>
+            <a:ext cx="2246425" cy="2119809"/>
+          </a:xfrm>
+          <a:custGeom>
+            <a:avLst/>
+            <a:gdLst/>
+            <a:ahLst/>
+            <a:cxnLst/>
+            <a:rect r="r" b="b" t="t" l="l"/>
+            <a:pathLst>
+              <a:path h="2119809" w="2246425">
+                <a:moveTo>
+                  <a:pt x="0" y="0"/>
+                </a:moveTo>
+                <a:lnTo>
+                  <a:pt x="2246425" y="0"/>
+                </a:lnTo>
+                <a:lnTo>
+                  <a:pt x="2246425" y="2119808"/>
+                </a:lnTo>
+                <a:lnTo>
+                  <a:pt x="0" y="2119808"/>
+                </a:lnTo>
+                <a:lnTo>
+                  <a:pt x="0" y="0"/>
+                </a:lnTo>
+                <a:close/>
+              </a:path>
+            </a:pathLst>
+          </a:custGeom>
+          <a:blipFill>
+            <a:blip r:embed="rId4">
+              <a:extLst>
+                <a:ext uri="{96DAC541-7B7A-43D3-8B79-37D633B846F1}">
+                  <asvg:svgBlip xmlns:asvg="http://schemas.microsoft.com/office/drawing/2016/SVG/main" r:embed="rId5"/>
+                </a:ext>
+              </a:extLst>
+            </a:blip>
+            <a:stretch>
+              <a:fillRect l="0" t="0" r="0" b="0"/>
+            </a:stretch>
+          </a:blipFill>
+        </p:spPr>
+      </p:sp>
+      <p:graphicFrame>
+        <p:nvGraphicFramePr>
+          <p:cNvPr name="Object 7" id="7"/>
+          <p:cNvGraphicFramePr/>
+          <p:nvPr/>
+        </p:nvGraphicFramePr>
+        <p:xfrm>
+          <a:off x="442812" y="2258611"/>
+          <a:ext cx="15769565" cy="6869027"/>
+        </p:xfrm>
+        <a:graphic>
+          <a:graphicData uri="http://schemas.openxmlformats.org/presentationml/2006/ole">
+            <p:oleObj imgW="18923000" imgH="10020300" r:id="rId9" progId="Excel.Sheet.12" name="Worksheet">
+              <p:embed/>
+              <p:pic>
+                <p:nvPicPr>
+                  <p:cNvPr name="" id="0"/>
+                  <p:cNvPicPr/>
+                  <p:nvPr/>
+                </p:nvPicPr>
+                <p:blipFill>
+                  <a:blip r:embed="rId8"/>
+                  <a:stretch>
+                    <a:fillRect/>
+                  </a:stretch>
+                </p:blipFill>
+                <p:spPr>
+                  <a:xfrm>
+                    <a:off x="1270000" y="1270000"/>
+                    <a:ext cx="1270000" cy="1270000"/>
+                  </a:xfrm>
+                  <a:prstGeom prst="rect"/>
+                </p:spPr>
+              </p:pic>
+            </p:oleObj>
+          </a:graphicData>
+        </a:graphic>
+      </p:graphicFrame>
+      <p:sp>
+        <p:nvSpPr>
+          <p:cNvPr name="Freeform 8" id="8"/>
+          <p:cNvSpPr/>
+          <p:nvPr/>
+        </p:nvSpPr>
+        <p:spPr>
+          <a:xfrm flipH="false" flipV="false" rot="1234928">
+            <a:off x="602193" y="9091521"/>
             <a:ext cx="853014" cy="804935"/>
           </a:xfrm>
           <a:custGeom>
@@ -7398,10 +8893,10 @@
                   <a:pt x="0" y="0"/>
                 </a:moveTo>
                 <a:lnTo>
-                  <a:pt x="853015" y="0"/>
-                </a:lnTo>
-                <a:lnTo>
-                  <a:pt x="853015" y="804935"/>
+                  <a:pt x="853014" y="0"/>
+                </a:lnTo>
+                <a:lnTo>
+                  <a:pt x="853014" y="804935"/>
                 </a:lnTo>
                 <a:lnTo>
                   <a:pt x="0" y="804935"/>
@@ -7414,10 +8909,10 @@
             </a:pathLst>
           </a:custGeom>
           <a:blipFill>
-            <a:blip r:embed="rId2">
+            <a:blip r:embed="rId4">
               <a:extLst>
                 <a:ext uri="{96DAC541-7B7A-43D3-8B79-37D633B846F1}">
-                  <asvg:svgBlip xmlns:asvg="http://schemas.microsoft.com/office/drawing/2016/SVG/main" r:embed="rId3"/>
+                  <asvg:svgBlip xmlns:asvg="http://schemas.microsoft.com/office/drawing/2016/SVG/main" r:embed="rId5"/>
                 </a:ext>
               </a:extLst>
             </a:blip>
@@ -7429,118 +8924,14 @@
       </p:sp>
       <p:sp>
         <p:nvSpPr>
-          <p:cNvPr name="Freeform 8" id="8"/>
-          <p:cNvSpPr/>
-          <p:nvPr/>
-        </p:nvSpPr>
-        <p:spPr>
-          <a:xfrm flipH="false" flipV="false" rot="3783878">
-            <a:off x="17217703" y="1835994"/>
-            <a:ext cx="853014" cy="804935"/>
-          </a:xfrm>
-          <a:custGeom>
-            <a:avLst/>
-            <a:gdLst/>
-            <a:ahLst/>
-            <a:cxnLst/>
-            <a:rect r="r" b="b" t="t" l="l"/>
-            <a:pathLst>
-              <a:path h="804935" w="853014">
-                <a:moveTo>
-                  <a:pt x="0" y="0"/>
-                </a:moveTo>
-                <a:lnTo>
-                  <a:pt x="853014" y="0"/>
-                </a:lnTo>
-                <a:lnTo>
-                  <a:pt x="853014" y="804936"/>
-                </a:lnTo>
-                <a:lnTo>
-                  <a:pt x="0" y="804936"/>
-                </a:lnTo>
-                <a:lnTo>
-                  <a:pt x="0" y="0"/>
-                </a:lnTo>
-                <a:close/>
-              </a:path>
-            </a:pathLst>
-          </a:custGeom>
-          <a:blipFill>
-            <a:blip r:embed="rId2">
-              <a:extLst>
-                <a:ext uri="{96DAC541-7B7A-43D3-8B79-37D633B846F1}">
-                  <asvg:svgBlip xmlns:asvg="http://schemas.microsoft.com/office/drawing/2016/SVG/main" r:embed="rId3"/>
-                </a:ext>
-              </a:extLst>
-            </a:blip>
-            <a:stretch>
-              <a:fillRect l="0" t="0" r="0" b="0"/>
-            </a:stretch>
-          </a:blipFill>
-        </p:spPr>
-      </p:sp>
-      <p:sp>
-        <p:nvSpPr>
-          <p:cNvPr name="Freeform 9" id="9"/>
-          <p:cNvSpPr/>
-          <p:nvPr/>
-        </p:nvSpPr>
-        <p:spPr>
-          <a:xfrm flipH="false" flipV="false" rot="3270670">
-            <a:off x="15978193" y="3334673"/>
-            <a:ext cx="1869879" cy="1764486"/>
-          </a:xfrm>
-          <a:custGeom>
-            <a:avLst/>
-            <a:gdLst/>
-            <a:ahLst/>
-            <a:cxnLst/>
-            <a:rect r="r" b="b" t="t" l="l"/>
-            <a:pathLst>
-              <a:path h="1764486" w="1869879">
-                <a:moveTo>
-                  <a:pt x="0" y="0"/>
-                </a:moveTo>
-                <a:lnTo>
-                  <a:pt x="1869879" y="0"/>
-                </a:lnTo>
-                <a:lnTo>
-                  <a:pt x="1869879" y="1764486"/>
-                </a:lnTo>
-                <a:lnTo>
-                  <a:pt x="0" y="1764486"/>
-                </a:lnTo>
-                <a:lnTo>
-                  <a:pt x="0" y="0"/>
-                </a:lnTo>
-                <a:close/>
-              </a:path>
-            </a:pathLst>
-          </a:custGeom>
-          <a:blipFill>
-            <a:blip r:embed="rId2">
-              <a:extLst>
-                <a:ext uri="{96DAC541-7B7A-43D3-8B79-37D633B846F1}">
-                  <asvg:svgBlip xmlns:asvg="http://schemas.microsoft.com/office/drawing/2016/SVG/main" r:embed="rId3"/>
-                </a:ext>
-              </a:extLst>
-            </a:blip>
-            <a:stretch>
-              <a:fillRect l="0" t="0" r="0" b="0"/>
-            </a:stretch>
-          </a:blipFill>
-        </p:spPr>
-      </p:sp>
-      <p:sp>
-        <p:nvSpPr>
-          <p:cNvPr name="TextBox 10" id="10"/>
+          <p:cNvPr name="TextBox 9" id="9"/>
           <p:cNvSpPr txBox="true"/>
           <p:nvPr/>
         </p:nvSpPr>
         <p:spPr>
           <a:xfrm rot="0">
-            <a:off x="1028700" y="483601"/>
-            <a:ext cx="17946749" cy="1072515"/>
+            <a:off x="2185986" y="224333"/>
+            <a:ext cx="10476931" cy="973455"/>
           </a:xfrm>
           <a:prstGeom prst="rect">
             <a:avLst/>
@@ -7554,11 +8945,11 @@
           <a:p>
             <a:pPr algn="l">
               <a:lnSpc>
-                <a:spcPts val="6929"/>
+                <a:spcPts val="6435"/>
               </a:lnSpc>
             </a:pPr>
             <a:r>
-              <a:rPr lang="en-US" sz="6999">
+              <a:rPr lang="en-US" sz="6500">
                 <a:solidFill>
                   <a:srgbClr val="925000"/>
                 </a:solidFill>
@@ -7567,20 +8958,20 @@
                 <a:cs typeface="Funtastic"/>
                 <a:sym typeface="Funtastic"/>
               </a:rPr>
-              <a:t>Trabajo colaborativo</a:t>
+              <a:t>Preprocesamiento</a:t>
             </a:r>
           </a:p>
         </p:txBody>
       </p:sp>
       <p:sp>
         <p:nvSpPr>
-          <p:cNvPr name="TextBox 11" id="11"/>
+          <p:cNvPr name="TextBox 10" id="10"/>
           <p:cNvSpPr txBox="true"/>
           <p:nvPr/>
         </p:nvSpPr>
         <p:spPr>
           <a:xfrm rot="0">
-            <a:off x="85338" y="1561419"/>
+            <a:off x="2312082" y="1188263"/>
             <a:ext cx="11712272" cy="763459"/>
           </a:xfrm>
           <a:prstGeom prst="rect">
@@ -7593,12 +8984,10 @@
           </a:bodyPr>
           <a:lstStyle/>
           <a:p>
-            <a:pPr algn="l" marL="1004791" indent="-502396" lvl="1">
+            <a:pPr algn="l">
               <a:lnSpc>
                 <a:spcPts val="5258"/>
               </a:lnSpc>
-              <a:buFont typeface="Arial"/>
-              <a:buChar char="•"/>
             </a:pPr>
             <a:r>
               <a:rPr lang="en-US" sz="4653">
@@ -7610,21 +8999,385 @@
                 <a:cs typeface="Funtastic"/>
                 <a:sym typeface="Funtastic"/>
               </a:rPr>
-              <a:t>Metodología (Ágil)</a:t>
+              <a:t>Limpieza y transformaciones</a:t>
             </a:r>
           </a:p>
         </p:txBody>
       </p:sp>
       <p:sp>
         <p:nvSpPr>
-          <p:cNvPr name="TextBox 12" id="12"/>
+          <p:cNvPr name="Freeform 11" id="11"/>
+          <p:cNvSpPr/>
+          <p:nvPr/>
+        </p:nvSpPr>
+        <p:spPr>
+          <a:xfrm flipH="false" flipV="false" rot="0">
+            <a:off x="1731328" y="8979142"/>
+            <a:ext cx="2557431" cy="1055521"/>
+          </a:xfrm>
+          <a:custGeom>
+            <a:avLst/>
+            <a:gdLst/>
+            <a:ahLst/>
+            <a:cxnLst/>
+            <a:rect r="r" b="b" t="t" l="l"/>
+            <a:pathLst>
+              <a:path h="1055521" w="2557431">
+                <a:moveTo>
+                  <a:pt x="0" y="0"/>
+                </a:moveTo>
+                <a:lnTo>
+                  <a:pt x="2557430" y="0"/>
+                </a:lnTo>
+                <a:lnTo>
+                  <a:pt x="2557430" y="1055521"/>
+                </a:lnTo>
+                <a:lnTo>
+                  <a:pt x="0" y="1055521"/>
+                </a:lnTo>
+                <a:lnTo>
+                  <a:pt x="0" y="0"/>
+                </a:lnTo>
+                <a:close/>
+              </a:path>
+            </a:pathLst>
+          </a:custGeom>
+          <a:blipFill>
+            <a:blip r:embed="rId6">
+              <a:extLst>
+                <a:ext uri="{96DAC541-7B7A-43D3-8B79-37D633B846F1}">
+                  <asvg:svgBlip xmlns:asvg="http://schemas.microsoft.com/office/drawing/2016/SVG/main" r:embed="rId7"/>
+                </a:ext>
+              </a:extLst>
+            </a:blip>
+            <a:stretch>
+              <a:fillRect l="0" t="0" r="0" b="0"/>
+            </a:stretch>
+          </a:blipFill>
+        </p:spPr>
+      </p:sp>
+      <p:sp>
+        <p:nvSpPr>
+          <p:cNvPr name="Freeform 12" id="12"/>
+          <p:cNvSpPr/>
+          <p:nvPr/>
+        </p:nvSpPr>
+        <p:spPr>
+          <a:xfrm flipH="false" flipV="false" rot="0">
+            <a:off x="2185986" y="8965183"/>
+            <a:ext cx="2557431" cy="1055521"/>
+          </a:xfrm>
+          <a:custGeom>
+            <a:avLst/>
+            <a:gdLst/>
+            <a:ahLst/>
+            <a:cxnLst/>
+            <a:rect r="r" b="b" t="t" l="l"/>
+            <a:pathLst>
+              <a:path h="1055521" w="2557431">
+                <a:moveTo>
+                  <a:pt x="0" y="0"/>
+                </a:moveTo>
+                <a:lnTo>
+                  <a:pt x="2557430" y="0"/>
+                </a:lnTo>
+                <a:lnTo>
+                  <a:pt x="2557430" y="1055522"/>
+                </a:lnTo>
+                <a:lnTo>
+                  <a:pt x="0" y="1055522"/>
+                </a:lnTo>
+                <a:lnTo>
+                  <a:pt x="0" y="0"/>
+                </a:lnTo>
+                <a:close/>
+              </a:path>
+            </a:pathLst>
+          </a:custGeom>
+          <a:blipFill>
+            <a:blip r:embed="rId6">
+              <a:extLst>
+                <a:ext uri="{96DAC541-7B7A-43D3-8B79-37D633B846F1}">
+                  <asvg:svgBlip xmlns:asvg="http://schemas.microsoft.com/office/drawing/2016/SVG/main" r:embed="rId7"/>
+                </a:ext>
+              </a:extLst>
+            </a:blip>
+            <a:stretch>
+              <a:fillRect l="0" t="0" r="0" b="0"/>
+            </a:stretch>
+          </a:blipFill>
+        </p:spPr>
+      </p:sp>
+      <p:sp>
+        <p:nvSpPr>
+          <p:cNvPr name="Freeform 13" id="13"/>
+          <p:cNvSpPr/>
+          <p:nvPr/>
+        </p:nvSpPr>
+        <p:spPr>
+          <a:xfrm flipH="false" flipV="false" rot="0">
+            <a:off x="4450616" y="8965183"/>
+            <a:ext cx="2557431" cy="1055521"/>
+          </a:xfrm>
+          <a:custGeom>
+            <a:avLst/>
+            <a:gdLst/>
+            <a:ahLst/>
+            <a:cxnLst/>
+            <a:rect r="r" b="b" t="t" l="l"/>
+            <a:pathLst>
+              <a:path h="1055521" w="2557431">
+                <a:moveTo>
+                  <a:pt x="0" y="0"/>
+                </a:moveTo>
+                <a:lnTo>
+                  <a:pt x="2557431" y="0"/>
+                </a:lnTo>
+                <a:lnTo>
+                  <a:pt x="2557431" y="1055522"/>
+                </a:lnTo>
+                <a:lnTo>
+                  <a:pt x="0" y="1055522"/>
+                </a:lnTo>
+                <a:lnTo>
+                  <a:pt x="0" y="0"/>
+                </a:lnTo>
+                <a:close/>
+              </a:path>
+            </a:pathLst>
+          </a:custGeom>
+          <a:blipFill>
+            <a:blip r:embed="rId6">
+              <a:extLst>
+                <a:ext uri="{96DAC541-7B7A-43D3-8B79-37D633B846F1}">
+                  <asvg:svgBlip xmlns:asvg="http://schemas.microsoft.com/office/drawing/2016/SVG/main" r:embed="rId7"/>
+                </a:ext>
+              </a:extLst>
+            </a:blip>
+            <a:stretch>
+              <a:fillRect l="0" t="0" r="0" b="0"/>
+            </a:stretch>
+          </a:blipFill>
+        </p:spPr>
+      </p:sp>
+      <p:sp>
+        <p:nvSpPr>
+          <p:cNvPr name="Freeform 14" id="14"/>
+          <p:cNvSpPr/>
+          <p:nvPr/>
+        </p:nvSpPr>
+        <p:spPr>
+          <a:xfrm flipH="false" flipV="false" rot="0">
+            <a:off x="6715247" y="8965183"/>
+            <a:ext cx="2557431" cy="1055521"/>
+          </a:xfrm>
+          <a:custGeom>
+            <a:avLst/>
+            <a:gdLst/>
+            <a:ahLst/>
+            <a:cxnLst/>
+            <a:rect r="r" b="b" t="t" l="l"/>
+            <a:pathLst>
+              <a:path h="1055521" w="2557431">
+                <a:moveTo>
+                  <a:pt x="0" y="0"/>
+                </a:moveTo>
+                <a:lnTo>
+                  <a:pt x="2557430" y="0"/>
+                </a:lnTo>
+                <a:lnTo>
+                  <a:pt x="2557430" y="1055522"/>
+                </a:lnTo>
+                <a:lnTo>
+                  <a:pt x="0" y="1055522"/>
+                </a:lnTo>
+                <a:lnTo>
+                  <a:pt x="0" y="0"/>
+                </a:lnTo>
+                <a:close/>
+              </a:path>
+            </a:pathLst>
+          </a:custGeom>
+          <a:blipFill>
+            <a:blip r:embed="rId6">
+              <a:extLst>
+                <a:ext uri="{96DAC541-7B7A-43D3-8B79-37D633B846F1}">
+                  <asvg:svgBlip xmlns:asvg="http://schemas.microsoft.com/office/drawing/2016/SVG/main" r:embed="rId7"/>
+                </a:ext>
+              </a:extLst>
+            </a:blip>
+            <a:stretch>
+              <a:fillRect l="0" t="0" r="0" b="0"/>
+            </a:stretch>
+          </a:blipFill>
+        </p:spPr>
+      </p:sp>
+      <p:sp>
+        <p:nvSpPr>
+          <p:cNvPr name="Freeform 15" id="15"/>
+          <p:cNvSpPr/>
+          <p:nvPr/>
+        </p:nvSpPr>
+        <p:spPr>
+          <a:xfrm flipH="false" flipV="false" rot="0">
+            <a:off x="8979877" y="8965183"/>
+            <a:ext cx="2557431" cy="1055521"/>
+          </a:xfrm>
+          <a:custGeom>
+            <a:avLst/>
+            <a:gdLst/>
+            <a:ahLst/>
+            <a:cxnLst/>
+            <a:rect r="r" b="b" t="t" l="l"/>
+            <a:pathLst>
+              <a:path h="1055521" w="2557431">
+                <a:moveTo>
+                  <a:pt x="0" y="0"/>
+                </a:moveTo>
+                <a:lnTo>
+                  <a:pt x="2557431" y="0"/>
+                </a:lnTo>
+                <a:lnTo>
+                  <a:pt x="2557431" y="1055522"/>
+                </a:lnTo>
+                <a:lnTo>
+                  <a:pt x="0" y="1055522"/>
+                </a:lnTo>
+                <a:lnTo>
+                  <a:pt x="0" y="0"/>
+                </a:lnTo>
+                <a:close/>
+              </a:path>
+            </a:pathLst>
+          </a:custGeom>
+          <a:blipFill>
+            <a:blip r:embed="rId6">
+              <a:extLst>
+                <a:ext uri="{96DAC541-7B7A-43D3-8B79-37D633B846F1}">
+                  <asvg:svgBlip xmlns:asvg="http://schemas.microsoft.com/office/drawing/2016/SVG/main" r:embed="rId7"/>
+                </a:ext>
+              </a:extLst>
+            </a:blip>
+            <a:stretch>
+              <a:fillRect l="0" t="0" r="0" b="0"/>
+            </a:stretch>
+          </a:blipFill>
+        </p:spPr>
+      </p:sp>
+      <p:sp>
+        <p:nvSpPr>
+          <p:cNvPr name="Freeform 16" id="16"/>
+          <p:cNvSpPr/>
+          <p:nvPr/>
+        </p:nvSpPr>
+        <p:spPr>
+          <a:xfrm flipH="false" flipV="false" rot="0">
+            <a:off x="11244508" y="8965183"/>
+            <a:ext cx="2557431" cy="1055521"/>
+          </a:xfrm>
+          <a:custGeom>
+            <a:avLst/>
+            <a:gdLst/>
+            <a:ahLst/>
+            <a:cxnLst/>
+            <a:rect r="r" b="b" t="t" l="l"/>
+            <a:pathLst>
+              <a:path h="1055521" w="2557431">
+                <a:moveTo>
+                  <a:pt x="0" y="0"/>
+                </a:moveTo>
+                <a:lnTo>
+                  <a:pt x="2557430" y="0"/>
+                </a:lnTo>
+                <a:lnTo>
+                  <a:pt x="2557430" y="1055522"/>
+                </a:lnTo>
+                <a:lnTo>
+                  <a:pt x="0" y="1055522"/>
+                </a:lnTo>
+                <a:lnTo>
+                  <a:pt x="0" y="0"/>
+                </a:lnTo>
+                <a:close/>
+              </a:path>
+            </a:pathLst>
+          </a:custGeom>
+          <a:blipFill>
+            <a:blip r:embed="rId6">
+              <a:extLst>
+                <a:ext uri="{96DAC541-7B7A-43D3-8B79-37D633B846F1}">
+                  <asvg:svgBlip xmlns:asvg="http://schemas.microsoft.com/office/drawing/2016/SVG/main" r:embed="rId7"/>
+                </a:ext>
+              </a:extLst>
+            </a:blip>
+            <a:stretch>
+              <a:fillRect l="0" t="0" r="0" b="0"/>
+            </a:stretch>
+          </a:blipFill>
+        </p:spPr>
+      </p:sp>
+      <p:sp>
+        <p:nvSpPr>
+          <p:cNvPr name="Freeform 17" id="17"/>
+          <p:cNvSpPr/>
+          <p:nvPr/>
+        </p:nvSpPr>
+        <p:spPr>
+          <a:xfrm flipH="false" flipV="false" rot="0">
+            <a:off x="13509138" y="8965183"/>
+            <a:ext cx="2557431" cy="1055521"/>
+          </a:xfrm>
+          <a:custGeom>
+            <a:avLst/>
+            <a:gdLst/>
+            <a:ahLst/>
+            <a:cxnLst/>
+            <a:rect r="r" b="b" t="t" l="l"/>
+            <a:pathLst>
+              <a:path h="1055521" w="2557431">
+                <a:moveTo>
+                  <a:pt x="0" y="0"/>
+                </a:moveTo>
+                <a:lnTo>
+                  <a:pt x="2557431" y="0"/>
+                </a:lnTo>
+                <a:lnTo>
+                  <a:pt x="2557431" y="1055522"/>
+                </a:lnTo>
+                <a:lnTo>
+                  <a:pt x="0" y="1055522"/>
+                </a:lnTo>
+                <a:lnTo>
+                  <a:pt x="0" y="0"/>
+                </a:lnTo>
+                <a:close/>
+              </a:path>
+            </a:pathLst>
+          </a:custGeom>
+          <a:blipFill>
+            <a:blip r:embed="rId6">
+              <a:extLst>
+                <a:ext uri="{96DAC541-7B7A-43D3-8B79-37D633B846F1}">
+                  <asvg:svgBlip xmlns:asvg="http://schemas.microsoft.com/office/drawing/2016/SVG/main" r:embed="rId7"/>
+                </a:ext>
+              </a:extLst>
+            </a:blip>
+            <a:stretch>
+              <a:fillRect l="0" t="0" r="0" b="0"/>
+            </a:stretch>
+          </a:blipFill>
+        </p:spPr>
+      </p:sp>
+      <p:sp>
+        <p:nvSpPr>
+          <p:cNvPr name="TextBox 18" id="18"/>
           <p:cNvSpPr txBox="true"/>
           <p:nvPr/>
         </p:nvSpPr>
         <p:spPr>
           <a:xfrm rot="0">
-            <a:off x="1028700" y="2886738"/>
-            <a:ext cx="13642999" cy="6195821"/>
+            <a:off x="1959356" y="9191625"/>
+            <a:ext cx="14369288" cy="563880"/>
           </a:xfrm>
           <a:prstGeom prst="rect">
             <a:avLst/>
@@ -7636,216 +9389,80 @@
           </a:bodyPr>
           <a:lstStyle/>
           <a:p>
-            <a:pPr algn="just">
+            <a:pPr algn="ctr">
               <a:lnSpc>
-                <a:spcPts val="4058"/>
+                <a:spcPts val="4620"/>
               </a:lnSpc>
+              <a:spcBef>
+                <a:spcPct val="0"/>
+              </a:spcBef>
             </a:pPr>
             <a:r>
-              <a:rPr lang="en-US" sz="4099">
+              <a:rPr lang="en-US" b="true" sz="3300">
                 <a:solidFill>
-                  <a:srgbClr val="000000"/>
+                  <a:srgbClr val="A66B49"/>
                 </a:solidFill>
-                <a:latin typeface="Sukar"/>
-                <a:ea typeface="Sukar"/>
-                <a:cs typeface="Sukar"/>
-                <a:sym typeface="Sukar"/>
+                <a:latin typeface="Sukar Bold"/>
+                <a:ea typeface="Sukar Bold"/>
+                <a:cs typeface="Sukar Bold"/>
+                <a:sym typeface="Sukar Bold"/>
               </a:rPr>
-              <a:t>Limpieza de Datos: </a:t>
+              <a:t> Se crearon variables nuevas: Days Last Update y Quality Status (Target).</a:t>
             </a:r>
           </a:p>
-          <a:p>
-            <a:pPr algn="just" marL="885182" indent="-442591" lvl="1">
-              <a:lnSpc>
-                <a:spcPts val="4058"/>
-              </a:lnSpc>
-              <a:buFont typeface="Arial"/>
-              <a:buChar char="•"/>
-            </a:pPr>
-            <a:r>
-              <a:rPr lang="en-US" sz="4099">
-                <a:solidFill>
-                  <a:srgbClr val="000000"/>
-                </a:solidFill>
-                <a:latin typeface="Sukar"/>
-                <a:ea typeface="Sukar"/>
-                <a:cs typeface="Sukar"/>
-                <a:sym typeface="Sukar"/>
-              </a:rPr>
-              <a:t>Eliminar </a:t>
-            </a:r>
-            <a:r>
-              <a:rPr lang="en-US" sz="4099">
-                <a:solidFill>
-                  <a:srgbClr val="000000"/>
-                </a:solidFill>
-                <a:latin typeface="Sukar"/>
-                <a:ea typeface="Sukar"/>
-                <a:cs typeface="Sukar"/>
-                <a:sym typeface="Sukar"/>
-              </a:rPr>
-              <a:t>duplicados </a:t>
-            </a:r>
-          </a:p>
-          <a:p>
-            <a:pPr algn="just" marL="885182" indent="-442591" lvl="1">
-              <a:lnSpc>
-                <a:spcPts val="4058"/>
-              </a:lnSpc>
-              <a:buFont typeface="Arial"/>
-              <a:buChar char="•"/>
-            </a:pPr>
-            <a:r>
-              <a:rPr lang="en-US" sz="4099">
-                <a:solidFill>
-                  <a:srgbClr val="000000"/>
-                </a:solidFill>
-                <a:latin typeface="Sukar"/>
-                <a:ea typeface="Sukar"/>
-                <a:cs typeface="Sukar"/>
-                <a:sym typeface="Sukar"/>
-              </a:rPr>
-              <a:t>Manejo de outliers.</a:t>
-            </a:r>
-          </a:p>
-          <a:p>
-            <a:pPr algn="just" marL="885182" indent="-442591" lvl="1">
-              <a:lnSpc>
-                <a:spcPts val="4058"/>
-              </a:lnSpc>
-              <a:buFont typeface="Arial"/>
-              <a:buChar char="•"/>
-            </a:pPr>
-            <a:r>
-              <a:rPr lang="en-US" sz="4099">
-                <a:solidFill>
-                  <a:srgbClr val="000000"/>
-                </a:solidFill>
-                <a:latin typeface="Sukar"/>
-                <a:ea typeface="Sukar"/>
-                <a:cs typeface="Sukar"/>
-                <a:sym typeface="Sukar"/>
-              </a:rPr>
-              <a:t>Asignar </a:t>
-            </a:r>
-            <a:r>
-              <a:rPr lang="en-US" sz="4099">
-                <a:solidFill>
-                  <a:srgbClr val="000000"/>
-                </a:solidFill>
-                <a:latin typeface="Sukar"/>
-                <a:ea typeface="Sukar"/>
-                <a:cs typeface="Sukar"/>
-                <a:sym typeface="Sukar"/>
-              </a:rPr>
-              <a:t>valores faltantes.</a:t>
-            </a:r>
-          </a:p>
-          <a:p>
-            <a:pPr algn="just">
-              <a:lnSpc>
-                <a:spcPts val="4058"/>
-              </a:lnSpc>
-            </a:pPr>
-          </a:p>
-          <a:p>
-            <a:pPr algn="just">
-              <a:lnSpc>
-                <a:spcPts val="4058"/>
-              </a:lnSpc>
-            </a:pPr>
-            <a:r>
-              <a:rPr lang="en-US" sz="4099">
-                <a:solidFill>
-                  <a:srgbClr val="000000"/>
-                </a:solidFill>
-                <a:latin typeface="Sukar"/>
-                <a:ea typeface="Sukar"/>
-                <a:cs typeface="Sukar"/>
-                <a:sym typeface="Sukar"/>
-              </a:rPr>
-              <a:t>Transformación de Características</a:t>
-            </a:r>
-          </a:p>
-          <a:p>
-            <a:pPr algn="just">
-              <a:lnSpc>
-                <a:spcPts val="4058"/>
-              </a:lnSpc>
-            </a:pPr>
-          </a:p>
-          <a:p>
-            <a:pPr algn="just">
-              <a:lnSpc>
-                <a:spcPts val="4058"/>
-              </a:lnSpc>
-            </a:pPr>
-            <a:r>
-              <a:rPr lang="en-US" sz="4099">
-                <a:solidFill>
-                  <a:srgbClr val="000000"/>
-                </a:solidFill>
-                <a:latin typeface="Sukar"/>
-                <a:ea typeface="Sukar"/>
-                <a:cs typeface="Sukar"/>
-                <a:sym typeface="Sukar"/>
-              </a:rPr>
-              <a:t>Preprocesamiento para Modelos</a:t>
-            </a:r>
-          </a:p>
-          <a:p>
-            <a:pPr algn="just">
-              <a:lnSpc>
-                <a:spcPts val="4058"/>
-              </a:lnSpc>
-            </a:pPr>
-          </a:p>
-          <a:p>
-            <a:pPr algn="just">
-              <a:lnSpc>
-                <a:spcPts val="4058"/>
-              </a:lnSpc>
-            </a:pPr>
-            <a:r>
-              <a:rPr lang="en-US" sz="4099">
-                <a:solidFill>
-                  <a:srgbClr val="000000"/>
-                </a:solidFill>
-                <a:latin typeface="Sukar"/>
-                <a:ea typeface="Sukar"/>
-                <a:cs typeface="Sukar"/>
-                <a:sym typeface="Sukar"/>
-              </a:rPr>
-              <a:t>Modelamiento </a:t>
-            </a:r>
-          </a:p>
-          <a:p>
-            <a:pPr algn="just">
-              <a:lnSpc>
-                <a:spcPts val="4058"/>
-              </a:lnSpc>
-            </a:pPr>
-          </a:p>
-          <a:p>
-            <a:pPr algn="just">
-              <a:lnSpc>
-                <a:spcPts val="4058"/>
-              </a:lnSpc>
-            </a:pPr>
-            <a:r>
-              <a:rPr lang="en-US" sz="4099">
-                <a:solidFill>
-                  <a:srgbClr val="000000"/>
-                </a:solidFill>
-                <a:latin typeface="Sukar"/>
-                <a:ea typeface="Sukar"/>
-                <a:cs typeface="Sukar"/>
-                <a:sym typeface="Sukar"/>
-              </a:rPr>
-              <a:t>Optimización de hiperparámetros</a:t>
-            </a:r>
-          </a:p>
         </p:txBody>
+      </p:sp>
+      <p:sp>
+        <p:nvSpPr>
+          <p:cNvPr name="Freeform 19" id="19"/>
+          <p:cNvSpPr/>
+          <p:nvPr/>
+        </p:nvSpPr>
+        <p:spPr>
+          <a:xfrm flipH="false" flipV="false" rot="-8100000">
+            <a:off x="16618451" y="-2802244"/>
+            <a:ext cx="3339098" cy="5049675"/>
+          </a:xfrm>
+          <a:custGeom>
+            <a:avLst/>
+            <a:gdLst/>
+            <a:ahLst/>
+            <a:cxnLst/>
+            <a:rect r="r" b="b" t="t" l="l"/>
+            <a:pathLst>
+              <a:path h="5049675" w="3339098">
+                <a:moveTo>
+                  <a:pt x="0" y="0"/>
+                </a:moveTo>
+                <a:lnTo>
+                  <a:pt x="3339098" y="0"/>
+                </a:lnTo>
+                <a:lnTo>
+                  <a:pt x="3339098" y="5049676"/>
+                </a:lnTo>
+                <a:lnTo>
+                  <a:pt x="0" y="5049676"/>
+                </a:lnTo>
+                <a:lnTo>
+                  <a:pt x="0" y="0"/>
+                </a:lnTo>
+                <a:close/>
+              </a:path>
+            </a:pathLst>
+          </a:custGeom>
+          <a:blipFill>
+            <a:blip r:embed="rId10">
+              <a:extLst>
+                <a:ext uri="{96DAC541-7B7A-43D3-8B79-37D633B846F1}">
+                  <asvg:svgBlip xmlns:asvg="http://schemas.microsoft.com/office/drawing/2016/SVG/main" r:embed="rId11"/>
+                </a:ext>
+              </a:extLst>
+            </a:blip>
+            <a:stretch>
+              <a:fillRect l="0" t="0" r="0" b="0"/>
+            </a:stretch>
+          </a:blipFill>
+        </p:spPr>
       </p:sp>
     </p:spTree>
   </p:cSld>
@@ -7939,8 +9556,8 @@
         </p:nvSpPr>
         <p:spPr>
           <a:xfrm flipH="false" flipV="false" rot="-1408795">
-            <a:off x="15093426" y="283107"/>
-            <a:ext cx="1919844" cy="2399805"/>
+            <a:off x="15209980" y="198072"/>
+            <a:ext cx="1901860" cy="2377325"/>
           </a:xfrm>
           <a:custGeom>
             <a:avLst/>
@@ -7949,18 +9566,18 @@
             <a:cxnLst/>
             <a:rect r="r" b="b" t="t" l="l"/>
             <a:pathLst>
-              <a:path h="2399805" w="1919844">
+              <a:path h="2377325" w="1901860">
                 <a:moveTo>
                   <a:pt x="0" y="0"/>
                 </a:moveTo>
                 <a:lnTo>
-                  <a:pt x="1919844" y="0"/>
-                </a:lnTo>
-                <a:lnTo>
-                  <a:pt x="1919844" y="2399805"/>
-                </a:lnTo>
-                <a:lnTo>
-                  <a:pt x="0" y="2399805"/>
+                  <a:pt x="1901860" y="0"/>
+                </a:lnTo>
+                <a:lnTo>
+                  <a:pt x="1901860" y="2377325"/>
+                </a:lnTo>
+                <a:lnTo>
+                  <a:pt x="0" y="2377325"/>
                 </a:lnTo>
                 <a:lnTo>
                   <a:pt x="0" y="0"/>
@@ -7990,8 +9607,8 @@
           <p:nvPr/>
         </p:nvSpPr>
         <p:spPr>
-          <a:xfrm flipH="false" flipV="false" rot="3783878">
-            <a:off x="11121286" y="1643093"/>
+          <a:xfrm flipH="false" flipV="false" rot="2363020">
+            <a:off x="13617941" y="1188783"/>
             <a:ext cx="853014" cy="804935"/>
           </a:xfrm>
           <a:custGeom>
@@ -8043,8 +9660,8 @@
         </p:nvSpPr>
         <p:spPr>
           <a:xfrm flipH="false" flipV="false" rot="-2526217">
-            <a:off x="16530916" y="8023663"/>
-            <a:ext cx="1456769" cy="1374660"/>
+            <a:off x="7428821" y="8940779"/>
+            <a:ext cx="2246425" cy="2119809"/>
           </a:xfrm>
           <a:custGeom>
             <a:avLst/>
@@ -8053,18 +9670,18 @@
             <a:cxnLst/>
             <a:rect r="r" b="b" t="t" l="l"/>
             <a:pathLst>
-              <a:path h="1374660" w="1456769">
+              <a:path h="2119809" w="2246425">
                 <a:moveTo>
                   <a:pt x="0" y="0"/>
                 </a:moveTo>
                 <a:lnTo>
-                  <a:pt x="1456768" y="0"/>
-                </a:lnTo>
-                <a:lnTo>
-                  <a:pt x="1456768" y="1374660"/>
-                </a:lnTo>
-                <a:lnTo>
-                  <a:pt x="0" y="1374660"/>
+                  <a:pt x="2246425" y="0"/>
+                </a:lnTo>
+                <a:lnTo>
+                  <a:pt x="2246425" y="2119809"/>
+                </a:lnTo>
+                <a:lnTo>
+                  <a:pt x="0" y="2119809"/>
                 </a:lnTo>
                 <a:lnTo>
                   <a:pt x="0" y="0"/>
@@ -8095,8 +9712,8 @@
         </p:nvSpPr>
         <p:spPr>
           <a:xfrm flipH="false" flipV="false" rot="-2526217">
-            <a:off x="7428821" y="8940779"/>
-            <a:ext cx="2246425" cy="2119809"/>
+            <a:off x="168826" y="4567574"/>
+            <a:ext cx="901327" cy="850525"/>
           </a:xfrm>
           <a:custGeom>
             <a:avLst/>
@@ -8105,18 +9722,18 @@
             <a:cxnLst/>
             <a:rect r="r" b="b" t="t" l="l"/>
             <a:pathLst>
-              <a:path h="2119809" w="2246425">
+              <a:path h="850525" w="901327">
                 <a:moveTo>
                   <a:pt x="0" y="0"/>
                 </a:moveTo>
                 <a:lnTo>
-                  <a:pt x="2246425" y="0"/>
-                </a:lnTo>
-                <a:lnTo>
-                  <a:pt x="2246425" y="2119809"/>
-                </a:lnTo>
-                <a:lnTo>
-                  <a:pt x="0" y="2119809"/>
+                  <a:pt x="901328" y="0"/>
+                </a:lnTo>
+                <a:lnTo>
+                  <a:pt x="901328" y="850525"/>
+                </a:lnTo>
+                <a:lnTo>
+                  <a:pt x="0" y="850525"/>
                 </a:lnTo>
                 <a:lnTo>
                   <a:pt x="0" y="0"/>
@@ -8146,9 +9763,9 @@
           <p:nvPr/>
         </p:nvSpPr>
         <p:spPr>
-          <a:xfrm flipH="false" flipV="false" rot="-2526217">
-            <a:off x="808695" y="4475822"/>
-            <a:ext cx="853014" cy="804935"/>
+          <a:xfrm flipH="false" flipV="false" rot="0">
+            <a:off x="9144000" y="2620897"/>
+            <a:ext cx="8948541" cy="6962805"/>
           </a:xfrm>
           <a:custGeom>
             <a:avLst/>
@@ -8157,18 +9774,287 @@
             <a:cxnLst/>
             <a:rect r="r" b="b" t="t" l="l"/>
             <a:pathLst>
-              <a:path h="804935" w="853014">
+              <a:path h="6962805" w="8948541">
                 <a:moveTo>
                   <a:pt x="0" y="0"/>
                 </a:moveTo>
                 <a:lnTo>
-                  <a:pt x="853014" y="0"/>
-                </a:lnTo>
-                <a:lnTo>
-                  <a:pt x="853014" y="804935"/>
-                </a:lnTo>
-                <a:lnTo>
-                  <a:pt x="0" y="804935"/>
+                  <a:pt x="8948541" y="0"/>
+                </a:lnTo>
+                <a:lnTo>
+                  <a:pt x="8948541" y="6962805"/>
+                </a:lnTo>
+                <a:lnTo>
+                  <a:pt x="0" y="6962805"/>
+                </a:lnTo>
+                <a:lnTo>
+                  <a:pt x="0" y="0"/>
+                </a:lnTo>
+                <a:close/>
+              </a:path>
+            </a:pathLst>
+          </a:custGeom>
+          <a:blipFill>
+            <a:blip r:embed="rId8"/>
+            <a:stretch>
+              <a:fillRect l="0" t="0" r="0" b="0"/>
+            </a:stretch>
+          </a:blipFill>
+        </p:spPr>
+      </p:sp>
+      <p:sp>
+        <p:nvSpPr>
+          <p:cNvPr name="TextBox 8" id="8"/>
+          <p:cNvSpPr txBox="true"/>
+          <p:nvPr/>
+        </p:nvSpPr>
+        <p:spPr>
+          <a:xfrm rot="0">
+            <a:off x="2982493" y="669231"/>
+            <a:ext cx="10476931" cy="922020"/>
+          </a:xfrm>
+          <a:prstGeom prst="rect">
+            <a:avLst/>
+          </a:prstGeom>
+        </p:spPr>
+        <p:txBody>
+          <a:bodyPr anchor="t" rtlCol="false" tIns="0" lIns="0" bIns="0" rIns="0">
+            <a:spAutoFit/>
+          </a:bodyPr>
+          <a:lstStyle/>
+          <a:p>
+            <a:pPr algn="l">
+              <a:lnSpc>
+                <a:spcPts val="5939"/>
+              </a:lnSpc>
+            </a:pPr>
+            <a:r>
+              <a:rPr lang="en-US" sz="5999">
+                <a:solidFill>
+                  <a:srgbClr val="925000"/>
+                </a:solidFill>
+                <a:latin typeface="Funtastic"/>
+                <a:ea typeface="Funtastic"/>
+                <a:cs typeface="Funtastic"/>
+                <a:sym typeface="Funtastic"/>
+              </a:rPr>
+              <a:t>Clustering</a:t>
+            </a:r>
+          </a:p>
+        </p:txBody>
+      </p:sp>
+      <p:sp>
+        <p:nvSpPr>
+          <p:cNvPr name="Freeform 9" id="9"/>
+          <p:cNvSpPr/>
+          <p:nvPr/>
+        </p:nvSpPr>
+        <p:spPr>
+          <a:xfrm flipH="false" flipV="false" rot="0">
+            <a:off x="232758" y="2855852"/>
+            <a:ext cx="8743469" cy="3608668"/>
+          </a:xfrm>
+          <a:custGeom>
+            <a:avLst/>
+            <a:gdLst/>
+            <a:ahLst/>
+            <a:cxnLst/>
+            <a:rect r="r" b="b" t="t" l="l"/>
+            <a:pathLst>
+              <a:path h="3608668" w="8743469">
+                <a:moveTo>
+                  <a:pt x="0" y="0"/>
+                </a:moveTo>
+                <a:lnTo>
+                  <a:pt x="8743469" y="0"/>
+                </a:lnTo>
+                <a:lnTo>
+                  <a:pt x="8743469" y="3608668"/>
+                </a:lnTo>
+                <a:lnTo>
+                  <a:pt x="0" y="3608668"/>
+                </a:lnTo>
+                <a:lnTo>
+                  <a:pt x="0" y="0"/>
+                </a:lnTo>
+                <a:close/>
+              </a:path>
+            </a:pathLst>
+          </a:custGeom>
+          <a:blipFill>
+            <a:blip r:embed="rId9">
+              <a:extLst>
+                <a:ext uri="{96DAC541-7B7A-43D3-8B79-37D633B846F1}">
+                  <asvg:svgBlip xmlns:asvg="http://schemas.microsoft.com/office/drawing/2016/SVG/main" r:embed="rId10"/>
+                </a:ext>
+              </a:extLst>
+            </a:blip>
+            <a:stretch>
+              <a:fillRect l="0" t="0" r="0" b="0"/>
+            </a:stretch>
+          </a:blipFill>
+        </p:spPr>
+      </p:sp>
+      <p:sp>
+        <p:nvSpPr>
+          <p:cNvPr name="Freeform 10" id="10"/>
+          <p:cNvSpPr/>
+          <p:nvPr/>
+        </p:nvSpPr>
+        <p:spPr>
+          <a:xfrm flipH="false" flipV="false" rot="0">
+            <a:off x="1028700" y="6802277"/>
+            <a:ext cx="7270987" cy="3000935"/>
+          </a:xfrm>
+          <a:custGeom>
+            <a:avLst/>
+            <a:gdLst/>
+            <a:ahLst/>
+            <a:cxnLst/>
+            <a:rect r="r" b="b" t="t" l="l"/>
+            <a:pathLst>
+              <a:path h="3000935" w="7270987">
+                <a:moveTo>
+                  <a:pt x="0" y="0"/>
+                </a:moveTo>
+                <a:lnTo>
+                  <a:pt x="7270987" y="0"/>
+                </a:lnTo>
+                <a:lnTo>
+                  <a:pt x="7270987" y="3000934"/>
+                </a:lnTo>
+                <a:lnTo>
+                  <a:pt x="0" y="3000934"/>
+                </a:lnTo>
+                <a:lnTo>
+                  <a:pt x="0" y="0"/>
+                </a:lnTo>
+                <a:close/>
+              </a:path>
+            </a:pathLst>
+          </a:custGeom>
+          <a:blipFill>
+            <a:blip r:embed="rId9">
+              <a:extLst>
+                <a:ext uri="{96DAC541-7B7A-43D3-8B79-37D633B846F1}">
+                  <asvg:svgBlip xmlns:asvg="http://schemas.microsoft.com/office/drawing/2016/SVG/main" r:embed="rId10"/>
+                </a:ext>
+              </a:extLst>
+            </a:blip>
+            <a:stretch>
+              <a:fillRect l="0" t="0" r="0" b="0"/>
+            </a:stretch>
+          </a:blipFill>
+        </p:spPr>
+      </p:sp>
+      <p:sp>
+        <p:nvSpPr>
+          <p:cNvPr name="TextBox 11" id="11"/>
+          <p:cNvSpPr txBox="true"/>
+          <p:nvPr/>
+        </p:nvSpPr>
+        <p:spPr>
+          <a:xfrm rot="0">
+            <a:off x="496185" y="2973407"/>
+            <a:ext cx="8216616" cy="3253759"/>
+          </a:xfrm>
+          <a:prstGeom prst="rect">
+            <a:avLst/>
+          </a:prstGeom>
+        </p:spPr>
+        <p:txBody>
+          <a:bodyPr anchor="t" rtlCol="false" tIns="0" lIns="0" bIns="0" rIns="0">
+            <a:spAutoFit/>
+          </a:bodyPr>
+          <a:lstStyle/>
+          <a:p>
+            <a:pPr algn="ctr">
+              <a:lnSpc>
+                <a:spcPts val="6508"/>
+              </a:lnSpc>
+              <a:spcBef>
+                <a:spcPct val="0"/>
+              </a:spcBef>
+            </a:pPr>
+            <a:r>
+              <a:rPr lang="en-US" sz="4649">
+                <a:solidFill>
+                  <a:srgbClr val="A66B49"/>
+                </a:solidFill>
+                <a:latin typeface="Sukar"/>
+                <a:ea typeface="Sukar"/>
+                <a:cs typeface="Sukar"/>
+                <a:sym typeface="Sukar"/>
+              </a:rPr>
+              <a:t>•</a:t>
+            </a:r>
+            <a:r>
+              <a:rPr lang="en-US" sz="4649">
+                <a:solidFill>
+                  <a:srgbClr val="A66B49"/>
+                </a:solidFill>
+                <a:latin typeface="Sukar"/>
+                <a:ea typeface="Sukar"/>
+                <a:cs typeface="Sukar"/>
+                <a:sym typeface="Sukar"/>
+              </a:rPr>
+              <a:t> Implementación de K-Means para identificar arquetipos.</a:t>
+            </a:r>
+          </a:p>
+          <a:p>
+            <a:pPr algn="ctr">
+              <a:lnSpc>
+                <a:spcPts val="6508"/>
+              </a:lnSpc>
+              <a:spcBef>
+                <a:spcPct val="0"/>
+              </a:spcBef>
+            </a:pPr>
+            <a:r>
+              <a:rPr lang="en-US" sz="4649">
+                <a:solidFill>
+                  <a:srgbClr val="A66B49"/>
+                </a:solidFill>
+                <a:latin typeface="Sukar"/>
+                <a:ea typeface="Sukar"/>
+                <a:cs typeface="Sukar"/>
+                <a:sym typeface="Sukar"/>
+              </a:rPr>
+              <a:t>• Uso de PCA para comprimir las variables en 2D.</a:t>
+            </a:r>
+          </a:p>
+        </p:txBody>
+      </p:sp>
+      <p:sp>
+        <p:nvSpPr>
+          <p:cNvPr name="Freeform 12" id="12"/>
+          <p:cNvSpPr/>
+          <p:nvPr/>
+        </p:nvSpPr>
+        <p:spPr>
+          <a:xfrm flipH="false" flipV="false" rot="-2093829">
+            <a:off x="8814281" y="447673"/>
+            <a:ext cx="1456769" cy="1374660"/>
+          </a:xfrm>
+          <a:custGeom>
+            <a:avLst/>
+            <a:gdLst/>
+            <a:ahLst/>
+            <a:cxnLst/>
+            <a:rect r="r" b="b" t="t" l="l"/>
+            <a:pathLst>
+              <a:path h="1374660" w="1456769">
+                <a:moveTo>
+                  <a:pt x="0" y="0"/>
+                </a:moveTo>
+                <a:lnTo>
+                  <a:pt x="1456769" y="0"/>
+                </a:lnTo>
+                <a:lnTo>
+                  <a:pt x="1456769" y="1374660"/>
+                </a:lnTo>
+                <a:lnTo>
+                  <a:pt x="0" y="1374660"/>
                 </a:lnTo>
                 <a:lnTo>
                   <a:pt x="0" y="0"/>
@@ -8193,14 +10079,14 @@
       </p:sp>
       <p:sp>
         <p:nvSpPr>
-          <p:cNvPr name="TextBox 8" id="8"/>
+          <p:cNvPr name="TextBox 13" id="13"/>
           <p:cNvSpPr txBox="true"/>
           <p:nvPr/>
         </p:nvSpPr>
         <p:spPr>
           <a:xfrm rot="0">
-            <a:off x="2674207" y="-9948"/>
-            <a:ext cx="10476931" cy="1674495"/>
+            <a:off x="1287915" y="7197945"/>
+            <a:ext cx="6752557" cy="2188844"/>
           </a:xfrm>
           <a:prstGeom prst="rect">
             <a:avLst/>
@@ -8212,117 +10098,28 @@
           </a:bodyPr>
           <a:lstStyle/>
           <a:p>
-            <a:pPr algn="l">
+            <a:pPr algn="ctr">
               <a:lnSpc>
-                <a:spcPts val="5939"/>
+                <a:spcPts val="5880"/>
               </a:lnSpc>
+              <a:spcBef>
+                <a:spcPct val="0"/>
+              </a:spcBef>
             </a:pPr>
             <a:r>
-              <a:rPr lang="en-US" sz="5999">
+              <a:rPr lang="en-US" b="true" sz="4200">
                 <a:solidFill>
-                  <a:srgbClr val="925000"/>
+                  <a:srgbClr val="A66B49"/>
                 </a:solidFill>
-                <a:latin typeface="Funtastic"/>
-                <a:ea typeface="Funtastic"/>
-                <a:cs typeface="Funtastic"/>
-                <a:sym typeface="Funtastic"/>
+                <a:latin typeface="Sukar Bold"/>
+                <a:ea typeface="Sukar Bold"/>
+                <a:cs typeface="Sukar Bold"/>
+                <a:sym typeface="Sukar Bold"/>
               </a:rPr>
-              <a:t>Resultados del proyecto (preprocesamiento</a:t>
+              <a:t>El análisis revela clusters diferenciados por tamaño y popularidad</a:t>
             </a:r>
           </a:p>
         </p:txBody>
-      </p:sp>
-      <p:sp>
-        <p:nvSpPr>
-          <p:cNvPr name="Freeform 9" id="9"/>
-          <p:cNvSpPr/>
-          <p:nvPr/>
-        </p:nvSpPr>
-        <p:spPr>
-          <a:xfrm flipH="false" flipV="false" rot="0">
-            <a:off x="530245" y="2458565"/>
-            <a:ext cx="8114848" cy="6799735"/>
-          </a:xfrm>
-          <a:custGeom>
-            <a:avLst/>
-            <a:gdLst/>
-            <a:ahLst/>
-            <a:cxnLst/>
-            <a:rect r="r" b="b" t="t" l="l"/>
-            <a:pathLst>
-              <a:path h="6799735" w="8114848">
-                <a:moveTo>
-                  <a:pt x="0" y="0"/>
-                </a:moveTo>
-                <a:lnTo>
-                  <a:pt x="8114848" y="0"/>
-                </a:lnTo>
-                <a:lnTo>
-                  <a:pt x="8114848" y="6799735"/>
-                </a:lnTo>
-                <a:lnTo>
-                  <a:pt x="0" y="6799735"/>
-                </a:lnTo>
-                <a:lnTo>
-                  <a:pt x="0" y="0"/>
-                </a:lnTo>
-                <a:close/>
-              </a:path>
-            </a:pathLst>
-          </a:custGeom>
-          <a:blipFill>
-            <a:blip r:embed="rId8"/>
-            <a:stretch>
-              <a:fillRect l="0" t="0" r="0" b="0"/>
-            </a:stretch>
-          </a:blipFill>
-        </p:spPr>
-      </p:sp>
-      <p:sp>
-        <p:nvSpPr>
-          <p:cNvPr name="Freeform 10" id="10"/>
-          <p:cNvSpPr/>
-          <p:nvPr/>
-        </p:nvSpPr>
-        <p:spPr>
-          <a:xfrm flipH="false" flipV="false" rot="0">
-            <a:off x="8890415" y="2458565"/>
-            <a:ext cx="8521448" cy="6799735"/>
-          </a:xfrm>
-          <a:custGeom>
-            <a:avLst/>
-            <a:gdLst/>
-            <a:ahLst/>
-            <a:cxnLst/>
-            <a:rect r="r" b="b" t="t" l="l"/>
-            <a:pathLst>
-              <a:path h="6799735" w="8521448">
-                <a:moveTo>
-                  <a:pt x="0" y="0"/>
-                </a:moveTo>
-                <a:lnTo>
-                  <a:pt x="8521448" y="0"/>
-                </a:lnTo>
-                <a:lnTo>
-                  <a:pt x="8521448" y="6799735"/>
-                </a:lnTo>
-                <a:lnTo>
-                  <a:pt x="0" y="6799735"/>
-                </a:lnTo>
-                <a:lnTo>
-                  <a:pt x="0" y="0"/>
-                </a:lnTo>
-                <a:close/>
-              </a:path>
-            </a:pathLst>
-          </a:custGeom>
-          <a:blipFill>
-            <a:blip r:embed="rId9"/>
-            <a:stretch>
-              <a:fillRect l="-1276" t="0" r="-1276" b="0"/>
-            </a:stretch>
-          </a:blipFill>
-        </p:spPr>
       </p:sp>
     </p:spTree>
   </p:cSld>
@@ -8363,9 +10160,9 @@
           <p:nvPr/>
         </p:nvSpPr>
         <p:spPr>
-          <a:xfrm flipH="false" flipV="false" rot="6846996">
-            <a:off x="-957053" y="-1071145"/>
-            <a:ext cx="2399729" cy="3183720"/>
+          <a:xfrm flipH="false" flipV="false" rot="0">
+            <a:off x="648918" y="2214471"/>
+            <a:ext cx="8274800" cy="3415236"/>
           </a:xfrm>
           <a:custGeom>
             <a:avLst/>
@@ -8374,18 +10171,18 @@
             <a:cxnLst/>
             <a:rect r="r" b="b" t="t" l="l"/>
             <a:pathLst>
-              <a:path h="3183720" w="2399729">
+              <a:path h="3415236" w="8274800">
                 <a:moveTo>
                   <a:pt x="0" y="0"/>
                 </a:moveTo>
                 <a:lnTo>
-                  <a:pt x="2399729" y="0"/>
-                </a:lnTo>
-                <a:lnTo>
-                  <a:pt x="2399729" y="3183720"/>
-                </a:lnTo>
-                <a:lnTo>
-                  <a:pt x="0" y="3183720"/>
+                  <a:pt x="8274800" y="0"/>
+                </a:lnTo>
+                <a:lnTo>
+                  <a:pt x="8274800" y="3415235"/>
+                </a:lnTo>
+                <a:lnTo>
+                  <a:pt x="0" y="3415235"/>
                 </a:lnTo>
                 <a:lnTo>
                   <a:pt x="0" y="0"/>
@@ -8415,9 +10212,9 @@
           <p:nvPr/>
         </p:nvSpPr>
         <p:spPr>
-          <a:xfrm flipH="false" flipV="false" rot="-1408795">
-            <a:off x="15093426" y="283107"/>
-            <a:ext cx="1919844" cy="2399805"/>
+          <a:xfrm flipH="false" flipV="false" rot="6846996">
+            <a:off x="-957053" y="-1071145"/>
+            <a:ext cx="2399729" cy="3183720"/>
           </a:xfrm>
           <a:custGeom>
             <a:avLst/>
@@ -8426,18 +10223,18 @@
             <a:cxnLst/>
             <a:rect r="r" b="b" t="t" l="l"/>
             <a:pathLst>
-              <a:path h="2399805" w="1919844">
+              <a:path h="3183720" w="2399729">
                 <a:moveTo>
                   <a:pt x="0" y="0"/>
                 </a:moveTo>
                 <a:lnTo>
-                  <a:pt x="1919844" y="0"/>
-                </a:lnTo>
-                <a:lnTo>
-                  <a:pt x="1919844" y="2399805"/>
-                </a:lnTo>
-                <a:lnTo>
-                  <a:pt x="0" y="2399805"/>
+                  <a:pt x="2399729" y="0"/>
+                </a:lnTo>
+                <a:lnTo>
+                  <a:pt x="2399729" y="3183720"/>
+                </a:lnTo>
+                <a:lnTo>
+                  <a:pt x="0" y="3183720"/>
                 </a:lnTo>
                 <a:lnTo>
                   <a:pt x="0" y="0"/>
@@ -8467,9 +10264,9 @@
           <p:nvPr/>
         </p:nvSpPr>
         <p:spPr>
-          <a:xfrm flipH="false" flipV="false" rot="3783878">
-            <a:off x="11121286" y="1643093"/>
-            <a:ext cx="853014" cy="804935"/>
+          <a:xfrm flipH="false" flipV="false" rot="1068464">
+            <a:off x="11570107" y="475841"/>
+            <a:ext cx="1397346" cy="1318587"/>
           </a:xfrm>
           <a:custGeom>
             <a:avLst/>
@@ -8478,18 +10275,18 @@
             <a:cxnLst/>
             <a:rect r="r" b="b" t="t" l="l"/>
             <a:pathLst>
-              <a:path h="804935" w="853014">
+              <a:path h="1318587" w="1397346">
                 <a:moveTo>
                   <a:pt x="0" y="0"/>
                 </a:moveTo>
                 <a:lnTo>
-                  <a:pt x="853014" y="0"/>
-                </a:lnTo>
-                <a:lnTo>
-                  <a:pt x="853014" y="804935"/>
-                </a:lnTo>
-                <a:lnTo>
-                  <a:pt x="0" y="804935"/>
+                  <a:pt x="1397347" y="0"/>
+                </a:lnTo>
+                <a:lnTo>
+                  <a:pt x="1397347" y="1318587"/>
+                </a:lnTo>
+                <a:lnTo>
+                  <a:pt x="0" y="1318587"/>
                 </a:lnTo>
                 <a:lnTo>
                   <a:pt x="0" y="0"/>
@@ -8571,8 +10368,60 @@
           <p:nvPr/>
         </p:nvSpPr>
         <p:spPr>
+          <a:xfrm flipH="false" flipV="false" rot="0">
+            <a:off x="2435762" y="5827311"/>
+            <a:ext cx="6487956" cy="2677756"/>
+          </a:xfrm>
+          <a:custGeom>
+            <a:avLst/>
+            <a:gdLst/>
+            <a:ahLst/>
+            <a:cxnLst/>
+            <a:rect r="r" b="b" t="t" l="l"/>
+            <a:pathLst>
+              <a:path h="2677756" w="6487956">
+                <a:moveTo>
+                  <a:pt x="0" y="0"/>
+                </a:moveTo>
+                <a:lnTo>
+                  <a:pt x="6487956" y="0"/>
+                </a:lnTo>
+                <a:lnTo>
+                  <a:pt x="6487956" y="2677757"/>
+                </a:lnTo>
+                <a:lnTo>
+                  <a:pt x="0" y="2677757"/>
+                </a:lnTo>
+                <a:lnTo>
+                  <a:pt x="0" y="0"/>
+                </a:lnTo>
+                <a:close/>
+              </a:path>
+            </a:pathLst>
+          </a:custGeom>
+          <a:blipFill>
+            <a:blip r:embed="rId2">
+              <a:extLst>
+                <a:ext uri="{96DAC541-7B7A-43D3-8B79-37D633B846F1}">
+                  <asvg:svgBlip xmlns:asvg="http://schemas.microsoft.com/office/drawing/2016/SVG/main" r:embed="rId3"/>
+                </a:ext>
+              </a:extLst>
+            </a:blip>
+            <a:stretch>
+              <a:fillRect l="0" t="0" r="0" b="0"/>
+            </a:stretch>
+          </a:blipFill>
+        </p:spPr>
+      </p:sp>
+      <p:sp>
+        <p:nvSpPr>
+          <p:cNvPr name="Freeform 7" id="7"/>
+          <p:cNvSpPr/>
+          <p:nvPr/>
+        </p:nvSpPr>
+        <p:spPr>
           <a:xfrm flipH="false" flipV="false" rot="-2526217">
-            <a:off x="7428821" y="8940779"/>
+            <a:off x="15620800" y="9495591"/>
             <a:ext cx="2246425" cy="2119809"/>
           </a:xfrm>
           <a:custGeom>
@@ -8587,10 +10436,10 @@
                   <a:pt x="0" y="0"/>
                 </a:moveTo>
                 <a:lnTo>
-                  <a:pt x="2246425" y="0"/>
-                </a:lnTo>
-                <a:lnTo>
-                  <a:pt x="2246425" y="2119809"/>
+                  <a:pt x="2246426" y="0"/>
+                </a:lnTo>
+                <a:lnTo>
+                  <a:pt x="2246426" y="2119809"/>
                 </a:lnTo>
                 <a:lnTo>
                   <a:pt x="0" y="2119809"/>
@@ -8618,13 +10467,13 @@
       </p:sp>
       <p:sp>
         <p:nvSpPr>
-          <p:cNvPr name="Freeform 7" id="7"/>
+          <p:cNvPr name="Freeform 8" id="8"/>
           <p:cNvSpPr/>
           <p:nvPr/>
         </p:nvSpPr>
         <p:spPr>
           <a:xfrm flipH="false" flipV="false" rot="-2526217">
-            <a:off x="808695" y="4475822"/>
+            <a:off x="9669513" y="475856"/>
             <a:ext cx="853014" cy="804935"/>
           </a:xfrm>
           <a:custGeom>
@@ -8639,13 +10488,13 @@
                   <a:pt x="0" y="0"/>
                 </a:moveTo>
                 <a:lnTo>
-                  <a:pt x="853014" y="0"/>
-                </a:lnTo>
-                <a:lnTo>
-                  <a:pt x="853014" y="804935"/>
-                </a:lnTo>
-                <a:lnTo>
-                  <a:pt x="0" y="804935"/>
+                  <a:pt x="853015" y="0"/>
+                </a:lnTo>
+                <a:lnTo>
+                  <a:pt x="853015" y="804936"/>
+                </a:lnTo>
+                <a:lnTo>
+                  <a:pt x="0" y="804936"/>
                 </a:lnTo>
                 <a:lnTo>
                   <a:pt x="0" y="0"/>
@@ -8670,14 +10519,112 @@
       </p:sp>
       <p:sp>
         <p:nvSpPr>
-          <p:cNvPr name="TextBox 8" id="8"/>
+          <p:cNvPr name="Freeform 9" id="9"/>
+          <p:cNvSpPr/>
+          <p:nvPr/>
+        </p:nvSpPr>
+        <p:spPr>
+          <a:xfrm flipH="false" flipV="false" rot="0">
+            <a:off x="9236913" y="1976511"/>
+            <a:ext cx="8591989" cy="7199549"/>
+          </a:xfrm>
+          <a:custGeom>
+            <a:avLst/>
+            <a:gdLst/>
+            <a:ahLst/>
+            <a:cxnLst/>
+            <a:rect r="r" b="b" t="t" l="l"/>
+            <a:pathLst>
+              <a:path h="7199549" w="8591989">
+                <a:moveTo>
+                  <a:pt x="0" y="0"/>
+                </a:moveTo>
+                <a:lnTo>
+                  <a:pt x="8591988" y="0"/>
+                </a:lnTo>
+                <a:lnTo>
+                  <a:pt x="8591988" y="7199548"/>
+                </a:lnTo>
+                <a:lnTo>
+                  <a:pt x="0" y="7199548"/>
+                </a:lnTo>
+                <a:lnTo>
+                  <a:pt x="0" y="0"/>
+                </a:lnTo>
+                <a:close/>
+              </a:path>
+            </a:pathLst>
+          </a:custGeom>
+          <a:blipFill>
+            <a:blip r:embed="rId8"/>
+            <a:stretch>
+              <a:fillRect l="0" t="0" r="0" b="0"/>
+            </a:stretch>
+          </a:blipFill>
+        </p:spPr>
+      </p:sp>
+      <p:sp>
+        <p:nvSpPr>
+          <p:cNvPr name="Freeform 10" id="10"/>
+          <p:cNvSpPr/>
+          <p:nvPr/>
+        </p:nvSpPr>
+        <p:spPr>
+          <a:xfrm flipH="false" flipV="false" rot="0">
+            <a:off x="14571032" y="293758"/>
+            <a:ext cx="1825722" cy="2505279"/>
+          </a:xfrm>
+          <a:custGeom>
+            <a:avLst/>
+            <a:gdLst/>
+            <a:ahLst/>
+            <a:cxnLst/>
+            <a:rect r="r" b="b" t="t" l="l"/>
+            <a:pathLst>
+              <a:path h="2505279" w="1825722">
+                <a:moveTo>
+                  <a:pt x="0" y="0"/>
+                </a:moveTo>
+                <a:lnTo>
+                  <a:pt x="1825722" y="0"/>
+                </a:lnTo>
+                <a:lnTo>
+                  <a:pt x="1825722" y="2505279"/>
+                </a:lnTo>
+                <a:lnTo>
+                  <a:pt x="0" y="2505279"/>
+                </a:lnTo>
+                <a:lnTo>
+                  <a:pt x="0" y="0"/>
+                </a:lnTo>
+                <a:close/>
+              </a:path>
+            </a:pathLst>
+          </a:custGeom>
+          <a:blipFill>
+            <a:blip r:embed="rId9">
+              <a:extLst>
+                <a:ext uri="{96DAC541-7B7A-43D3-8B79-37D633B846F1}">
+                  <asvg:svgBlip xmlns:asvg="http://schemas.microsoft.com/office/drawing/2016/SVG/main" r:embed="rId10"/>
+                </a:ext>
+              </a:extLst>
+            </a:blip>
+            <a:stretch>
+              <a:fillRect l="0" t="0" r="0" b="0"/>
+            </a:stretch>
+          </a:blipFill>
+        </p:spPr>
+      </p:sp>
+      <p:sp>
+        <p:nvSpPr>
+          <p:cNvPr name="TextBox 11" id="11"/>
           <p:cNvSpPr txBox="true"/>
           <p:nvPr/>
         </p:nvSpPr>
         <p:spPr>
           <a:xfrm rot="0">
-            <a:off x="2674207" y="-9948"/>
-            <a:ext cx="10476931" cy="1674495"/>
+            <a:off x="2461939" y="624377"/>
+            <a:ext cx="11777949" cy="922020"/>
           </a:xfrm>
           <a:prstGeom prst="rect">
             <a:avLst/>
@@ -8704,21 +10651,114 @@
                 <a:cs typeface="Funtastic"/>
                 <a:sym typeface="Funtastic"/>
               </a:rPr>
-              <a:t>Resultados del proyecto (modelamiento)</a:t>
+              <a:t>Modelamiento</a:t>
             </a:r>
           </a:p>
         </p:txBody>
       </p:sp>
       <p:sp>
         <p:nvSpPr>
-          <p:cNvPr name="Freeform 9" id="9"/>
+          <p:cNvPr name="TextBox 12" id="12"/>
+          <p:cNvSpPr txBox="true"/>
+          <p:nvPr/>
+        </p:nvSpPr>
+        <p:spPr>
+          <a:xfrm rot="0">
+            <a:off x="968642" y="2536201"/>
+            <a:ext cx="7635352" cy="2819400"/>
+          </a:xfrm>
+          <a:prstGeom prst="rect">
+            <a:avLst/>
+          </a:prstGeom>
+        </p:spPr>
+        <p:txBody>
+          <a:bodyPr anchor="t" rtlCol="false" tIns="0" lIns="0" bIns="0" rIns="0">
+            <a:spAutoFit/>
+          </a:bodyPr>
+          <a:lstStyle/>
+          <a:p>
+            <a:pPr algn="l" marL="755651" indent="-377825" lvl="1">
+              <a:lnSpc>
+                <a:spcPts val="3675"/>
+              </a:lnSpc>
+              <a:buFont typeface="Arial"/>
+              <a:buChar char="•"/>
+            </a:pPr>
+            <a:r>
+              <a:rPr lang="en-US" sz="3500">
+                <a:solidFill>
+                  <a:srgbClr val="925000"/>
+                </a:solidFill>
+                <a:latin typeface="Sukar"/>
+                <a:ea typeface="Sukar"/>
+                <a:cs typeface="Sukar"/>
+                <a:sym typeface="Sukar"/>
+              </a:rPr>
+              <a:t>Regresión</a:t>
+            </a:r>
+            <a:r>
+              <a:rPr lang="en-US" sz="3500">
+                <a:solidFill>
+                  <a:srgbClr val="925000"/>
+                </a:solidFill>
+                <a:latin typeface="Sukar"/>
+                <a:ea typeface="Sukar"/>
+                <a:cs typeface="Sukar"/>
+                <a:sym typeface="Sukar"/>
+              </a:rPr>
+              <a:t> Logística: Score balanceado en test. Demostró mayor estabilidad lineal para separar el target.</a:t>
+            </a:r>
+          </a:p>
+          <a:p>
+            <a:pPr algn="ctr">
+              <a:lnSpc>
+                <a:spcPts val="3675"/>
+              </a:lnSpc>
+            </a:pPr>
+            <a:r>
+              <a:rPr lang="en-US" sz="3500">
+                <a:solidFill>
+                  <a:srgbClr val="925000"/>
+                </a:solidFill>
+                <a:latin typeface="Sukar"/>
+                <a:ea typeface="Sukar"/>
+                <a:cs typeface="Sukar"/>
+                <a:sym typeface="Sukar"/>
+              </a:rPr>
+              <a:t>Accuracy: 0.70</a:t>
+            </a:r>
+          </a:p>
+          <a:p>
+            <a:pPr algn="ctr">
+              <a:lnSpc>
+                <a:spcPts val="3675"/>
+              </a:lnSpc>
+            </a:pPr>
+            <a:r>
+              <a:rPr lang="en-US" sz="3500">
+                <a:solidFill>
+                  <a:srgbClr val="925000"/>
+                </a:solidFill>
+                <a:latin typeface="Sukar"/>
+                <a:ea typeface="Sukar"/>
+                <a:cs typeface="Sukar"/>
+                <a:sym typeface="Sukar"/>
+              </a:rPr>
+              <a:t>F1 Score: 0.64</a:t>
+            </a:r>
+          </a:p>
+        </p:txBody>
+      </p:sp>
+      <p:sp>
+        <p:nvSpPr>
+          <p:cNvPr name="Freeform 13" id="13"/>
           <p:cNvSpPr/>
           <p:nvPr/>
         </p:nvSpPr>
         <p:spPr>
           <a:xfrm flipH="false" flipV="false" rot="0">
-            <a:off x="530245" y="2458565"/>
-            <a:ext cx="8114848" cy="6799735"/>
+            <a:off x="648918" y="5843064"/>
+            <a:ext cx="6487956" cy="2677756"/>
           </a:xfrm>
           <a:custGeom>
             <a:avLst/>
@@ -8727,18 +10767,18 @@
             <a:cxnLst/>
             <a:rect r="r" b="b" t="t" l="l"/>
             <a:pathLst>
-              <a:path h="6799735" w="8114848">
+              <a:path h="2677756" w="6487956">
                 <a:moveTo>
                   <a:pt x="0" y="0"/>
                 </a:moveTo>
                 <a:lnTo>
-                  <a:pt x="8114848" y="0"/>
-                </a:lnTo>
-                <a:lnTo>
-                  <a:pt x="8114848" y="6799735"/>
-                </a:lnTo>
-                <a:lnTo>
-                  <a:pt x="0" y="6799735"/>
+                  <a:pt x="6487956" y="0"/>
+                </a:lnTo>
+                <a:lnTo>
+                  <a:pt x="6487956" y="2677757"/>
+                </a:lnTo>
+                <a:lnTo>
+                  <a:pt x="0" y="2677757"/>
                 </a:lnTo>
                 <a:lnTo>
                   <a:pt x="0" y="0"/>
@@ -8748,7 +10788,13 @@
             </a:pathLst>
           </a:custGeom>
           <a:blipFill>
-            <a:blip r:embed="rId8"/>
+            <a:blip r:embed="rId2">
+              <a:extLst>
+                <a:ext uri="{96DAC541-7B7A-43D3-8B79-37D633B846F1}">
+                  <asvg:svgBlip xmlns:asvg="http://schemas.microsoft.com/office/drawing/2016/SVG/main" r:embed="rId3"/>
+                </a:ext>
+              </a:extLst>
+            </a:blip>
             <a:stretch>
               <a:fillRect l="0" t="0" r="0" b="0"/>
             </a:stretch>
@@ -8757,49 +10803,133 @@
       </p:sp>
       <p:sp>
         <p:nvSpPr>
-          <p:cNvPr name="Freeform 10" id="10"/>
-          <p:cNvSpPr/>
-          <p:nvPr/>
-        </p:nvSpPr>
-        <p:spPr>
-          <a:xfrm flipH="false" flipV="false" rot="0">
-            <a:off x="8890415" y="2458565"/>
-            <a:ext cx="8521448" cy="6799735"/>
-          </a:xfrm>
-          <a:custGeom>
-            <a:avLst/>
-            <a:gdLst/>
-            <a:ahLst/>
-            <a:cxnLst/>
-            <a:rect r="r" b="b" t="t" l="l"/>
-            <a:pathLst>
-              <a:path h="6799735" w="8521448">
-                <a:moveTo>
-                  <a:pt x="0" y="0"/>
-                </a:moveTo>
-                <a:lnTo>
-                  <a:pt x="8521448" y="0"/>
-                </a:lnTo>
-                <a:lnTo>
-                  <a:pt x="8521448" y="6799735"/>
-                </a:lnTo>
-                <a:lnTo>
-                  <a:pt x="0" y="6799735"/>
-                </a:lnTo>
-                <a:lnTo>
-                  <a:pt x="0" y="0"/>
-                </a:lnTo>
-                <a:close/>
-              </a:path>
-            </a:pathLst>
-          </a:custGeom>
-          <a:blipFill>
-            <a:blip r:embed="rId9"/>
-            <a:stretch>
-              <a:fillRect l="-1276" t="0" r="-1276" b="0"/>
-            </a:stretch>
-          </a:blipFill>
-        </p:spPr>
+          <p:cNvPr name="TextBox 14" id="14"/>
+          <p:cNvSpPr txBox="true"/>
+          <p:nvPr/>
+        </p:nvSpPr>
+        <p:spPr>
+          <a:xfrm rot="0">
+            <a:off x="968642" y="6094310"/>
+            <a:ext cx="7635352" cy="2134235"/>
+          </a:xfrm>
+          <a:prstGeom prst="rect">
+            <a:avLst/>
+          </a:prstGeom>
+        </p:spPr>
+        <p:txBody>
+          <a:bodyPr anchor="t" rtlCol="false" tIns="0" lIns="0" bIns="0" rIns="0">
+            <a:spAutoFit/>
+          </a:bodyPr>
+          <a:lstStyle/>
+          <a:p>
+            <a:pPr algn="l" marL="755662" indent="-377831" lvl="1">
+              <a:lnSpc>
+                <a:spcPts val="4270"/>
+              </a:lnSpc>
+              <a:buFont typeface="Arial"/>
+              <a:buChar char="•"/>
+            </a:pPr>
+            <a:r>
+              <a:rPr lang="en-US" sz="3500">
+                <a:solidFill>
+                  <a:srgbClr val="925000"/>
+                </a:solidFill>
+                <a:latin typeface="Sukar"/>
+                <a:ea typeface="Sukar"/>
+                <a:cs typeface="Sukar"/>
+                <a:sym typeface="Sukar"/>
+              </a:rPr>
+              <a:t>R</a:t>
+            </a:r>
+            <a:r>
+              <a:rPr lang="en-US" sz="3500">
+                <a:solidFill>
+                  <a:srgbClr val="925000"/>
+                </a:solidFill>
+                <a:latin typeface="Sukar"/>
+                <a:ea typeface="Sukar"/>
+                <a:cs typeface="Sukar"/>
+                <a:sym typeface="Sukar"/>
+              </a:rPr>
+              <a:t>andom Forest: Registró un leve overfitting debido a la alta dispersión de las aplicaciones de</a:t>
+            </a:r>
+            <a:r>
+              <a:rPr lang="en-US" sz="3500">
+                <a:solidFill>
+                  <a:srgbClr val="925000"/>
+                </a:solidFill>
+                <a:latin typeface="Sukar"/>
+                <a:ea typeface="Sukar"/>
+                <a:cs typeface="Sukar"/>
+                <a:sym typeface="Sukar"/>
+              </a:rPr>
+              <a:t> nicho.</a:t>
+            </a:r>
+          </a:p>
+          <a:p>
+            <a:pPr algn="ctr">
+              <a:lnSpc>
+                <a:spcPts val="4270"/>
+              </a:lnSpc>
+            </a:pPr>
+            <a:r>
+              <a:rPr lang="en-US" sz="3500">
+                <a:solidFill>
+                  <a:srgbClr val="925000"/>
+                </a:solidFill>
+                <a:latin typeface="Sukar"/>
+                <a:ea typeface="Sukar"/>
+                <a:cs typeface="Sukar"/>
+                <a:sym typeface="Sukar"/>
+              </a:rPr>
+              <a:t>Mejor score: 0.69</a:t>
+            </a:r>
+          </a:p>
+        </p:txBody>
+      </p:sp>
+      <p:sp>
+        <p:nvSpPr>
+          <p:cNvPr name="TextBox 15" id="15"/>
+          <p:cNvSpPr txBox="true"/>
+          <p:nvPr/>
+        </p:nvSpPr>
+        <p:spPr>
+          <a:xfrm rot="0">
+            <a:off x="335724" y="8559800"/>
+            <a:ext cx="8901189" cy="1166495"/>
+          </a:xfrm>
+          <a:prstGeom prst="rect">
+            <a:avLst/>
+          </a:prstGeom>
+        </p:spPr>
+        <p:txBody>
+          <a:bodyPr anchor="t" rtlCol="false" tIns="0" lIns="0" bIns="0" rIns="0">
+            <a:spAutoFit/>
+          </a:bodyPr>
+          <a:lstStyle/>
+          <a:p>
+            <a:pPr algn="ctr">
+              <a:lnSpc>
+                <a:spcPts val="4480"/>
+              </a:lnSpc>
+              <a:spcBef>
+                <a:spcPct val="0"/>
+              </a:spcBef>
+            </a:pPr>
+            <a:r>
+              <a:rPr lang="en-US" sz="3200">
+                <a:solidFill>
+                  <a:srgbClr val="925000"/>
+                </a:solidFill>
+                <a:latin typeface="Funtastic"/>
+                <a:ea typeface="Funtastic"/>
+                <a:cs typeface="Funtastic"/>
+                <a:sym typeface="Funtastic"/>
+              </a:rPr>
+              <a:t>Más complejo no siempre es mejor; el modelo simple generalizó de forma óptima.</a:t>
+            </a:r>
+          </a:p>
+        </p:txBody>
       </p:sp>
     </p:spTree>
   </p:cSld>
@@ -8892,9 +11022,9 @@
           <p:nvPr/>
         </p:nvSpPr>
         <p:spPr>
-          <a:xfrm flipH="false" flipV="false" rot="-1408795">
-            <a:off x="15093426" y="283107"/>
-            <a:ext cx="1919844" cy="2399805"/>
+          <a:xfrm flipH="false" flipV="false" rot="3783878">
+            <a:off x="11121286" y="1643093"/>
+            <a:ext cx="853014" cy="804935"/>
           </a:xfrm>
           <a:custGeom>
             <a:avLst/>
@@ -8903,18 +11033,18 @@
             <a:cxnLst/>
             <a:rect r="r" b="b" t="t" l="l"/>
             <a:pathLst>
-              <a:path h="2399805" w="1919844">
+              <a:path h="804935" w="853014">
                 <a:moveTo>
                   <a:pt x="0" y="0"/>
                 </a:moveTo>
                 <a:lnTo>
-                  <a:pt x="1919844" y="0"/>
-                </a:lnTo>
-                <a:lnTo>
-                  <a:pt x="1919844" y="2399805"/>
-                </a:lnTo>
-                <a:lnTo>
-                  <a:pt x="0" y="2399805"/>
+                  <a:pt x="853014" y="0"/>
+                </a:lnTo>
+                <a:lnTo>
+                  <a:pt x="853014" y="804935"/>
+                </a:lnTo>
+                <a:lnTo>
+                  <a:pt x="0" y="804935"/>
                 </a:lnTo>
                 <a:lnTo>
                   <a:pt x="0" y="0"/>
@@ -8944,8 +11074,112 @@
           <p:nvPr/>
         </p:nvSpPr>
         <p:spPr>
-          <a:xfrm flipH="false" flipV="false" rot="3783878">
-            <a:off x="11121286" y="1643093"/>
+          <a:xfrm flipH="false" flipV="false" rot="-2526217">
+            <a:off x="16530916" y="8023663"/>
+            <a:ext cx="1456769" cy="1374660"/>
+          </a:xfrm>
+          <a:custGeom>
+            <a:avLst/>
+            <a:gdLst/>
+            <a:ahLst/>
+            <a:cxnLst/>
+            <a:rect r="r" b="b" t="t" l="l"/>
+            <a:pathLst>
+              <a:path h="1374660" w="1456769">
+                <a:moveTo>
+                  <a:pt x="0" y="0"/>
+                </a:moveTo>
+                <a:lnTo>
+                  <a:pt x="1456768" y="0"/>
+                </a:lnTo>
+                <a:lnTo>
+                  <a:pt x="1456768" y="1374660"/>
+                </a:lnTo>
+                <a:lnTo>
+                  <a:pt x="0" y="1374660"/>
+                </a:lnTo>
+                <a:lnTo>
+                  <a:pt x="0" y="0"/>
+                </a:lnTo>
+                <a:close/>
+              </a:path>
+            </a:pathLst>
+          </a:custGeom>
+          <a:blipFill>
+            <a:blip r:embed="rId4">
+              <a:extLst>
+                <a:ext uri="{96DAC541-7B7A-43D3-8B79-37D633B846F1}">
+                  <asvg:svgBlip xmlns:asvg="http://schemas.microsoft.com/office/drawing/2016/SVG/main" r:embed="rId5"/>
+                </a:ext>
+              </a:extLst>
+            </a:blip>
+            <a:stretch>
+              <a:fillRect l="0" t="0" r="0" b="0"/>
+            </a:stretch>
+          </a:blipFill>
+        </p:spPr>
+      </p:sp>
+      <p:sp>
+        <p:nvSpPr>
+          <p:cNvPr name="Freeform 5" id="5"/>
+          <p:cNvSpPr/>
+          <p:nvPr/>
+        </p:nvSpPr>
+        <p:spPr>
+          <a:xfrm flipH="false" flipV="false" rot="-2526217">
+            <a:off x="7428821" y="8940779"/>
+            <a:ext cx="2246425" cy="2119809"/>
+          </a:xfrm>
+          <a:custGeom>
+            <a:avLst/>
+            <a:gdLst/>
+            <a:ahLst/>
+            <a:cxnLst/>
+            <a:rect r="r" b="b" t="t" l="l"/>
+            <a:pathLst>
+              <a:path h="2119809" w="2246425">
+                <a:moveTo>
+                  <a:pt x="0" y="0"/>
+                </a:moveTo>
+                <a:lnTo>
+                  <a:pt x="2246425" y="0"/>
+                </a:lnTo>
+                <a:lnTo>
+                  <a:pt x="2246425" y="2119809"/>
+                </a:lnTo>
+                <a:lnTo>
+                  <a:pt x="0" y="2119809"/>
+                </a:lnTo>
+                <a:lnTo>
+                  <a:pt x="0" y="0"/>
+                </a:lnTo>
+                <a:close/>
+              </a:path>
+            </a:pathLst>
+          </a:custGeom>
+          <a:blipFill>
+            <a:blip r:embed="rId4">
+              <a:extLst>
+                <a:ext uri="{96DAC541-7B7A-43D3-8B79-37D633B846F1}">
+                  <asvg:svgBlip xmlns:asvg="http://schemas.microsoft.com/office/drawing/2016/SVG/main" r:embed="rId5"/>
+                </a:ext>
+              </a:extLst>
+            </a:blip>
+            <a:stretch>
+              <a:fillRect l="0" t="0" r="0" b="0"/>
+            </a:stretch>
+          </a:blipFill>
+        </p:spPr>
+      </p:sp>
+      <p:sp>
+        <p:nvSpPr>
+          <p:cNvPr name="Freeform 6" id="6"/>
+          <p:cNvSpPr/>
+          <p:nvPr/>
+        </p:nvSpPr>
+        <p:spPr>
+          <a:xfrm flipH="false" flipV="false" rot="-2526217">
+            <a:off x="15439516" y="182098"/>
             <a:ext cx="853014" cy="804935"/>
           </a:xfrm>
           <a:custGeom>
@@ -8963,10 +11197,10 @@
                   <a:pt x="853014" y="0"/>
                 </a:lnTo>
                 <a:lnTo>
-                  <a:pt x="853014" y="804935"/>
-                </a:lnTo>
-                <a:lnTo>
-                  <a:pt x="0" y="804935"/>
+                  <a:pt x="853014" y="804936"/>
+                </a:lnTo>
+                <a:lnTo>
+                  <a:pt x="0" y="804936"/>
                 </a:lnTo>
                 <a:lnTo>
                   <a:pt x="0" y="0"/>
@@ -8976,10 +11210,10 @@
             </a:pathLst>
           </a:custGeom>
           <a:blipFill>
-            <a:blip r:embed="rId6">
+            <a:blip r:embed="rId4">
               <a:extLst>
                 <a:ext uri="{96DAC541-7B7A-43D3-8B79-37D633B846F1}">
-                  <asvg:svgBlip xmlns:asvg="http://schemas.microsoft.com/office/drawing/2016/SVG/main" r:embed="rId7"/>
+                  <asvg:svgBlip xmlns:asvg="http://schemas.microsoft.com/office/drawing/2016/SVG/main" r:embed="rId5"/>
                 </a:ext>
               </a:extLst>
             </a:blip>
@@ -8989,162 +11223,40 @@
           </a:blipFill>
         </p:spPr>
       </p:sp>
-      <p:sp>
-        <p:nvSpPr>
-          <p:cNvPr name="Freeform 5" id="5"/>
-          <p:cNvSpPr/>
-          <p:nvPr/>
-        </p:nvSpPr>
-        <p:spPr>
-          <a:xfrm flipH="false" flipV="false" rot="-2526217">
-            <a:off x="16530916" y="8023663"/>
-            <a:ext cx="1456769" cy="1374660"/>
-          </a:xfrm>
-          <a:custGeom>
-            <a:avLst/>
-            <a:gdLst/>
-            <a:ahLst/>
-            <a:cxnLst/>
-            <a:rect r="r" b="b" t="t" l="l"/>
-            <a:pathLst>
-              <a:path h="1374660" w="1456769">
-                <a:moveTo>
-                  <a:pt x="0" y="0"/>
-                </a:moveTo>
-                <a:lnTo>
-                  <a:pt x="1456768" y="0"/>
-                </a:lnTo>
-                <a:lnTo>
-                  <a:pt x="1456768" y="1374660"/>
-                </a:lnTo>
-                <a:lnTo>
-                  <a:pt x="0" y="1374660"/>
-                </a:lnTo>
-                <a:lnTo>
-                  <a:pt x="0" y="0"/>
-                </a:lnTo>
-                <a:close/>
-              </a:path>
-            </a:pathLst>
-          </a:custGeom>
-          <a:blipFill>
-            <a:blip r:embed="rId6">
-              <a:extLst>
-                <a:ext uri="{96DAC541-7B7A-43D3-8B79-37D633B846F1}">
-                  <asvg:svgBlip xmlns:asvg="http://schemas.microsoft.com/office/drawing/2016/SVG/main" r:embed="rId7"/>
-                </a:ext>
-              </a:extLst>
-            </a:blip>
-            <a:stretch>
-              <a:fillRect l="0" t="0" r="0" b="0"/>
-            </a:stretch>
-          </a:blipFill>
-        </p:spPr>
-      </p:sp>
-      <p:sp>
-        <p:nvSpPr>
-          <p:cNvPr name="Freeform 6" id="6"/>
-          <p:cNvSpPr/>
-          <p:nvPr/>
-        </p:nvSpPr>
-        <p:spPr>
-          <a:xfrm flipH="false" flipV="false" rot="-2526217">
-            <a:off x="7428821" y="8940779"/>
-            <a:ext cx="2246425" cy="2119809"/>
-          </a:xfrm>
-          <a:custGeom>
-            <a:avLst/>
-            <a:gdLst/>
-            <a:ahLst/>
-            <a:cxnLst/>
-            <a:rect r="r" b="b" t="t" l="l"/>
-            <a:pathLst>
-              <a:path h="2119809" w="2246425">
-                <a:moveTo>
-                  <a:pt x="0" y="0"/>
-                </a:moveTo>
-                <a:lnTo>
-                  <a:pt x="2246425" y="0"/>
-                </a:lnTo>
-                <a:lnTo>
-                  <a:pt x="2246425" y="2119809"/>
-                </a:lnTo>
-                <a:lnTo>
-                  <a:pt x="0" y="2119809"/>
-                </a:lnTo>
-                <a:lnTo>
-                  <a:pt x="0" y="0"/>
-                </a:lnTo>
-                <a:close/>
-              </a:path>
-            </a:pathLst>
-          </a:custGeom>
-          <a:blipFill>
-            <a:blip r:embed="rId6">
-              <a:extLst>
-                <a:ext uri="{96DAC541-7B7A-43D3-8B79-37D633B846F1}">
-                  <asvg:svgBlip xmlns:asvg="http://schemas.microsoft.com/office/drawing/2016/SVG/main" r:embed="rId7"/>
-                </a:ext>
-              </a:extLst>
-            </a:blip>
-            <a:stretch>
-              <a:fillRect l="0" t="0" r="0" b="0"/>
-            </a:stretch>
-          </a:blipFill>
-        </p:spPr>
-      </p:sp>
-      <p:sp>
-        <p:nvSpPr>
-          <p:cNvPr name="Freeform 7" id="7"/>
-          <p:cNvSpPr/>
-          <p:nvPr/>
-        </p:nvSpPr>
-        <p:spPr>
-          <a:xfrm flipH="false" flipV="false" rot="-2526217">
-            <a:off x="808695" y="4475822"/>
-            <a:ext cx="853014" cy="804935"/>
-          </a:xfrm>
-          <a:custGeom>
-            <a:avLst/>
-            <a:gdLst/>
-            <a:ahLst/>
-            <a:cxnLst/>
-            <a:rect r="r" b="b" t="t" l="l"/>
-            <a:pathLst>
-              <a:path h="804935" w="853014">
-                <a:moveTo>
-                  <a:pt x="0" y="0"/>
-                </a:moveTo>
-                <a:lnTo>
-                  <a:pt x="853014" y="0"/>
-                </a:lnTo>
-                <a:lnTo>
-                  <a:pt x="853014" y="804935"/>
-                </a:lnTo>
-                <a:lnTo>
-                  <a:pt x="0" y="804935"/>
-                </a:lnTo>
-                <a:lnTo>
-                  <a:pt x="0" y="0"/>
-                </a:lnTo>
-                <a:close/>
-              </a:path>
-            </a:pathLst>
-          </a:custGeom>
-          <a:blipFill>
-            <a:blip r:embed="rId6">
-              <a:extLst>
-                <a:ext uri="{96DAC541-7B7A-43D3-8B79-37D633B846F1}">
-                  <asvg:svgBlip xmlns:asvg="http://schemas.microsoft.com/office/drawing/2016/SVG/main" r:embed="rId7"/>
-                </a:ext>
-              </a:extLst>
-            </a:blip>
-            <a:stretch>
-              <a:fillRect l="0" t="0" r="0" b="0"/>
-            </a:stretch>
-          </a:blipFill>
-        </p:spPr>
-      </p:sp>
+      <p:pic>
+        <p:nvPicPr>
+          <p:cNvPr name="Picture 7" id="7">
+            <a:hlinkClick action="ppaction://media"/>
+          </p:cNvPr>
+          <p:cNvPicPr>
+            <a:picLocks noChangeAspect="true"/>
+          </p:cNvPicPr>
+          <p:nvPr>
+            <a:videoFile r:link="rId7"/>
+            <p:extLst>
+              <p:ext uri="{DAA4B4D4-6D71-4841-9C94-3DE7FCFB9230}">
+                <p14:media xmlns:p14="http://schemas.microsoft.com/office/powerpoint/2010/main" r:embed="rId8"/>
+              </p:ext>
+            </p:extLst>
+          </p:nvPr>
+        </p:nvPicPr>
+        <p:blipFill>
+          <a:blip r:embed="rId6"/>
+          <a:srcRect l="853" t="0" r="853" b="0"/>
+          <a:stretch>
+            <a:fillRect/>
+          </a:stretch>
+        </p:blipFill>
+        <p:spPr>
+          <a:xfrm flipH="false" flipV="false" rot="0">
+            <a:off x="7008047" y="1483010"/>
+            <a:ext cx="10985622" cy="8335546"/>
+          </a:xfrm>
+          <a:prstGeom prst="rect">
+            <a:avLst/>
+          </a:prstGeom>
+        </p:spPr>
+      </p:pic>
       <p:sp>
         <p:nvSpPr>
           <p:cNvPr name="TextBox 8" id="8"/>
@@ -9153,8 +11265,8 @@
         </p:nvSpPr>
         <p:spPr>
           <a:xfrm rot="0">
-            <a:off x="2674207" y="-9948"/>
-            <a:ext cx="10476931" cy="1674495"/>
+            <a:off x="2094875" y="247075"/>
+            <a:ext cx="13184864" cy="922057"/>
           </a:xfrm>
           <a:prstGeom prst="rect">
             <a:avLst/>
@@ -9181,7 +11293,7 @@
                 <a:cs typeface="Funtastic"/>
                 <a:sym typeface="Funtastic"/>
               </a:rPr>
-              <a:t>Resultados del proyecto (optimizacion)</a:t>
+              <a:t>Dashboard Interactivo</a:t>
             </a:r>
           </a:p>
         </p:txBody>
@@ -9194,8 +11306,8 @@
         </p:nvSpPr>
         <p:spPr>
           <a:xfrm flipH="false" flipV="false" rot="0">
-            <a:off x="530245" y="2458565"/>
-            <a:ext cx="8114848" cy="6799735"/>
+            <a:off x="242811" y="2424656"/>
+            <a:ext cx="6542862" cy="2700418"/>
           </a:xfrm>
           <a:custGeom>
             <a:avLst/>
@@ -9204,18 +11316,18 @@
             <a:cxnLst/>
             <a:rect r="r" b="b" t="t" l="l"/>
             <a:pathLst>
-              <a:path h="6799735" w="8114848">
+              <a:path h="2700418" w="6542862">
                 <a:moveTo>
                   <a:pt x="0" y="0"/>
                 </a:moveTo>
                 <a:lnTo>
-                  <a:pt x="8114848" y="0"/>
-                </a:lnTo>
-                <a:lnTo>
-                  <a:pt x="8114848" y="6799735"/>
-                </a:lnTo>
-                <a:lnTo>
-                  <a:pt x="0" y="6799735"/>
+                  <a:pt x="6542862" y="0"/>
+                </a:lnTo>
+                <a:lnTo>
+                  <a:pt x="6542862" y="2700418"/>
+                </a:lnTo>
+                <a:lnTo>
+                  <a:pt x="0" y="2700418"/>
                 </a:lnTo>
                 <a:lnTo>
                   <a:pt x="0" y="0"/>
@@ -9225,7 +11337,13 @@
             </a:pathLst>
           </a:custGeom>
           <a:blipFill>
-            <a:blip r:embed="rId8"/>
+            <a:blip r:embed="rId9">
+              <a:extLst>
+                <a:ext uri="{96DAC541-7B7A-43D3-8B79-37D633B846F1}">
+                  <asvg:svgBlip xmlns:asvg="http://schemas.microsoft.com/office/drawing/2016/SVG/main" r:embed="rId10"/>
+                </a:ext>
+              </a:extLst>
+            </a:blip>
             <a:stretch>
               <a:fillRect l="0" t="0" r="0" b="0"/>
             </a:stretch>
@@ -9240,8 +11358,8 @@
         </p:nvSpPr>
         <p:spPr>
           <a:xfrm flipH="false" flipV="false" rot="0">
-            <a:off x="8890415" y="2458565"/>
-            <a:ext cx="8521448" cy="6799735"/>
+            <a:off x="242811" y="6380598"/>
+            <a:ext cx="6542862" cy="2700418"/>
           </a:xfrm>
           <a:custGeom>
             <a:avLst/>
@@ -9250,18 +11368,18 @@
             <a:cxnLst/>
             <a:rect r="r" b="b" t="t" l="l"/>
             <a:pathLst>
-              <a:path h="6799735" w="8521448">
+              <a:path h="2700418" w="6542862">
                 <a:moveTo>
                   <a:pt x="0" y="0"/>
                 </a:moveTo>
                 <a:lnTo>
-                  <a:pt x="8521448" y="0"/>
-                </a:lnTo>
-                <a:lnTo>
-                  <a:pt x="8521448" y="6799735"/>
-                </a:lnTo>
-                <a:lnTo>
-                  <a:pt x="0" y="6799735"/>
+                  <a:pt x="6542862" y="0"/>
+                </a:lnTo>
+                <a:lnTo>
+                  <a:pt x="6542862" y="2700418"/>
+                </a:lnTo>
+                <a:lnTo>
+                  <a:pt x="0" y="2700418"/>
                 </a:lnTo>
                 <a:lnTo>
                   <a:pt x="0" y="0"/>
@@ -9271,18 +11389,186 @@
             </a:pathLst>
           </a:custGeom>
           <a:blipFill>
-            <a:blip r:embed="rId9"/>
+            <a:blip r:embed="rId9">
+              <a:extLst>
+                <a:ext uri="{96DAC541-7B7A-43D3-8B79-37D633B846F1}">
+                  <asvg:svgBlip xmlns:asvg="http://schemas.microsoft.com/office/drawing/2016/SVG/main" r:embed="rId10"/>
+                </a:ext>
+              </a:extLst>
+            </a:blip>
             <a:stretch>
-              <a:fillRect l="-1276" t="0" r="-1276" b="0"/>
+              <a:fillRect l="0" t="0" r="0" b="0"/>
             </a:stretch>
           </a:blipFill>
         </p:spPr>
+      </p:sp>
+      <p:sp>
+        <p:nvSpPr>
+          <p:cNvPr name="Freeform 11" id="11"/>
+          <p:cNvSpPr/>
+          <p:nvPr/>
+        </p:nvSpPr>
+        <p:spPr>
+          <a:xfrm flipH="false" flipV="false" rot="0">
+            <a:off x="242811" y="4402498"/>
+            <a:ext cx="6542862" cy="2700418"/>
+          </a:xfrm>
+          <a:custGeom>
+            <a:avLst/>
+            <a:gdLst/>
+            <a:ahLst/>
+            <a:cxnLst/>
+            <a:rect r="r" b="b" t="t" l="l"/>
+            <a:pathLst>
+              <a:path h="2700418" w="6542862">
+                <a:moveTo>
+                  <a:pt x="0" y="0"/>
+                </a:moveTo>
+                <a:lnTo>
+                  <a:pt x="6542862" y="0"/>
+                </a:lnTo>
+                <a:lnTo>
+                  <a:pt x="6542862" y="2700418"/>
+                </a:lnTo>
+                <a:lnTo>
+                  <a:pt x="0" y="2700418"/>
+                </a:lnTo>
+                <a:lnTo>
+                  <a:pt x="0" y="0"/>
+                </a:lnTo>
+                <a:close/>
+              </a:path>
+            </a:pathLst>
+          </a:custGeom>
+          <a:blipFill>
+            <a:blip r:embed="rId9">
+              <a:extLst>
+                <a:ext uri="{96DAC541-7B7A-43D3-8B79-37D633B846F1}">
+                  <asvg:svgBlip xmlns:asvg="http://schemas.microsoft.com/office/drawing/2016/SVG/main" r:embed="rId10"/>
+                </a:ext>
+              </a:extLst>
+            </a:blip>
+            <a:stretch>
+              <a:fillRect l="0" t="0" r="0" b="0"/>
+            </a:stretch>
+          </a:blipFill>
+        </p:spPr>
+      </p:sp>
+      <p:sp>
+        <p:nvSpPr>
+          <p:cNvPr name="TextBox 12" id="12"/>
+          <p:cNvSpPr txBox="true"/>
+          <p:nvPr/>
+        </p:nvSpPr>
+        <p:spPr>
+          <a:xfrm rot="0">
+            <a:off x="461604" y="2639938"/>
+            <a:ext cx="6105276" cy="6149339"/>
+          </a:xfrm>
+          <a:prstGeom prst="rect">
+            <a:avLst/>
+          </a:prstGeom>
+        </p:spPr>
+        <p:txBody>
+          <a:bodyPr anchor="t" rtlCol="false" tIns="0" lIns="0" bIns="0" rIns="0">
+            <a:spAutoFit/>
+          </a:bodyPr>
+          <a:lstStyle/>
+          <a:p>
+            <a:pPr algn="l">
+              <a:lnSpc>
+                <a:spcPts val="5460"/>
+              </a:lnSpc>
+              <a:spcBef>
+                <a:spcPct val="0"/>
+              </a:spcBef>
+            </a:pPr>
+            <a:r>
+              <a:rPr lang="en-US" sz="3900">
+                <a:solidFill>
+                  <a:srgbClr val="925000"/>
+                </a:solidFill>
+                <a:latin typeface="Sukar"/>
+                <a:ea typeface="Sukar"/>
+                <a:cs typeface="Sukar"/>
+                <a:sym typeface="Sukar"/>
+              </a:rPr>
+              <a:t>• Interfaz web construida completamente en **Dash/Plotly**.</a:t>
+            </a:r>
+          </a:p>
+          <a:p>
+            <a:pPr algn="l">
+              <a:lnSpc>
+                <a:spcPts val="5460"/>
+              </a:lnSpc>
+              <a:spcBef>
+                <a:spcPct val="0"/>
+              </a:spcBef>
+            </a:pPr>
+            <a:r>
+              <a:rPr lang="en-US" sz="3900">
+                <a:solidFill>
+                  <a:srgbClr val="925000"/>
+                </a:solidFill>
+                <a:latin typeface="Sukar"/>
+                <a:ea typeface="Sukar"/>
+                <a:cs typeface="Sukar"/>
+                <a:sym typeface="Sukar"/>
+              </a:rPr>
+              <a:t>• Permite filtrado interactivo por clasificación de contenidos.</a:t>
+            </a:r>
+          </a:p>
+          <a:p>
+            <a:pPr algn="l">
+              <a:lnSpc>
+                <a:spcPts val="5460"/>
+              </a:lnSpc>
+              <a:spcBef>
+                <a:spcPct val="0"/>
+              </a:spcBef>
+            </a:pPr>
+            <a:r>
+              <a:rPr lang="en-US" sz="3900">
+                <a:solidFill>
+                  <a:srgbClr val="925000"/>
+                </a:solidFill>
+                <a:latin typeface="Sukar"/>
+                <a:ea typeface="Sukar"/>
+                <a:cs typeface="Sukar"/>
+                <a:sym typeface="Sukar"/>
+              </a:rPr>
+              <a:t>• Análisis integrado de monetización y volumen de descargas.</a:t>
+            </a:r>
+          </a:p>
+        </p:txBody>
       </p:sp>
     </p:spTree>
   </p:cSld>
   <p:clrMapOvr>
     <a:masterClrMapping/>
   </p:clrMapOvr>
+  <p:timing>
+    <p:tnLst>
+      <p:par>
+        <p:cTn dur="indefinite" restart="never" nodeType="tmRoot">
+          <p:childTnLst>
+            <p:video>
+              <p:cMediaNode vol="100000">
+                <p:cTn fill="hold" display="false">
+                  <p:stCondLst>
+                    <p:cond delay="indefinite"/>
+                  </p:stCondLst>
+                </p:cTn>
+                <p:tgtEl>
+                  <p:spTgt spid="7"/>
+                </p:tgtEl>
+              </p:cMediaNode>
+            </p:video>
+          </p:childTnLst>
+        </p:cTn>
+      </p:par>
+    </p:tnLst>
+  </p:timing>
 </p:sld>
 </file>
 
@@ -9317,9 +11603,9 @@
           <p:nvPr/>
         </p:nvSpPr>
         <p:spPr>
-          <a:xfrm flipH="false" flipV="false" rot="6846996">
-            <a:off x="-957053" y="-1071145"/>
-            <a:ext cx="2399729" cy="3183720"/>
+          <a:xfrm flipH="false" flipV="false" rot="1168799">
+            <a:off x="16706489" y="1355462"/>
+            <a:ext cx="1233161" cy="1163656"/>
           </a:xfrm>
           <a:custGeom>
             <a:avLst/>
@@ -9328,18 +11614,18 @@
             <a:cxnLst/>
             <a:rect r="r" b="b" t="t" l="l"/>
             <a:pathLst>
-              <a:path h="3183720" w="2399729">
+              <a:path h="1163656" w="1233161">
                 <a:moveTo>
                   <a:pt x="0" y="0"/>
                 </a:moveTo>
                 <a:lnTo>
-                  <a:pt x="2399729" y="0"/>
-                </a:lnTo>
-                <a:lnTo>
-                  <a:pt x="2399729" y="3183720"/>
-                </a:lnTo>
-                <a:lnTo>
-                  <a:pt x="0" y="3183720"/>
+                  <a:pt x="1233161" y="0"/>
+                </a:lnTo>
+                <a:lnTo>
+                  <a:pt x="1233161" y="1163656"/>
+                </a:lnTo>
+                <a:lnTo>
+                  <a:pt x="0" y="1163656"/>
                 </a:lnTo>
                 <a:lnTo>
                   <a:pt x="0" y="0"/>
@@ -9369,9 +11655,9 @@
           <p:nvPr/>
         </p:nvSpPr>
         <p:spPr>
-          <a:xfrm flipH="false" flipV="false" rot="-1408795">
-            <a:off x="15093426" y="283107"/>
-            <a:ext cx="1919844" cy="2399805"/>
+          <a:xfrm flipH="false" flipV="false" rot="-2526217">
+            <a:off x="15789759" y="8011161"/>
+            <a:ext cx="1404298" cy="1325147"/>
           </a:xfrm>
           <a:custGeom>
             <a:avLst/>
@@ -9380,18 +11666,319 @@
             <a:cxnLst/>
             <a:rect r="r" b="b" t="t" l="l"/>
             <a:pathLst>
-              <a:path h="2399805" w="1919844">
+              <a:path h="1325147" w="1404298">
                 <a:moveTo>
                   <a:pt x="0" y="0"/>
                 </a:moveTo>
                 <a:lnTo>
-                  <a:pt x="1919844" y="0"/>
-                </a:lnTo>
-                <a:lnTo>
-                  <a:pt x="1919844" y="2399805"/>
-                </a:lnTo>
-                <a:lnTo>
-                  <a:pt x="0" y="2399805"/>
+                  <a:pt x="1404298" y="0"/>
+                </a:lnTo>
+                <a:lnTo>
+                  <a:pt x="1404298" y="1325146"/>
+                </a:lnTo>
+                <a:lnTo>
+                  <a:pt x="0" y="1325146"/>
+                </a:lnTo>
+                <a:lnTo>
+                  <a:pt x="0" y="0"/>
+                </a:lnTo>
+                <a:close/>
+              </a:path>
+            </a:pathLst>
+          </a:custGeom>
+          <a:blipFill>
+            <a:blip r:embed="rId2">
+              <a:extLst>
+                <a:ext uri="{96DAC541-7B7A-43D3-8B79-37D633B846F1}">
+                  <asvg:svgBlip xmlns:asvg="http://schemas.microsoft.com/office/drawing/2016/SVG/main" r:embed="rId3"/>
+                </a:ext>
+              </a:extLst>
+            </a:blip>
+            <a:stretch>
+              <a:fillRect l="0" t="0" r="0" b="0"/>
+            </a:stretch>
+          </a:blipFill>
+        </p:spPr>
+      </p:sp>
+      <p:sp>
+        <p:nvSpPr>
+          <p:cNvPr name="Freeform 4" id="4"/>
+          <p:cNvSpPr/>
+          <p:nvPr/>
+        </p:nvSpPr>
+        <p:spPr>
+          <a:xfrm flipH="false" flipV="false" rot="-2526217">
+            <a:off x="967707" y="8718376"/>
+            <a:ext cx="853014" cy="804935"/>
+          </a:xfrm>
+          <a:custGeom>
+            <a:avLst/>
+            <a:gdLst/>
+            <a:ahLst/>
+            <a:cxnLst/>
+            <a:rect r="r" b="b" t="t" l="l"/>
+            <a:pathLst>
+              <a:path h="804935" w="853014">
+                <a:moveTo>
+                  <a:pt x="0" y="0"/>
+                </a:moveTo>
+                <a:lnTo>
+                  <a:pt x="853014" y="0"/>
+                </a:lnTo>
+                <a:lnTo>
+                  <a:pt x="853014" y="804936"/>
+                </a:lnTo>
+                <a:lnTo>
+                  <a:pt x="0" y="804936"/>
+                </a:lnTo>
+                <a:lnTo>
+                  <a:pt x="0" y="0"/>
+                </a:lnTo>
+                <a:close/>
+              </a:path>
+            </a:pathLst>
+          </a:custGeom>
+          <a:blipFill>
+            <a:blip r:embed="rId2">
+              <a:extLst>
+                <a:ext uri="{96DAC541-7B7A-43D3-8B79-37D633B846F1}">
+                  <asvg:svgBlip xmlns:asvg="http://schemas.microsoft.com/office/drawing/2016/SVG/main" r:embed="rId3"/>
+                </a:ext>
+              </a:extLst>
+            </a:blip>
+            <a:stretch>
+              <a:fillRect l="0" t="0" r="0" b="0"/>
+            </a:stretch>
+          </a:blipFill>
+        </p:spPr>
+      </p:sp>
+      <p:sp>
+        <p:nvSpPr>
+          <p:cNvPr name="Freeform 5" id="5"/>
+          <p:cNvSpPr/>
+          <p:nvPr/>
+        </p:nvSpPr>
+        <p:spPr>
+          <a:xfrm flipH="false" flipV="false" rot="1168799">
+            <a:off x="-422486" y="-307267"/>
+            <a:ext cx="1233161" cy="1163656"/>
+          </a:xfrm>
+          <a:custGeom>
+            <a:avLst/>
+            <a:gdLst/>
+            <a:ahLst/>
+            <a:cxnLst/>
+            <a:rect r="r" b="b" t="t" l="l"/>
+            <a:pathLst>
+              <a:path h="1163656" w="1233161">
+                <a:moveTo>
+                  <a:pt x="0" y="0"/>
+                </a:moveTo>
+                <a:lnTo>
+                  <a:pt x="1233161" y="0"/>
+                </a:lnTo>
+                <a:lnTo>
+                  <a:pt x="1233161" y="1163656"/>
+                </a:lnTo>
+                <a:lnTo>
+                  <a:pt x="0" y="1163656"/>
+                </a:lnTo>
+                <a:lnTo>
+                  <a:pt x="0" y="0"/>
+                </a:lnTo>
+                <a:close/>
+              </a:path>
+            </a:pathLst>
+          </a:custGeom>
+          <a:blipFill>
+            <a:blip r:embed="rId2">
+              <a:extLst>
+                <a:ext uri="{96DAC541-7B7A-43D3-8B79-37D633B846F1}">
+                  <asvg:svgBlip xmlns:asvg="http://schemas.microsoft.com/office/drawing/2016/SVG/main" r:embed="rId3"/>
+                </a:ext>
+              </a:extLst>
+            </a:blip>
+            <a:stretch>
+              <a:fillRect l="0" t="0" r="0" b="0"/>
+            </a:stretch>
+          </a:blipFill>
+        </p:spPr>
+      </p:sp>
+      <p:sp>
+        <p:nvSpPr>
+          <p:cNvPr name="Freeform 6" id="6"/>
+          <p:cNvSpPr/>
+          <p:nvPr/>
+        </p:nvSpPr>
+        <p:spPr>
+          <a:xfrm flipH="false" flipV="false" rot="1154730">
+            <a:off x="216033" y="9233624"/>
+            <a:ext cx="853014" cy="804935"/>
+          </a:xfrm>
+          <a:custGeom>
+            <a:avLst/>
+            <a:gdLst/>
+            <a:ahLst/>
+            <a:cxnLst/>
+            <a:rect r="r" b="b" t="t" l="l"/>
+            <a:pathLst>
+              <a:path h="804935" w="853014">
+                <a:moveTo>
+                  <a:pt x="0" y="0"/>
+                </a:moveTo>
+                <a:lnTo>
+                  <a:pt x="853014" y="0"/>
+                </a:lnTo>
+                <a:lnTo>
+                  <a:pt x="853014" y="804935"/>
+                </a:lnTo>
+                <a:lnTo>
+                  <a:pt x="0" y="804935"/>
+                </a:lnTo>
+                <a:lnTo>
+                  <a:pt x="0" y="0"/>
+                </a:lnTo>
+                <a:close/>
+              </a:path>
+            </a:pathLst>
+          </a:custGeom>
+          <a:blipFill>
+            <a:blip r:embed="rId2">
+              <a:extLst>
+                <a:ext uri="{96DAC541-7B7A-43D3-8B79-37D633B846F1}">
+                  <asvg:svgBlip xmlns:asvg="http://schemas.microsoft.com/office/drawing/2016/SVG/main" r:embed="rId3"/>
+                </a:ext>
+              </a:extLst>
+            </a:blip>
+            <a:stretch>
+              <a:fillRect l="0" t="0" r="0" b="0"/>
+            </a:stretch>
+          </a:blipFill>
+        </p:spPr>
+      </p:sp>
+      <p:sp>
+        <p:nvSpPr>
+          <p:cNvPr name="Freeform 7" id="7"/>
+          <p:cNvSpPr/>
+          <p:nvPr/>
+        </p:nvSpPr>
+        <p:spPr>
+          <a:xfrm flipH="false" flipV="false" rot="-1120371">
+            <a:off x="14782440" y="9143990"/>
+            <a:ext cx="853014" cy="804935"/>
+          </a:xfrm>
+          <a:custGeom>
+            <a:avLst/>
+            <a:gdLst/>
+            <a:ahLst/>
+            <a:cxnLst/>
+            <a:rect r="r" b="b" t="t" l="l"/>
+            <a:pathLst>
+              <a:path h="804935" w="853014">
+                <a:moveTo>
+                  <a:pt x="0" y="0"/>
+                </a:moveTo>
+                <a:lnTo>
+                  <a:pt x="853015" y="0"/>
+                </a:lnTo>
+                <a:lnTo>
+                  <a:pt x="853015" y="804935"/>
+                </a:lnTo>
+                <a:lnTo>
+                  <a:pt x="0" y="804935"/>
+                </a:lnTo>
+                <a:lnTo>
+                  <a:pt x="0" y="0"/>
+                </a:lnTo>
+                <a:close/>
+              </a:path>
+            </a:pathLst>
+          </a:custGeom>
+          <a:blipFill>
+            <a:blip r:embed="rId2">
+              <a:extLst>
+                <a:ext uri="{96DAC541-7B7A-43D3-8B79-37D633B846F1}">
+                  <asvg:svgBlip xmlns:asvg="http://schemas.microsoft.com/office/drawing/2016/SVG/main" r:embed="rId3"/>
+                </a:ext>
+              </a:extLst>
+            </a:blip>
+            <a:stretch>
+              <a:fillRect l="0" t="0" r="0" b="0"/>
+            </a:stretch>
+          </a:blipFill>
+        </p:spPr>
+      </p:sp>
+      <p:sp>
+        <p:nvSpPr>
+          <p:cNvPr name="TextBox 8" id="8"/>
+          <p:cNvSpPr txBox="true"/>
+          <p:nvPr/>
+        </p:nvSpPr>
+        <p:spPr>
+          <a:xfrm rot="0">
+            <a:off x="1177872" y="562928"/>
+            <a:ext cx="15615530" cy="922020"/>
+          </a:xfrm>
+          <a:prstGeom prst="rect">
+            <a:avLst/>
+          </a:prstGeom>
+        </p:spPr>
+        <p:txBody>
+          <a:bodyPr anchor="t" rtlCol="false" tIns="0" lIns="0" bIns="0" rIns="0">
+            <a:spAutoFit/>
+          </a:bodyPr>
+          <a:lstStyle/>
+          <a:p>
+            <a:pPr algn="l">
+              <a:lnSpc>
+                <a:spcPts val="5939"/>
+              </a:lnSpc>
+            </a:pPr>
+            <a:r>
+              <a:rPr lang="en-US" sz="5999">
+                <a:solidFill>
+                  <a:srgbClr val="925000"/>
+                </a:solidFill>
+                <a:latin typeface="Funtastic"/>
+                <a:ea typeface="Funtastic"/>
+                <a:cs typeface="Funtastic"/>
+                <a:sym typeface="Funtastic"/>
+              </a:rPr>
+              <a:t>Hallazgos, conclusiones y recomendaciones</a:t>
+            </a:r>
+          </a:p>
+        </p:txBody>
+      </p:sp>
+      <p:sp>
+        <p:nvSpPr>
+          <p:cNvPr name="Freeform 9" id="9"/>
+          <p:cNvSpPr/>
+          <p:nvPr/>
+        </p:nvSpPr>
+        <p:spPr>
+          <a:xfrm flipH="false" flipV="false" rot="-1760014">
+            <a:off x="15274766" y="3117862"/>
+            <a:ext cx="3037270" cy="4277846"/>
+          </a:xfrm>
+          <a:custGeom>
+            <a:avLst/>
+            <a:gdLst/>
+            <a:ahLst/>
+            <a:cxnLst/>
+            <a:rect r="r" b="b" t="t" l="l"/>
+            <a:pathLst>
+              <a:path h="4277846" w="3037270">
+                <a:moveTo>
+                  <a:pt x="0" y="0"/>
+                </a:moveTo>
+                <a:lnTo>
+                  <a:pt x="3037271" y="0"/>
+                </a:lnTo>
+                <a:lnTo>
+                  <a:pt x="3037271" y="4277846"/>
+                </a:lnTo>
+                <a:lnTo>
+                  <a:pt x="0" y="4277846"/>
                 </a:lnTo>
                 <a:lnTo>
                   <a:pt x="0" y="0"/>
@@ -9416,14 +12003,14 @@
       </p:sp>
       <p:sp>
         <p:nvSpPr>
-          <p:cNvPr name="Freeform 4" id="4"/>
+          <p:cNvPr name="Freeform 10" id="10"/>
           <p:cNvSpPr/>
           <p:nvPr/>
         </p:nvSpPr>
         <p:spPr>
-          <a:xfrm flipH="false" flipV="false" rot="3783878">
-            <a:off x="11121286" y="1643093"/>
-            <a:ext cx="853014" cy="804935"/>
+          <a:xfrm flipH="false" flipV="false" rot="0">
+            <a:off x="684969" y="1937290"/>
+            <a:ext cx="7041597" cy="2906259"/>
           </a:xfrm>
           <a:custGeom>
             <a:avLst/>
@@ -9432,18 +12019,18 @@
             <a:cxnLst/>
             <a:rect r="r" b="b" t="t" l="l"/>
             <a:pathLst>
-              <a:path h="804935" w="853014">
+              <a:path h="2906259" w="7041597">
                 <a:moveTo>
                   <a:pt x="0" y="0"/>
                 </a:moveTo>
                 <a:lnTo>
-                  <a:pt x="853014" y="0"/>
-                </a:lnTo>
-                <a:lnTo>
-                  <a:pt x="853014" y="804935"/>
-                </a:lnTo>
-                <a:lnTo>
-                  <a:pt x="0" y="804935"/>
+                  <a:pt x="7041597" y="0"/>
+                </a:lnTo>
+                <a:lnTo>
+                  <a:pt x="7041597" y="2906259"/>
+                </a:lnTo>
+                <a:lnTo>
+                  <a:pt x="0" y="2906259"/>
                 </a:lnTo>
                 <a:lnTo>
                   <a:pt x="0" y="0"/>
@@ -9468,14 +12055,80 @@
       </p:sp>
       <p:sp>
         <p:nvSpPr>
-          <p:cNvPr name="Freeform 5" id="5"/>
+          <p:cNvPr name="TextBox 11" id="11"/>
+          <p:cNvSpPr txBox="true"/>
+          <p:nvPr/>
+        </p:nvSpPr>
+        <p:spPr>
+          <a:xfrm rot="0">
+            <a:off x="875737" y="2365848"/>
+            <a:ext cx="6660060" cy="1868169"/>
+          </a:xfrm>
+          <a:prstGeom prst="rect">
+            <a:avLst/>
+          </a:prstGeom>
+        </p:spPr>
+        <p:txBody>
+          <a:bodyPr anchor="t" rtlCol="false" tIns="0" lIns="0" bIns="0" rIns="0">
+            <a:spAutoFit/>
+          </a:bodyPr>
+          <a:lstStyle/>
+          <a:p>
+            <a:pPr algn="ctr">
+              <a:lnSpc>
+                <a:spcPts val="6580"/>
+              </a:lnSpc>
+              <a:spcBef>
+                <a:spcPct val="0"/>
+              </a:spcBef>
+            </a:pPr>
+            <a:r>
+              <a:rPr lang="en-US" sz="4700">
+                <a:solidFill>
+                  <a:srgbClr val="BC8362"/>
+                </a:solidFill>
+                <a:latin typeface="Funtastic"/>
+                <a:ea typeface="Funtastic"/>
+                <a:cs typeface="Funtastic"/>
+                <a:sym typeface="Funtastic"/>
+              </a:rPr>
+              <a:t>Actualizaciones Críticas</a:t>
+            </a:r>
+          </a:p>
+          <a:p>
+            <a:pPr algn="ctr">
+              <a:lnSpc>
+                <a:spcPts val="3780"/>
+              </a:lnSpc>
+              <a:spcBef>
+                <a:spcPct val="0"/>
+              </a:spcBef>
+            </a:pPr>
+            <a:r>
+              <a:rPr lang="en-US" b="true" sz="2700">
+                <a:solidFill>
+                  <a:srgbClr val="BC8362"/>
+                </a:solidFill>
+                <a:latin typeface="Sukar Bold"/>
+                <a:ea typeface="Sukar Bold"/>
+                <a:cs typeface="Sukar Bold"/>
+                <a:sym typeface="Sukar Bold"/>
+              </a:rPr>
+              <a:t>La variable de tiempo sin actualizar influye de manera inversa en la retención del rating.</a:t>
+            </a:r>
+          </a:p>
+        </p:txBody>
+      </p:sp>
+      <p:sp>
+        <p:nvSpPr>
+          <p:cNvPr name="Freeform 12" id="12"/>
           <p:cNvSpPr/>
           <p:nvPr/>
         </p:nvSpPr>
         <p:spPr>
-          <a:xfrm flipH="false" flipV="false" rot="-2526217">
-            <a:off x="16530916" y="8023663"/>
-            <a:ext cx="1456769" cy="1374660"/>
+          <a:xfrm flipH="false" flipV="false" rot="0">
+            <a:off x="7855248" y="1937290"/>
+            <a:ext cx="7041597" cy="2906259"/>
           </a:xfrm>
           <a:custGeom>
             <a:avLst/>
@@ -9484,18 +12137,18 @@
             <a:cxnLst/>
             <a:rect r="r" b="b" t="t" l="l"/>
             <a:pathLst>
-              <a:path h="1374660" w="1456769">
+              <a:path h="2906259" w="7041597">
                 <a:moveTo>
                   <a:pt x="0" y="0"/>
                 </a:moveTo>
                 <a:lnTo>
-                  <a:pt x="1456768" y="0"/>
-                </a:lnTo>
-                <a:lnTo>
-                  <a:pt x="1456768" y="1374660"/>
-                </a:lnTo>
-                <a:lnTo>
-                  <a:pt x="0" y="1374660"/>
+                  <a:pt x="7041597" y="0"/>
+                </a:lnTo>
+                <a:lnTo>
+                  <a:pt x="7041597" y="2906259"/>
+                </a:lnTo>
+                <a:lnTo>
+                  <a:pt x="0" y="2906259"/>
                 </a:lnTo>
                 <a:lnTo>
                   <a:pt x="0" y="0"/>
@@ -9520,14 +12173,92 @@
       </p:sp>
       <p:sp>
         <p:nvSpPr>
-          <p:cNvPr name="Freeform 6" id="6"/>
+          <p:cNvPr name="TextBox 13" id="13"/>
+          <p:cNvSpPr txBox="true"/>
+          <p:nvPr/>
+        </p:nvSpPr>
+        <p:spPr>
+          <a:xfrm rot="0">
+            <a:off x="8046017" y="2127723"/>
+            <a:ext cx="6660060" cy="2344419"/>
+          </a:xfrm>
+          <a:prstGeom prst="rect">
+            <a:avLst/>
+          </a:prstGeom>
+        </p:spPr>
+        <p:txBody>
+          <a:bodyPr anchor="t" rtlCol="false" tIns="0" lIns="0" bIns="0" rIns="0">
+            <a:spAutoFit/>
+          </a:bodyPr>
+          <a:lstStyle/>
+          <a:p>
+            <a:pPr algn="ctr">
+              <a:lnSpc>
+                <a:spcPts val="6580"/>
+              </a:lnSpc>
+              <a:spcBef>
+                <a:spcPct val="0"/>
+              </a:spcBef>
+            </a:pPr>
+            <a:r>
+              <a:rPr lang="en-US" sz="4700">
+                <a:solidFill>
+                  <a:srgbClr val="BC8362"/>
+                </a:solidFill>
+                <a:latin typeface="Funtastic"/>
+                <a:ea typeface="Funtastic"/>
+                <a:cs typeface="Funtastic"/>
+                <a:sym typeface="Funtastic"/>
+              </a:rPr>
+              <a:t>Mone</a:t>
+            </a:r>
+            <a:r>
+              <a:rPr lang="en-US" sz="4700">
+                <a:solidFill>
+                  <a:srgbClr val="BC8362"/>
+                </a:solidFill>
+                <a:latin typeface="Funtastic"/>
+                <a:ea typeface="Funtastic"/>
+                <a:cs typeface="Funtastic"/>
+                <a:sym typeface="Funtastic"/>
+              </a:rPr>
+              <a:t>tización Híbrida</a:t>
+            </a:r>
+          </a:p>
+          <a:p>
+            <a:pPr algn="ctr">
+              <a:lnSpc>
+                <a:spcPts val="3780"/>
+              </a:lnSpc>
+              <a:spcBef>
+                <a:spcPct val="0"/>
+              </a:spcBef>
+            </a:pPr>
+            <a:r>
+              <a:rPr lang="en-US" b="true" sz="2700">
+                <a:solidFill>
+                  <a:srgbClr val="BC8362"/>
+                </a:solidFill>
+                <a:latin typeface="Sukar Bold"/>
+                <a:ea typeface="Sukar Bold"/>
+                <a:cs typeface="Sukar Bold"/>
+                <a:sym typeface="Sukar Bold"/>
+              </a:rPr>
+              <a:t>El mercado gratuito domina el volumen, pero los modelos de pago aseguran mayor estabilidad de reseñas.</a:t>
+            </a:r>
+          </a:p>
+        </p:txBody>
+      </p:sp>
+      <p:sp>
+        <p:nvSpPr>
+          <p:cNvPr name="Freeform 14" id="14"/>
           <p:cNvSpPr/>
           <p:nvPr/>
         </p:nvSpPr>
         <p:spPr>
-          <a:xfrm flipH="false" flipV="false" rot="-2526217">
-            <a:off x="7428821" y="8940779"/>
-            <a:ext cx="2246425" cy="2119809"/>
+          <a:xfrm flipH="false" flipV="false" rot="0">
+            <a:off x="684969" y="7420632"/>
+            <a:ext cx="6072303" cy="2506205"/>
           </a:xfrm>
           <a:custGeom>
             <a:avLst/>
@@ -9536,18 +12267,18 @@
             <a:cxnLst/>
             <a:rect r="r" b="b" t="t" l="l"/>
             <a:pathLst>
-              <a:path h="2119809" w="2246425">
+              <a:path h="2506205" w="6072303">
                 <a:moveTo>
                   <a:pt x="0" y="0"/>
                 </a:moveTo>
                 <a:lnTo>
-                  <a:pt x="2246425" y="0"/>
-                </a:lnTo>
-                <a:lnTo>
-                  <a:pt x="2246425" y="2119809"/>
-                </a:lnTo>
-                <a:lnTo>
-                  <a:pt x="0" y="2119809"/>
+                  <a:pt x="6072302" y="0"/>
+                </a:lnTo>
+                <a:lnTo>
+                  <a:pt x="6072302" y="2506204"/>
+                </a:lnTo>
+                <a:lnTo>
+                  <a:pt x="0" y="2506204"/>
                 </a:lnTo>
                 <a:lnTo>
                   <a:pt x="0" y="0"/>
@@ -9572,14 +12303,14 @@
       </p:sp>
       <p:sp>
         <p:nvSpPr>
-          <p:cNvPr name="Freeform 7" id="7"/>
+          <p:cNvPr name="Freeform 15" id="15"/>
           <p:cNvSpPr/>
           <p:nvPr/>
         </p:nvSpPr>
         <p:spPr>
-          <a:xfrm flipH="false" flipV="false" rot="-2526217">
-            <a:off x="808695" y="4475822"/>
-            <a:ext cx="853014" cy="804935"/>
+          <a:xfrm flipH="false" flipV="false" rot="0">
+            <a:off x="6107849" y="7420632"/>
+            <a:ext cx="6072303" cy="2506205"/>
           </a:xfrm>
           <a:custGeom>
             <a:avLst/>
@@ -9588,18 +12319,18 @@
             <a:cxnLst/>
             <a:rect r="r" b="b" t="t" l="l"/>
             <a:pathLst>
-              <a:path h="804935" w="853014">
+              <a:path h="2506205" w="6072303">
                 <a:moveTo>
                   <a:pt x="0" y="0"/>
                 </a:moveTo>
                 <a:lnTo>
-                  <a:pt x="853014" y="0"/>
-                </a:lnTo>
-                <a:lnTo>
-                  <a:pt x="853014" y="804935"/>
-                </a:lnTo>
-                <a:lnTo>
-                  <a:pt x="0" y="804935"/>
+                  <a:pt x="6072302" y="0"/>
+                </a:lnTo>
+                <a:lnTo>
+                  <a:pt x="6072302" y="2506204"/>
+                </a:lnTo>
+                <a:lnTo>
+                  <a:pt x="0" y="2506204"/>
                 </a:lnTo>
                 <a:lnTo>
                   <a:pt x="0" y="0"/>
@@ -9624,14 +12355,66 @@
       </p:sp>
       <p:sp>
         <p:nvSpPr>
-          <p:cNvPr name="TextBox 8" id="8"/>
+          <p:cNvPr name="Freeform 16" id="16"/>
+          <p:cNvSpPr/>
+          <p:nvPr/>
+        </p:nvSpPr>
+        <p:spPr>
+          <a:xfrm flipH="false" flipV="false" rot="0">
+            <a:off x="11530729" y="7420632"/>
+            <a:ext cx="6072303" cy="2506205"/>
+          </a:xfrm>
+          <a:custGeom>
+            <a:avLst/>
+            <a:gdLst/>
+            <a:ahLst/>
+            <a:cxnLst/>
+            <a:rect r="r" b="b" t="t" l="l"/>
+            <a:pathLst>
+              <a:path h="2506205" w="6072303">
+                <a:moveTo>
+                  <a:pt x="0" y="0"/>
+                </a:moveTo>
+                <a:lnTo>
+                  <a:pt x="6072302" y="0"/>
+                </a:lnTo>
+                <a:lnTo>
+                  <a:pt x="6072302" y="2506204"/>
+                </a:lnTo>
+                <a:lnTo>
+                  <a:pt x="0" y="2506204"/>
+                </a:lnTo>
+                <a:lnTo>
+                  <a:pt x="0" y="0"/>
+                </a:lnTo>
+                <a:close/>
+              </a:path>
+            </a:pathLst>
+          </a:custGeom>
+          <a:blipFill>
+            <a:blip r:embed="rId6">
+              <a:extLst>
+                <a:ext uri="{96DAC541-7B7A-43D3-8B79-37D633B846F1}">
+                  <asvg:svgBlip xmlns:asvg="http://schemas.microsoft.com/office/drawing/2016/SVG/main" r:embed="rId7"/>
+                </a:ext>
+              </a:extLst>
+            </a:blip>
+            <a:stretch>
+              <a:fillRect l="0" t="0" r="0" b="0"/>
+            </a:stretch>
+          </a:blipFill>
+        </p:spPr>
+      </p:sp>
+      <p:sp>
+        <p:nvSpPr>
+          <p:cNvPr name="TextBox 17" id="17"/>
           <p:cNvSpPr txBox="true"/>
           <p:nvPr/>
         </p:nvSpPr>
         <p:spPr>
           <a:xfrm rot="0">
-            <a:off x="2674207" y="-9948"/>
-            <a:ext cx="10476931" cy="1674495"/>
+            <a:off x="819418" y="7846366"/>
+            <a:ext cx="16649164" cy="1652270"/>
           </a:xfrm>
           <a:prstGeom prst="rect">
             <a:avLst/>
@@ -9643,13 +12426,82 @@
           </a:bodyPr>
           <a:lstStyle/>
           <a:p>
-            <a:pPr algn="l">
+            <a:pPr algn="ctr">
               <a:lnSpc>
-                <a:spcPts val="5939"/>
+                <a:spcPts val="4480"/>
               </a:lnSpc>
+              <a:spcBef>
+                <a:spcPct val="0"/>
+              </a:spcBef>
             </a:pPr>
             <a:r>
-              <a:rPr lang="en-US" sz="5999">
+              <a:rPr lang="en-US" b="true" sz="3200">
+                <a:solidFill>
+                  <a:srgbClr val="BC8362"/>
+                </a:solidFill>
+                <a:latin typeface="Sukar Bold"/>
+                <a:ea typeface="Sukar Bold"/>
+                <a:cs typeface="Sukar Bold"/>
+                <a:sym typeface="Sukar Bold"/>
+              </a:rPr>
+              <a:t>Para desarrolladores: Entender qué características contribuyen a una alta calificación puede guiar el diseño y la mejora de las aplicaciones.</a:t>
+            </a:r>
+          </a:p>
+          <a:p>
+            <a:pPr algn="ctr">
+              <a:lnSpc>
+                <a:spcPts val="4480"/>
+              </a:lnSpc>
+              <a:spcBef>
+                <a:spcPct val="0"/>
+              </a:spcBef>
+            </a:pPr>
+            <a:r>
+              <a:rPr lang="en-US" b="true" sz="3200">
+                <a:solidFill>
+                  <a:srgbClr val="BC8362"/>
+                </a:solidFill>
+                <a:latin typeface="Sukar Bold"/>
+                <a:ea typeface="Sukar Bold"/>
+                <a:cs typeface="Sukar Bold"/>
+                <a:sym typeface="Sukar Bold"/>
+              </a:rPr>
+              <a:t>Para la plataforma: Se pueden usar estos modelos para destacar aplicaciones de buena calidad.</a:t>
+            </a:r>
+          </a:p>
+        </p:txBody>
+      </p:sp>
+      <p:sp>
+        <p:nvSpPr>
+          <p:cNvPr name="TextBox 18" id="18"/>
+          <p:cNvSpPr txBox="true"/>
+          <p:nvPr/>
+        </p:nvSpPr>
+        <p:spPr>
+          <a:xfrm rot="0">
+            <a:off x="684969" y="5096554"/>
+            <a:ext cx="14211876" cy="2056129"/>
+          </a:xfrm>
+          <a:prstGeom prst="rect">
+            <a:avLst/>
+          </a:prstGeom>
+        </p:spPr>
+        <p:txBody>
+          <a:bodyPr anchor="t" rtlCol="false" tIns="0" lIns="0" bIns="0" rIns="0">
+            <a:spAutoFit/>
+          </a:bodyPr>
+          <a:lstStyle/>
+          <a:p>
+            <a:pPr algn="ctr">
+              <a:lnSpc>
+                <a:spcPts val="5320"/>
+              </a:lnSpc>
+              <a:spcBef>
+                <a:spcPct val="0"/>
+              </a:spcBef>
+            </a:pPr>
+            <a:r>
+              <a:rPr lang="en-US" sz="3800">
                 <a:solidFill>
                   <a:srgbClr val="925000"/>
                 </a:solidFill>
@@ -9658,102 +12510,10 @@
                 <a:cs typeface="Funtastic"/>
                 <a:sym typeface="Funtastic"/>
               </a:rPr>
-              <a:t>Resultados del proyecto (clustering)</a:t>
+              <a:t>Efectivamente, podemos predecir la calidad de una aplicación utilizando las características de sus metadatos y herramientas de Machine Learning.</a:t>
             </a:r>
           </a:p>
         </p:txBody>
-      </p:sp>
-      <p:sp>
-        <p:nvSpPr>
-          <p:cNvPr name="Freeform 9" id="9"/>
-          <p:cNvSpPr/>
-          <p:nvPr/>
-        </p:nvSpPr>
-        <p:spPr>
-          <a:xfrm flipH="false" flipV="false" rot="0">
-            <a:off x="530245" y="2458565"/>
-            <a:ext cx="8114848" cy="6799735"/>
-          </a:xfrm>
-          <a:custGeom>
-            <a:avLst/>
-            <a:gdLst/>
-            <a:ahLst/>
-            <a:cxnLst/>
-            <a:rect r="r" b="b" t="t" l="l"/>
-            <a:pathLst>
-              <a:path h="6799735" w="8114848">
-                <a:moveTo>
-                  <a:pt x="0" y="0"/>
-                </a:moveTo>
-                <a:lnTo>
-                  <a:pt x="8114848" y="0"/>
-                </a:lnTo>
-                <a:lnTo>
-                  <a:pt x="8114848" y="6799735"/>
-                </a:lnTo>
-                <a:lnTo>
-                  <a:pt x="0" y="6799735"/>
-                </a:lnTo>
-                <a:lnTo>
-                  <a:pt x="0" y="0"/>
-                </a:lnTo>
-                <a:close/>
-              </a:path>
-            </a:pathLst>
-          </a:custGeom>
-          <a:blipFill>
-            <a:blip r:embed="rId8"/>
-            <a:stretch>
-              <a:fillRect l="0" t="0" r="0" b="0"/>
-            </a:stretch>
-          </a:blipFill>
-        </p:spPr>
-      </p:sp>
-      <p:sp>
-        <p:nvSpPr>
-          <p:cNvPr name="Freeform 10" id="10"/>
-          <p:cNvSpPr/>
-          <p:nvPr/>
-        </p:nvSpPr>
-        <p:spPr>
-          <a:xfrm flipH="false" flipV="false" rot="0">
-            <a:off x="8890415" y="2458565"/>
-            <a:ext cx="8521448" cy="6799735"/>
-          </a:xfrm>
-          <a:custGeom>
-            <a:avLst/>
-            <a:gdLst/>
-            <a:ahLst/>
-            <a:cxnLst/>
-            <a:rect r="r" b="b" t="t" l="l"/>
-            <a:pathLst>
-              <a:path h="6799735" w="8521448">
-                <a:moveTo>
-                  <a:pt x="0" y="0"/>
-                </a:moveTo>
-                <a:lnTo>
-                  <a:pt x="8521448" y="0"/>
-                </a:lnTo>
-                <a:lnTo>
-                  <a:pt x="8521448" y="6799735"/>
-                </a:lnTo>
-                <a:lnTo>
-                  <a:pt x="0" y="6799735"/>
-                </a:lnTo>
-                <a:lnTo>
-                  <a:pt x="0" y="0"/>
-                </a:lnTo>
-                <a:close/>
-              </a:path>
-            </a:pathLst>
-          </a:custGeom>
-          <a:blipFill>
-            <a:blip r:embed="rId9"/>
-            <a:stretch>
-              <a:fillRect l="-1276" t="0" r="-1276" b="0"/>
-            </a:stretch>
-          </a:blipFill>
-        </p:spPr>
       </p:sp>
     </p:spTree>
   </p:cSld>
